--- a/lecons/USA/Practical Geography/14_USA_PRA_QT03c_Measures_of_Association_Spearman.pptx
+++ b/lecons/USA/Practical Geography/14_USA_PRA_QT03c_Measures_of_Association_Spearman.pptx
@@ -68,9 +68,10 @@
     <p:sldId id="316" r:id="rId62"/>
     <p:sldId id="317" r:id="rId63"/>
     <p:sldId id="318" r:id="rId64"/>
+    <p:sldId id="319" r:id="rId65"/>
   </p:sldIdLst>
   <p:notesMasterIdLst>
-    <p:notesMasterId r:id="rId65"/>
+    <p:notesMasterId r:id="rId66"/>
   </p:notesMasterIdLst>
   <p:sldSz cx="12192000" cy="6858000"/>
   <p:notesSz cx="6858000" cy="12192000"/>
@@ -3380,7 +3381,7 @@
           <a:p>
             <a:r>
               <a:rPr lang="en-US" dirty="0"/>
-              <a:t>Let us copy Meaning and Uses of Spearman's Rank Correlation. Spearman's rank correlation tells us the following. Copy the point on Existence on the left, then draw the diagram on the right: a negative correlation. Give it a title and label it clearly.</a:t>
+              <a:t>Let us copy Meaning and Uses of Spearman's Rank Correlation. Spearman's rank correlation shows the following. Copy the point on Existence and strength on the left, then draw the diagram on the right: types of correlation. Give it a title and label it clearly.</a:t>
             </a:r>
             <a:endParaRPr lang="en-US" dirty="0"/>
           </a:p>
@@ -3556,7 +3557,7 @@
           <a:p>
             <a:r>
               <a:rPr lang="en-US" dirty="0"/>
-              <a:t>We continue with Meaning and Uses of Spearman's Rank Correlation. On this slide we have Strength and Direction. Write each point on a new line, with the key term first, and explain it in your own words when we revise. When you finish, we go to the next slide.</a:t>
+              <a:t>We continue with Meaning and Uses of Spearman's Rank Correlation. Copy the point on Direction: write the key term first, then its explanation.</a:t>
             </a:r>
             <a:endParaRPr lang="en-US" dirty="0"/>
           </a:p>
@@ -3644,7 +3645,7 @@
           <a:p>
             <a:r>
               <a:rPr lang="en-US" dirty="0"/>
-              <a:t>We continue with Meaning and Uses of Spearman's Rank Correlation. On this slide we have Use of ranks. Write each point on a new line, with the key term first, and explain it in your own words when we revise.</a:t>
+              <a:t>We continue with Meaning and Uses of Spearman's Rank Correlation. Copy the point on Use of ranks: write the key term first, then its explanation.</a:t>
             </a:r>
             <a:endParaRPr lang="en-US" dirty="0"/>
           </a:p>
@@ -3732,7 +3733,7 @@
           <a:p>
             <a:r>
               <a:rPr lang="en-US" dirty="0"/>
-              <a:t>Let us copy Formula and Steps of Calculation. Rs is calculated with the following steps. Copy the point on Formula on the left, then draw the diagram on the right: a simple Spearman table. Give it a title and label it clearly.</a:t>
+              <a:t>Let us copy Formula and Steps of Calculation. Rs is calculated in the following steps. Copy the point on Formula on the left, then draw the diagram on the right: spearman's formula. Give it a title and label it clearly.</a:t>
             </a:r>
             <a:endParaRPr lang="en-US" dirty="0"/>
           </a:p>
@@ -3820,7 +3821,7 @@
           <a:p>
             <a:r>
               <a:rPr lang="en-US" dirty="0"/>
-              <a:t>We continue with Formula and Steps of Calculation. On this slide we have Steps. Write each point on a new line, with the key term first, and explain it in your own words when we revise. When you finish, we go to the next slide.</a:t>
+              <a:t>We continue with Formula and Steps of Calculation. Copy the point on Stating the hypothesis and ranking: write the key term first, then its explanation.</a:t>
             </a:r>
             <a:endParaRPr lang="en-US" dirty="0"/>
           </a:p>
@@ -3908,7 +3909,7 @@
           <a:p>
             <a:r>
               <a:rPr lang="en-US" dirty="0"/>
-              <a:t>We continue with Formula and Steps of Calculation. On this slide we have Tied ranks. Write each point on a new line, with the key term first, and explain it in your own words when we revise.</a:t>
+              <a:t>We continue with Formula and Steps of Calculation. Copy the point on Calculating: write the key term first, then its explanation.</a:t>
             </a:r>
             <a:endParaRPr lang="en-US" dirty="0"/>
           </a:p>
@@ -3996,7 +3997,7 @@
           <a:p>
             <a:r>
               <a:rPr lang="en-US" dirty="0"/>
-              <a:t>Let us copy Worked Example: Slope Angle and Soil Depth. The worked example is solved as follows. On this slide we have Null hypothesis. Write each point on a new line, with the key term first, and explain it in your own words when we revise.</a:t>
+              <a:t>We continue with Formula and Steps of Calculation. Copy the point on Tied ranks: write the key term first, then its explanation.</a:t>
             </a:r>
             <a:endParaRPr lang="en-US" dirty="0"/>
           </a:p>
@@ -4084,7 +4085,7 @@
           <a:p>
             <a:r>
               <a:rPr lang="en-US" dirty="0"/>
-              <a:t>Copy the point on Table on the left, then draw the diagram on the right: slope angle and soil depth. Give it a title and label it clearly.</a:t>
+              <a:t>Let us copy Worked Example: Slope Angle and Soil Depth. The worked example is solved as follows. Copy the point on Hypothesis and data on the left, then draw the diagram on the right: the calculation table. Give it a title and label it clearly.</a:t>
             </a:r>
             <a:endParaRPr lang="en-US" dirty="0"/>
           </a:p>
@@ -4172,7 +4173,7 @@
           <a:p>
             <a:r>
               <a:rPr lang="en-US" dirty="0"/>
-              <a:t>We continue with Worked Example: Slope Angle and Soil Depth. On this slide we have Result and Interpretation. Write each point on a new line, with the key term first, and explain it in your own words when we revise.</a:t>
+              <a:t>We continue with Worked Example: Slope Angle and Soil Depth. Copy the point on Calculation: write the key term first, then its explanation.</a:t>
             </a:r>
             <a:endParaRPr lang="en-US" dirty="0"/>
           </a:p>
@@ -4260,7 +4261,7 @@
           <a:p>
             <a:r>
               <a:rPr lang="en-US" dirty="0"/>
-              <a:t>Let us copy Interpretation and Significance. Rs is interpreted and tested as follows. On this slide we have Scale. Write each point on a new line, with the key term first, and explain it in your own words when we revise. When you finish, we go to the next slide.</a:t>
+              <a:t>We continue with Worked Example: Slope Angle and Soil Depth. Copy the point on Interpretation: write the key term first, then its explanation.</a:t>
             </a:r>
             <a:endParaRPr lang="en-US" dirty="0"/>
           </a:p>
@@ -4348,7 +4349,7 @@
           <a:p>
             <a:r>
               <a:rPr lang="en-US" dirty="0"/>
-              <a:t>We continue with Interpretation and Significance. Copy this carefully.</a:t>
+              <a:t>Let us copy Interpretation and Significance. Rs is interpreted and tested as follows. Copy the point on Positive values on the left, then draw the diagram on the right: the scale of Rs. Give it a title and label it clearly.</a:t>
             </a:r>
             <a:endParaRPr lang="en-US" dirty="0"/>
           </a:p>
@@ -4524,7 +4525,7 @@
           <a:p>
             <a:r>
               <a:rPr lang="en-US" dirty="0"/>
-              <a:t>Copy the point on Significance test on the left, then draw the diagram on the right: interpreting Rs. Give it a title and label it clearly.</a:t>
+              <a:t>We continue with Interpretation and Significance. Copy the point on Negative values: write the key term first, then its explanation.</a:t>
             </a:r>
             <a:endParaRPr lang="en-US" dirty="0"/>
           </a:p>
@@ -4612,7 +4613,7 @@
           <a:p>
             <a:r>
               <a:rPr lang="en-US" dirty="0"/>
-              <a:t>We continue with Interpretation and Significance. On this slide we have Application and Conclusion. Write each point on a new line, with the key term first, and explain it in your own words when we revise.</a:t>
+              <a:t>We continue with Interpretation and Significance. Copy the point on Significance test: write the key term first, then its explanation.</a:t>
             </a:r>
             <a:endParaRPr lang="en-US" dirty="0"/>
           </a:p>
@@ -4700,7 +4701,7 @@
           <a:p>
             <a:r>
               <a:rPr lang="en-US" dirty="0"/>
-              <a:t>Now let us check what you have understood. Question 1: State a null hypothesis for rainfall and crop yield. Answer in your exercise book.</a:t>
+              <a:t>We continue with Interpretation and Significance. Copy the point on Application and conclusion: write the key term first, then its explanation.</a:t>
             </a:r>
             <a:endParaRPr lang="en-US" dirty="0"/>
           </a:p>
@@ -4788,7 +4789,7 @@
           <a:p>
             <a:r>
               <a:rPr lang="en-US" dirty="0"/>
-              <a:t>The expected answer is: h0: there is no significant relationship between annual rainfall and crop yield. If you got it right, well done.</a:t>
+              <a:t>Now let us check what you have understood. Question 1: State a null hypothesis for rainfall and crop yield. Answer in your exercise book.</a:t>
             </a:r>
             <a:endParaRPr lang="en-US" dirty="0"/>
           </a:p>
@@ -4876,7 +4877,7 @@
           <a:p>
             <a:r>
               <a:rPr lang="en-US" dirty="0"/>
-              <a:t>Now let us check what you have understood. Question 2: Six pairs give Σd² = 4. Calculate Rs and interpret it. Answer in your exercise book.</a:t>
+              <a:t>The expected answer is: h0: there is no significant relationship between annual rainfall and crop yield. If you got it right, well done.</a:t>
             </a:r>
             <a:endParaRPr lang="en-US" dirty="0"/>
           </a:p>
@@ -4964,7 +4965,7 @@
           <a:p>
             <a:r>
               <a:rPr lang="en-US" dirty="0"/>
-              <a:t>The expected answer is: rs = 1 − 24 ÷ 210 ≈ +0.89: a strong positive correlation. If you got it right, well done.</a:t>
+              <a:t>Now let us check what you have understood. Question 2: Six pairs give Σd² = 4. Calculate Rs and interpret it. Answer in your exercise book.</a:t>
             </a:r>
             <a:endParaRPr lang="en-US" dirty="0"/>
           </a:p>
@@ -5052,7 +5053,7 @@
           <a:p>
             <a:r>
               <a:rPr lang="en-US" dirty="0"/>
-              <a:t>For those who need more practice, fill in the blanks in your exercise book. The answers are: number 1, +1; number 2, no; number 3, n.</a:t>
+              <a:t>The expected answer is: rs = 1 − 24 ÷ 210 ≈ +0.89: a strong positive correlation. If you got it right, well done.</a:t>
             </a:r>
             <a:endParaRPr lang="en-US" dirty="0"/>
           </a:p>
@@ -5140,7 +5141,7 @@
           <a:p>
             <a:r>
               <a:rPr lang="en-US" dirty="0"/>
-              <a:t>For your homework: Name three types of graphs. We shall correct it at the beginning of our next lesson.</a:t>
+              <a:t>For those who need more practice, fill in the blanks in your exercise book. The answers are: number 1, +1; number 2, no; number 3, n.</a:t>
             </a:r>
             <a:endParaRPr lang="en-US" dirty="0"/>
           </a:p>
@@ -5228,7 +5229,7 @@
           <a:p>
             <a:r>
               <a:rPr lang="en-US" dirty="0"/>
-              <a:t>Our next lesson will be on Quantitative Techniques 4: Plotting and Interpreting Graphical Tools. Thank you for your attention, and see you next time.</a:t>
+              <a:t>For your homework: Name three types of graphs. We shall correct it at the beginning of our next lesson.</a:t>
             </a:r>
             <a:endParaRPr lang="en-US" dirty="0"/>
           </a:p>
@@ -5316,7 +5317,7 @@
           <a:p>
             <a:r>
               <a:rPr lang="en-US" dirty="0"/>
-              <a:t>Let us play the bilingual game. I say a word in English, and you give me the French word. Then we do the reverse.</a:t>
+              <a:t>Our next lesson will be on Quantitative Techniques 4: Plotting and Interpreting Graphical Tools. Thank you for your attention, and see you next time.</a:t>
             </a:r>
             <a:endParaRPr lang="en-US" dirty="0"/>
           </a:p>
@@ -5492,7 +5493,7 @@
           <a:p>
             <a:r>
               <a:rPr lang="en-US" dirty="0"/>
-              <a:t>I record this information in the official logbook of the class after the lesson.</a:t>
+              <a:t>Let us play the bilingual game. I say a word in English, and you give me the French word. Then we do the reverse.</a:t>
             </a:r>
             <a:endParaRPr lang="en-US" dirty="0"/>
           </a:p>
@@ -5580,7 +5581,7 @@
           <a:p>
             <a:r>
               <a:rPr lang="en-US" dirty="0"/>
-              <a:t>I complete the second page of the logbook: the matter taught, the evaluation, the homework and the attendance.</a:t>
+              <a:t>I record this information in the official logbook of the class after the lesson.</a:t>
             </a:r>
             <a:endParaRPr lang="en-US" dirty="0"/>
           </a:p>
@@ -5668,7 +5669,7 @@
           <a:p>
             <a:r>
               <a:rPr lang="en-US" dirty="0"/>
-              <a:t>This slide is for me, the teacher: it gives the timing of the lesson and what to do if the projector is not available.</a:t>
+              <a:t>I complete the second page of the logbook: the matter taught, the evaluation, the homework and the attendance.</a:t>
             </a:r>
             <a:endParaRPr lang="en-US" dirty="0"/>
           </a:p>
@@ -5756,7 +5757,7 @@
           <a:p>
             <a:r>
               <a:rPr lang="en-US" dirty="0"/>
-              <a:t>These are the references and picture credits used to prepare this lesson.</a:t>
+              <a:t>This slide is for me, the teacher: it gives the timing of the lesson and what to do if the projector is not available.</a:t>
             </a:r>
             <a:endParaRPr lang="en-US" dirty="0"/>
           </a:p>
@@ -5780,6 +5781,94 @@
             <a:fld id="{F7021451-1387-4CA6-816F-3879F97B5CBC}" type="slidenum">
               <a:rPr lang="en-US"/>
               <a:t>63</a:t>
+            </a:fld>
+            <a:endParaRPr lang="en-US"/>
+          </a:p>
+        </p:txBody>
+      </p:sp>
+    </p:spTree>
+    <p:extLst>
+      <p:ext uri="{BB962C8B-B14F-4D97-AF65-F5344CB8AC3E}">
+        <p14:creationId xmlns:p14="http://schemas.microsoft.com/office/powerpoint/2010/main" val="1024086991"/>
+      </p:ext>
+    </p:extLst>
+  </p:cSld>
+  <p:clrMapOvr>
+    <a:masterClrMapping/>
+  </p:clrMapOvr>
+</p:notes>
+</file>
+
+<file path=ppt/notesSlides/notesSlide64.xml><?xml version="1.0" encoding="utf-8"?>
+<p:notes xmlns:a="http://schemas.openxmlformats.org/drawingml/2006/main" xmlns:r="http://schemas.openxmlformats.org/officeDocument/2006/relationships" xmlns:p="http://schemas.openxmlformats.org/presentationml/2006/main">
+  <p:cSld>
+    <p:spTree>
+      <p:nvGrpSpPr>
+        <p:cNvPr id="1" name=""/>
+        <p:cNvGrpSpPr/>
+        <p:nvPr/>
+      </p:nvGrpSpPr>
+      <p:grpSpPr>
+        <a:xfrm>
+          <a:off x="0" y="0"/>
+          <a:ext cx="0" cy="0"/>
+          <a:chOff x="0" y="0"/>
+          <a:chExt cx="0" cy="0"/>
+        </a:xfrm>
+      </p:grpSpPr>
+      <p:sp>
+        <p:nvSpPr>
+          <p:cNvPr id="2" name="Slide Image Placeholder 1"/>
+          <p:cNvSpPr>
+            <a:spLocks noGrp="1" noRot="1" noChangeAspect="1"/>
+          </p:cNvSpPr>
+          <p:nvPr>
+            <p:ph type="sldImg"/>
+          </p:nvPr>
+        </p:nvSpPr>
+        <p:spPr/>
+      </p:sp>
+      <p:sp>
+        <p:nvSpPr>
+          <p:cNvPr id="3" name="Notes Placeholder 2"/>
+          <p:cNvSpPr>
+            <a:spLocks noGrp="1"/>
+          </p:cNvSpPr>
+          <p:nvPr>
+            <p:ph type="body" idx="1"/>
+          </p:nvPr>
+        </p:nvSpPr>
+        <p:spPr/>
+        <p:txBody>
+          <a:bodyPr/>
+          <a:lstStyle/>
+          <a:p>
+            <a:r>
+              <a:rPr lang="en-US" dirty="0"/>
+              <a:t>These are the references and picture credits used to prepare this lesson.</a:t>
+            </a:r>
+            <a:endParaRPr lang="en-US" dirty="0"/>
+          </a:p>
+        </p:txBody>
+      </p:sp>
+      <p:sp>
+        <p:nvSpPr>
+          <p:cNvPr id="4" name="Slide Number Placeholder 3"/>
+          <p:cNvSpPr>
+            <a:spLocks noGrp="1"/>
+          </p:cNvSpPr>
+          <p:nvPr>
+            <p:ph type="sldNum" sz="quarter" idx="10"/>
+          </p:nvPr>
+        </p:nvSpPr>
+        <p:spPr/>
+        <p:txBody>
+          <a:bodyPr/>
+          <a:lstStyle/>
+          <a:p>
+            <a:fld id="{F7021451-1387-4CA6-816F-3879F97B5CBC}" type="slidenum">
+              <a:rPr lang="en-US"/>
+              <a:t>64</a:t>
             </a:fld>
             <a:endParaRPr lang="en-US"/>
           </a:p>
@@ -15571,7 +15660,7 @@
         <p:spPr>
           <a:xfrm>
             <a:off x="365760" y="1783080"/>
-            <a:ext cx="4846320" cy="4617720"/>
+            <a:ext cx="6035040" cy="4617720"/>
           </a:xfrm>
           <a:prstGeom prst="rect">
             <a:avLst/>
@@ -15590,7 +15679,7 @@
               <a:buNone/>
             </a:pPr>
             <a:r>
-              <a:rPr lang="en-US" sz="3600" i="1" dirty="0">
+              <a:rPr lang="en-US" sz="3400" i="1" dirty="0">
                 <a:solidFill>
                   <a:srgbClr val="111111"/>
                 </a:solidFill>
@@ -15598,9 +15687,9 @@
                 <a:ea typeface="Times New Roman" pitchFamily="34" charset="-122"/>
                 <a:cs typeface="Times New Roman" pitchFamily="34" charset="-120"/>
               </a:rPr>
-              <a:t>Spearman's rank correlation tells us the following:</a:t>
-            </a:r>
-            <a:endParaRPr lang="en-US" sz="3600" dirty="0"/>
+              <a:t>Spearman's rank correlation shows the following:</a:t>
+            </a:r>
+            <a:endParaRPr lang="en-US" sz="3400" dirty="0"/>
           </a:p>
           <a:p>
             <a:pPr algn="l" indent="0" marL="0">
@@ -15610,7 +15699,7 @@
               <a:buNone/>
             </a:pPr>
             <a:r>
-              <a:rPr lang="en-US" sz="3600" b="1" dirty="0">
+              <a:rPr lang="en-US" sz="3400" b="1" dirty="0">
                 <a:solidFill>
                   <a:srgbClr val="111111"/>
                 </a:solidFill>
@@ -15618,7 +15707,7 @@
                 <a:ea typeface="Times New Roman" pitchFamily="34" charset="-122"/>
                 <a:cs typeface="Times New Roman" pitchFamily="34" charset="-120"/>
               </a:rPr>
-              <a:t>Existence: </a:t>
+              <a:t>Existence and strength: </a:t>
             </a:r>
             <a:pPr algn="l" indent="0" marL="0">
               <a:spcAft>
@@ -15627,7 +15716,7 @@
               <a:buNone/>
             </a:pPr>
             <a:r>
-              <a:rPr lang="en-US" sz="3600" dirty="0">
+              <a:rPr lang="en-US" sz="3400" dirty="0">
                 <a:solidFill>
                   <a:srgbClr val="111111"/>
                 </a:solidFill>
@@ -15635,9 +15724,9 @@
                 <a:ea typeface="Times New Roman" pitchFamily="34" charset="-122"/>
                 <a:cs typeface="Times New Roman" pitchFamily="34" charset="-120"/>
               </a:rPr>
-              <a:t>Whether a relationship exists; Rs = 0 means no relationship.</a:t>
-            </a:r>
-            <a:endParaRPr lang="en-US" sz="3600" dirty="0"/>
+              <a:t>Rs shows whether a relationship exists between two variables; Rs = 0 means there is none. The closer Rs is to +1 or −1, the stronger the relationship.</a:t>
+            </a:r>
+            <a:endParaRPr lang="en-US" sz="3400" dirty="0"/>
           </a:p>
         </p:txBody>
       </p:sp>
@@ -15657,8 +15746,8 @@
         </p:blipFill>
         <p:spPr>
           <a:xfrm>
-            <a:off x="5349240" y="2461422"/>
-            <a:ext cx="6659575" cy="2913564"/>
+            <a:off x="6537960" y="2721454"/>
+            <a:ext cx="5470855" cy="2393499"/>
           </a:xfrm>
           <a:prstGeom prst="rect">
             <a:avLst/>
@@ -15673,8 +15762,8 @@
         </p:nvSpPr>
         <p:spPr>
           <a:xfrm>
-            <a:off x="5349240" y="6089904"/>
-            <a:ext cx="6659575" cy="347472"/>
+            <a:off x="6537960" y="6089904"/>
+            <a:ext cx="5470855" cy="347472"/>
           </a:xfrm>
           <a:prstGeom prst="rect">
             <a:avLst/>
@@ -15698,7 +15787,7 @@
                 <a:ea typeface="Times New Roman" pitchFamily="34" charset="-122"/>
                 <a:cs typeface="Times New Roman" pitchFamily="34" charset="-120"/>
               </a:rPr>
-              <a:t>Illustration: a negative correlation</a:t>
+              <a:t>Illustration: types of correlation</a:t>
             </a:r>
             <a:endParaRPr lang="en-US" sz="1600" dirty="0"/>
           </a:p>
@@ -16156,7 +16245,7 @@
                 <a:ea typeface="Times New Roman" pitchFamily="34" charset="-122"/>
                 <a:cs typeface="Times New Roman" pitchFamily="34" charset="-120"/>
               </a:rPr>
-              <a:t>Strength: </a:t>
+              <a:t>Direction: </a:t>
             </a:r>
             <a:pPr algn="l" indent="0" marL="0">
               <a:spcAft>
@@ -16173,48 +16262,7 @@
                 <a:ea typeface="Times New Roman" pitchFamily="34" charset="-122"/>
                 <a:cs typeface="Times New Roman" pitchFamily="34" charset="-120"/>
               </a:rPr>
-              <a:t>The closer Rs is to +1 or −1, the stronger the relationship.</a:t>
-            </a:r>
-            <a:endParaRPr lang="en-US" sz="4000" dirty="0"/>
-          </a:p>
-          <a:p>
-            <a:pPr algn="l" indent="0" marL="0">
-              <a:spcAft>
-                <a:spcPts val="800"/>
-              </a:spcAft>
-              <a:buNone/>
-            </a:pPr>
-            <a:r>
-              <a:rPr lang="en-US" sz="4000" b="1" dirty="0">
-                <a:solidFill>
-                  <a:srgbClr val="111111"/>
-                </a:solidFill>
-                <a:latin typeface="Times New Roman" pitchFamily="34" charset="0"/>
-                <a:ea typeface="Times New Roman" pitchFamily="34" charset="-122"/>
-                <a:cs typeface="Times New Roman" pitchFamily="34" charset="-120"/>
-              </a:rPr>
-              <a:t>Direction:</a:t>
-            </a:r>
-            <a:endParaRPr lang="en-US" sz="4000" dirty="0"/>
-          </a:p>
-          <a:p>
-            <a:pPr algn="l" marL="342900" indent="-342900">
-              <a:spcAft>
-                <a:spcPts val="800"/>
-              </a:spcAft>
-              <a:buSzPct val="100000"/>
-              <a:buChar char="•"/>
-            </a:pPr>
-            <a:r>
-              <a:rPr lang="en-US" sz="4000" dirty="0">
-                <a:solidFill>
-                  <a:srgbClr val="111111"/>
-                </a:solidFill>
-                <a:latin typeface="Times New Roman" pitchFamily="34" charset="0"/>
-                <a:ea typeface="Times New Roman" pitchFamily="34" charset="-122"/>
-                <a:cs typeface="Times New Roman" pitchFamily="34" charset="-120"/>
-              </a:rPr>
-              <a:t>Positive: both variables rise or fall together, like altitude and rainfall on a windward slope.</a:t>
+              <a:t>A positive correlation means that both variables rise or fall together, like altitude and rainfall on a windward slope. A negative correlation means that one rises while the other falls, like altitude and temperature.</a:t>
             </a:r>
             <a:endParaRPr lang="en-US" sz="4000" dirty="0"/>
           </a:p>
@@ -16391,7 +16439,7 @@
                 <a:ea typeface="Times New Roman" pitchFamily="34" charset="-122"/>
                 <a:cs typeface="Times New Roman" pitchFamily="34" charset="-120"/>
               </a:rPr>
-              <a:t>1. Meaning and Uses of Spearman's Rank Correlation (continued)</a:t>
+              <a:t>1. Meaning and Uses of Spearman's Rank Correlation</a:t>
             </a:r>
             <a:endParaRPr lang="en-US" sz="3600" dirty="0"/>
           </a:p>
@@ -16417,27 +16465,6 @@
         <p:txBody>
           <a:bodyPr wrap="square" lIns="0" tIns="0" rIns="0" bIns="0" rtlCol="0" anchor="t"/>
           <a:lstStyle/>
-          <a:p>
-            <a:pPr algn="l" marL="342900" indent="-342900">
-              <a:spcAft>
-                <a:spcPts val="800"/>
-              </a:spcAft>
-              <a:buSzPct val="100000"/>
-              <a:buChar char="•"/>
-            </a:pPr>
-            <a:r>
-              <a:rPr lang="en-US" sz="4000" dirty="0">
-                <a:solidFill>
-                  <a:srgbClr val="111111"/>
-                </a:solidFill>
-                <a:latin typeface="Times New Roman" pitchFamily="34" charset="0"/>
-                <a:ea typeface="Times New Roman" pitchFamily="34" charset="-122"/>
-                <a:cs typeface="Times New Roman" pitchFamily="34" charset="-120"/>
-              </a:rPr>
-              <a:t>Negative: one rises while the other falls, like altitude and temperature.</a:t>
-            </a:r>
-            <a:endParaRPr lang="en-US" sz="4000" dirty="0"/>
-          </a:p>
           <a:p>
             <a:pPr algn="l" indent="0" marL="0">
               <a:spcAft>
@@ -16471,7 +16498,7 @@
                 <a:ea typeface="Times New Roman" pitchFamily="34" charset="-122"/>
                 <a:cs typeface="Times New Roman" pitchFamily="34" charset="-120"/>
               </a:rPr>
-              <a:t>It uses ranks instead of values, so it works with ordinal data and uneven values.</a:t>
+              <a:t>The method uses the ranks of the values instead of the values themselves. It therefore works with ordinal data and with very uneven values.</a:t>
             </a:r>
             <a:endParaRPr lang="en-US" sz="4000" dirty="0"/>
           </a:p>
@@ -16639,7 +16666,7 @@
         <p:spPr>
           <a:xfrm>
             <a:off x="365760" y="1783080"/>
-            <a:ext cx="4846320" cy="4617720"/>
+            <a:ext cx="6035040" cy="4617720"/>
           </a:xfrm>
           <a:prstGeom prst="rect">
             <a:avLst/>
@@ -16658,7 +16685,7 @@
               <a:buNone/>
             </a:pPr>
             <a:r>
-              <a:rPr lang="en-US" sz="3600" i="1" dirty="0">
+              <a:rPr lang="en-US" sz="3400" i="1" dirty="0">
                 <a:solidFill>
                   <a:srgbClr val="111111"/>
                 </a:solidFill>
@@ -16666,9 +16693,9 @@
                 <a:ea typeface="Times New Roman" pitchFamily="34" charset="-122"/>
                 <a:cs typeface="Times New Roman" pitchFamily="34" charset="-120"/>
               </a:rPr>
-              <a:t>Rs is calculated with the following steps:</a:t>
-            </a:r>
-            <a:endParaRPr lang="en-US" sz="3600" dirty="0"/>
+              <a:t>Rs is calculated in the following steps:</a:t>
+            </a:r>
+            <a:endParaRPr lang="en-US" sz="3400" dirty="0"/>
           </a:p>
           <a:p>
             <a:pPr algn="l" indent="0" marL="0">
@@ -16678,7 +16705,7 @@
               <a:buNone/>
             </a:pPr>
             <a:r>
-              <a:rPr lang="en-US" sz="3600" b="1" dirty="0">
+              <a:rPr lang="en-US" sz="3400" b="1" dirty="0">
                 <a:solidFill>
                   <a:srgbClr val="111111"/>
                 </a:solidFill>
@@ -16695,7 +16722,7 @@
               <a:buNone/>
             </a:pPr>
             <a:r>
-              <a:rPr lang="en-US" sz="3600" dirty="0">
+              <a:rPr lang="en-US" sz="3400" dirty="0">
                 <a:solidFill>
                   <a:srgbClr val="111111"/>
                 </a:solidFill>
@@ -16703,9 +16730,9 @@
                 <a:ea typeface="Times New Roman" pitchFamily="34" charset="-122"/>
                 <a:cs typeface="Times New Roman" pitchFamily="34" charset="-120"/>
               </a:rPr>
-              <a:t>Rs = 1 − (6Σd²) ÷ (n³ − n), where d is the difference between ranks and n the number of pairs.</a:t>
-            </a:r>
-            <a:endParaRPr lang="en-US" sz="3600" dirty="0"/>
+              <a:t>Rs = 1 − (6Σd²) ÷ (n³ − n), where d is the difference between the two ranks of each pair and n is the number of pairs. The result always lies between −1 and +1.</a:t>
+            </a:r>
+            <a:endParaRPr lang="en-US" sz="3400" dirty="0"/>
           </a:p>
         </p:txBody>
       </p:sp>
@@ -16725,8 +16752,8 @@
         </p:blipFill>
         <p:spPr>
           <a:xfrm>
-            <a:off x="5349240" y="2617506"/>
-            <a:ext cx="6659575" cy="2601397"/>
+            <a:off x="6537960" y="2849678"/>
+            <a:ext cx="5470855" cy="2137053"/>
           </a:xfrm>
           <a:prstGeom prst="rect">
             <a:avLst/>
@@ -16741,8 +16768,8 @@
         </p:nvSpPr>
         <p:spPr>
           <a:xfrm>
-            <a:off x="5349240" y="6089904"/>
-            <a:ext cx="6659575" cy="347472"/>
+            <a:off x="6537960" y="6089904"/>
+            <a:ext cx="5470855" cy="347472"/>
           </a:xfrm>
           <a:prstGeom prst="rect">
             <a:avLst/>
@@ -16766,7 +16793,7 @@
                 <a:ea typeface="Times New Roman" pitchFamily="34" charset="-122"/>
                 <a:cs typeface="Times New Roman" pitchFamily="34" charset="-120"/>
               </a:rPr>
-              <a:t>Illustration: a simple Spearman table</a:t>
+              <a:t>Illustration: Spearman's formula</a:t>
             </a:r>
             <a:endParaRPr lang="en-US" sz="1600" dirty="0"/>
           </a:p>
@@ -16901,7 +16928,7 @@
         <p:spPr>
           <a:xfrm>
             <a:off x="0" y="658368"/>
-            <a:ext cx="3840480" cy="5833872"/>
+            <a:ext cx="5120640" cy="5833872"/>
           </a:xfrm>
           <a:prstGeom prst="rect">
             <a:avLst/>
@@ -16916,8 +16943,8 @@
         </p:nvSpPr>
         <p:spPr>
           <a:xfrm>
-            <a:off x="4069080" y="1005840"/>
-            <a:ext cx="7802575" cy="731520"/>
+            <a:off x="5349240" y="1005840"/>
+            <a:ext cx="6522415" cy="731520"/>
           </a:xfrm>
           <a:prstGeom prst="rect">
             <a:avLst/>
@@ -16957,8 +16984,8 @@
         </p:nvSpPr>
         <p:spPr>
           <a:xfrm>
-            <a:off x="4069080" y="1783080"/>
-            <a:ext cx="7802575" cy="4663440"/>
+            <a:off x="5349240" y="1783080"/>
+            <a:ext cx="6522415" cy="4663440"/>
           </a:xfrm>
           <a:prstGeom prst="rect">
             <a:avLst/>
@@ -16985,17 +17012,13 @@
                 <a:ea typeface="Times New Roman" pitchFamily="34" charset="-122"/>
                 <a:cs typeface="Times New Roman" pitchFamily="34" charset="-120"/>
               </a:rPr>
-              <a:t>Steps:</a:t>
-            </a:r>
-            <a:endParaRPr lang="en-US" sz="4000" dirty="0"/>
-          </a:p>
-          <a:p>
-            <a:pPr algn="l" marL="342900" indent="-342900">
+              <a:t>Stating the hypothesis and ranking: </a:t>
+            </a:r>
+            <a:pPr algn="l" indent="0" marL="0">
               <a:spcAft>
                 <a:spcPts val="800"/>
               </a:spcAft>
-              <a:buSzPct val="100000"/>
-              <a:buChar char="•"/>
+              <a:buNone/>
             </a:pPr>
             <a:r>
               <a:rPr lang="en-US" sz="4000" dirty="0">
@@ -17006,49 +17029,7 @@
                 <a:ea typeface="Times New Roman" pitchFamily="34" charset="-122"/>
                 <a:cs typeface="Times New Roman" pitchFamily="34" charset="-120"/>
               </a:rPr>
-              <a:t>State the null hypothesis (H0).</a:t>
-            </a:r>
-            <a:endParaRPr lang="en-US" sz="4000" dirty="0"/>
-          </a:p>
-          <a:p>
-            <a:pPr algn="l" marL="342900" indent="-342900">
-              <a:spcAft>
-                <a:spcPts val="800"/>
-              </a:spcAft>
-              <a:buSzPct val="100000"/>
-              <a:buChar char="•"/>
-            </a:pPr>
-            <a:r>
-              <a:rPr lang="en-US" sz="4000" dirty="0">
-                <a:solidFill>
-                  <a:srgbClr val="111111"/>
-                </a:solidFill>
-                <a:latin typeface="Times New Roman" pitchFamily="34" charset="0"/>
-                <a:ea typeface="Times New Roman" pitchFamily="34" charset="-122"/>
-                <a:cs typeface="Times New Roman" pitchFamily="34" charset="-120"/>
-              </a:rPr>
-              <a:t>Count the pairs (n).</a:t>
-            </a:r>
-            <a:endParaRPr lang="en-US" sz="4000" dirty="0"/>
-          </a:p>
-          <a:p>
-            <a:pPr algn="l" marL="342900" indent="-342900">
-              <a:spcAft>
-                <a:spcPts val="800"/>
-              </a:spcAft>
-              <a:buSzPct val="100000"/>
-              <a:buChar char="•"/>
-            </a:pPr>
-            <a:r>
-              <a:rPr lang="en-US" sz="4000" dirty="0">
-                <a:solidFill>
-                  <a:srgbClr val="111111"/>
-                </a:solidFill>
-                <a:latin typeface="Times New Roman" pitchFamily="34" charset="0"/>
-                <a:ea typeface="Times New Roman" pitchFamily="34" charset="-122"/>
-                <a:cs typeface="Times New Roman" pitchFamily="34" charset="-120"/>
-              </a:rPr>
-              <a:t>Rank each variable, the highest value getting rank 1.</a:t>
+              <a:t>First state the null hypothesis (H0) and count the pairs (n). Then rank each variable separately, giving rank 1 to the highest value.</a:t>
             </a:r>
             <a:endParaRPr lang="en-US" sz="4000" dirty="0"/>
           </a:p>
@@ -17183,7 +17164,7 @@
         <p:spPr>
           <a:xfrm>
             <a:off x="0" y="658368"/>
-            <a:ext cx="1463040" cy="5833872"/>
+            <a:ext cx="5120640" cy="5833872"/>
           </a:xfrm>
           <a:prstGeom prst="rect">
             <a:avLst/>
@@ -17198,8 +17179,8 @@
         </p:nvSpPr>
         <p:spPr>
           <a:xfrm>
-            <a:off x="1691640" y="1005840"/>
-            <a:ext cx="10180015" cy="731520"/>
+            <a:off x="5349240" y="1005840"/>
+            <a:ext cx="6522415" cy="731520"/>
           </a:xfrm>
           <a:prstGeom prst="rect">
             <a:avLst/>
@@ -17225,7 +17206,7 @@
                 <a:ea typeface="Times New Roman" pitchFamily="34" charset="-122"/>
                 <a:cs typeface="Times New Roman" pitchFamily="34" charset="-120"/>
               </a:rPr>
-              <a:t>2. Formula and Steps of Calculation (continued)</a:t>
+              <a:t>2. Formula and Steps of Calculation</a:t>
             </a:r>
             <a:endParaRPr lang="en-US" sz="3600" dirty="0"/>
           </a:p>
@@ -17239,8 +17220,8 @@
         </p:nvSpPr>
         <p:spPr>
           <a:xfrm>
-            <a:off x="1691640" y="1783080"/>
-            <a:ext cx="10180015" cy="4663440"/>
+            <a:off x="5349240" y="1783080"/>
+            <a:ext cx="6522415" cy="4663440"/>
           </a:xfrm>
           <a:prstGeom prst="rect">
             <a:avLst/>
@@ -17251,69 +17232,6 @@
         <p:txBody>
           <a:bodyPr wrap="square" lIns="0" tIns="0" rIns="0" bIns="0" rtlCol="0" anchor="t"/>
           <a:lstStyle/>
-          <a:p>
-            <a:pPr algn="l" marL="342900" indent="-342900">
-              <a:spcAft>
-                <a:spcPts val="800"/>
-              </a:spcAft>
-              <a:buSzPct val="100000"/>
-              <a:buChar char="•"/>
-            </a:pPr>
-            <a:r>
-              <a:rPr lang="en-US" sz="4000" dirty="0">
-                <a:solidFill>
-                  <a:srgbClr val="111111"/>
-                </a:solidFill>
-                <a:latin typeface="Times New Roman" pitchFamily="34" charset="0"/>
-                <a:ea typeface="Times New Roman" pitchFamily="34" charset="-122"/>
-                <a:cs typeface="Times New Roman" pitchFamily="34" charset="-120"/>
-              </a:rPr>
-              <a:t>Give tied values the average of their ranks.</a:t>
-            </a:r>
-            <a:endParaRPr lang="en-US" sz="4000" dirty="0"/>
-          </a:p>
-          <a:p>
-            <a:pPr algn="l" marL="342900" indent="-342900">
-              <a:spcAft>
-                <a:spcPts val="800"/>
-              </a:spcAft>
-              <a:buSzPct val="100000"/>
-              <a:buChar char="•"/>
-            </a:pPr>
-            <a:r>
-              <a:rPr lang="en-US" sz="4000" dirty="0">
-                <a:solidFill>
-                  <a:srgbClr val="111111"/>
-                </a:solidFill>
-                <a:latin typeface="Times New Roman" pitchFamily="34" charset="0"/>
-                <a:ea typeface="Times New Roman" pitchFamily="34" charset="-122"/>
-                <a:cs typeface="Times New Roman" pitchFamily="34" charset="-120"/>
-              </a:rPr>
-              <a:t>Calculate d, then d², then Σd².</a:t>
-            </a:r>
-            <a:endParaRPr lang="en-US" sz="4000" dirty="0"/>
-          </a:p>
-          <a:p>
-            <a:pPr algn="l" marL="342900" indent="-342900">
-              <a:spcAft>
-                <a:spcPts val="800"/>
-              </a:spcAft>
-              <a:buSzPct val="100000"/>
-              <a:buChar char="•"/>
-            </a:pPr>
-            <a:r>
-              <a:rPr lang="en-US" sz="4000" dirty="0">
-                <a:solidFill>
-                  <a:srgbClr val="111111"/>
-                </a:solidFill>
-                <a:latin typeface="Times New Roman" pitchFamily="34" charset="0"/>
-                <a:ea typeface="Times New Roman" pitchFamily="34" charset="-122"/>
-                <a:cs typeface="Times New Roman" pitchFamily="34" charset="-120"/>
-              </a:rPr>
-              <a:t>Substitute into the formula and interpret.</a:t>
-            </a:r>
-            <a:endParaRPr lang="en-US" sz="4000" dirty="0"/>
-          </a:p>
           <a:p>
             <a:pPr algn="l" indent="0" marL="0">
               <a:spcAft>
@@ -17330,7 +17248,7 @@
                 <a:ea typeface="Times New Roman" pitchFamily="34" charset="-122"/>
                 <a:cs typeface="Times New Roman" pitchFamily="34" charset="-120"/>
               </a:rPr>
-              <a:t>Tied ranks: </a:t>
+              <a:t>Calculating: </a:t>
             </a:r>
             <a:pPr algn="l" indent="0" marL="0">
               <a:spcAft>
@@ -17347,7 +17265,7 @@
                 <a:ea typeface="Times New Roman" pitchFamily="34" charset="-122"/>
                 <a:cs typeface="Times New Roman" pitchFamily="34" charset="-120"/>
               </a:rPr>
-              <a:t>Two soil depths of 60 cm would occupy ranks 1 and 2, so each gets 1.5.</a:t>
+              <a:t>For each pair, calculate d, then d², and add them to find Σd². Substitute Σd² and n into the formula and interpret the result.</a:t>
             </a:r>
             <a:endParaRPr lang="en-US" sz="4000" dirty="0"/>
           </a:p>
@@ -17524,7 +17442,7 @@
                 <a:ea typeface="Times New Roman" pitchFamily="34" charset="-122"/>
                 <a:cs typeface="Times New Roman" pitchFamily="34" charset="-120"/>
               </a:rPr>
-              <a:t>3. Worked Example: Slope Angle and Soil Depth</a:t>
+              <a:t>2. Formula and Steps of Calculation</a:t>
             </a:r>
             <a:endParaRPr lang="en-US" sz="3600" dirty="0"/>
           </a:p>
@@ -17558,7 +17476,7 @@
               <a:buNone/>
             </a:pPr>
             <a:r>
-              <a:rPr lang="en-US" sz="4000" i="1" dirty="0">
+              <a:rPr lang="en-US" sz="4000" b="1" dirty="0">
                 <a:solidFill>
                   <a:srgbClr val="111111"/>
                 </a:solidFill>
@@ -17566,11 +17484,8 @@
                 <a:ea typeface="Times New Roman" pitchFamily="34" charset="-122"/>
                 <a:cs typeface="Times New Roman" pitchFamily="34" charset="-120"/>
               </a:rPr>
-              <a:t>The worked example is solved as follows:</a:t>
-            </a:r>
-            <a:endParaRPr lang="en-US" sz="4000" dirty="0"/>
-          </a:p>
-          <a:p>
+              <a:t>Tied ranks: </a:t>
+            </a:r>
             <a:pPr algn="l" indent="0" marL="0">
               <a:spcAft>
                 <a:spcPts val="800"/>
@@ -17578,7 +17493,7 @@
               <a:buNone/>
             </a:pPr>
             <a:r>
-              <a:rPr lang="en-US" sz="4000" b="1" dirty="0">
+              <a:rPr lang="en-US" sz="4000" dirty="0">
                 <a:solidFill>
                   <a:srgbClr val="111111"/>
                 </a:solidFill>
@@ -17586,24 +17501,7 @@
                 <a:ea typeface="Times New Roman" pitchFamily="34" charset="-122"/>
                 <a:cs typeface="Times New Roman" pitchFamily="34" charset="-120"/>
               </a:rPr>
-              <a:t>Null hypothesis: </a:t>
-            </a:r>
-            <a:pPr algn="l" indent="0" marL="0">
-              <a:spcAft>
-                <a:spcPts val="800"/>
-              </a:spcAft>
-              <a:buNone/>
-            </a:pPr>
-            <a:r>
-              <a:rPr lang="en-US" sz="4000" dirty="0">
-                <a:solidFill>
-                  <a:srgbClr val="111111"/>
-                </a:solidFill>
-                <a:latin typeface="Times New Roman" pitchFamily="34" charset="0"/>
-                <a:ea typeface="Times New Roman" pitchFamily="34" charset="-122"/>
-                <a:cs typeface="Times New Roman" pitchFamily="34" charset="-120"/>
-              </a:rPr>
-              <a:t>H0: there is no significant relationship between slope angle and soil depth.</a:t>
+              <a:t>When two values are equal, they share the average of the ranks they occupy. For example, two soil depths of 60 cm occupying ranks 1 and 2 each get rank 1.5.</a:t>
             </a:r>
             <a:endParaRPr lang="en-US" sz="4000" dirty="0"/>
           </a:p>
@@ -17771,7 +17669,7 @@
         <p:spPr>
           <a:xfrm>
             <a:off x="365760" y="1783080"/>
-            <a:ext cx="4846320" cy="4617720"/>
+            <a:ext cx="6035040" cy="4617720"/>
           </a:xfrm>
           <a:prstGeom prst="rect">
             <a:avLst/>
@@ -17790,7 +17688,7 @@
               <a:buNone/>
             </a:pPr>
             <a:r>
-              <a:rPr lang="en-US" sz="3600" b="1" dirty="0">
+              <a:rPr lang="en-US" sz="3200" i="1" dirty="0">
                 <a:solidFill>
                   <a:srgbClr val="111111"/>
                 </a:solidFill>
@@ -17798,8 +17696,11 @@
                 <a:ea typeface="Times New Roman" pitchFamily="34" charset="-122"/>
                 <a:cs typeface="Times New Roman" pitchFamily="34" charset="-120"/>
               </a:rPr>
-              <a:t>Table: </a:t>
-            </a:r>
+              <a:t>The worked example is solved as follows:</a:t>
+            </a:r>
+            <a:endParaRPr lang="en-US" sz="3200" dirty="0"/>
+          </a:p>
+          <a:p>
             <a:pPr algn="l" indent="0" marL="0">
               <a:spcAft>
                 <a:spcPts val="800"/>
@@ -17807,7 +17708,7 @@
               <a:buNone/>
             </a:pPr>
             <a:r>
-              <a:rPr lang="en-US" sz="3600" dirty="0">
+              <a:rPr lang="en-US" sz="3200" b="1" dirty="0">
                 <a:solidFill>
                   <a:srgbClr val="111111"/>
                 </a:solidFill>
@@ -17815,9 +17716,26 @@
                 <a:ea typeface="Times New Roman" pitchFamily="34" charset="-122"/>
                 <a:cs typeface="Times New Roman" pitchFamily="34" charset="-120"/>
               </a:rPr>
-              <a:t>The two variables of the 10 points are ranked and d² is calculated.</a:t>
-            </a:r>
-            <a:endParaRPr lang="en-US" sz="3600" dirty="0"/>
+              <a:t>Hypothesis and data: </a:t>
+            </a:r>
+            <a:pPr algn="l" indent="0" marL="0">
+              <a:spcAft>
+                <a:spcPts val="800"/>
+              </a:spcAft>
+              <a:buNone/>
+            </a:pPr>
+            <a:r>
+              <a:rPr lang="en-US" sz="3200" dirty="0">
+                <a:solidFill>
+                  <a:srgbClr val="111111"/>
+                </a:solidFill>
+                <a:latin typeface="Times New Roman" pitchFamily="34" charset="0"/>
+                <a:ea typeface="Times New Roman" pitchFamily="34" charset="-122"/>
+                <a:cs typeface="Times New Roman" pitchFamily="34" charset="-120"/>
+              </a:rPr>
+              <a:t>H0: there is no significant relationship between slope angle and soil depth. Slope angle and soil depth are measured at 10 points on a hill, and each variable is ranked.</a:t>
+            </a:r>
+            <a:endParaRPr lang="en-US" sz="3200" dirty="0"/>
           </a:p>
         </p:txBody>
       </p:sp>
@@ -17837,8 +17755,8 @@
         </p:blipFill>
         <p:spPr>
           <a:xfrm>
-            <a:off x="5349240" y="2617506"/>
-            <a:ext cx="6659575" cy="2601397"/>
+            <a:off x="6537960" y="2849678"/>
+            <a:ext cx="5470855" cy="2137053"/>
           </a:xfrm>
           <a:prstGeom prst="rect">
             <a:avLst/>
@@ -17853,8 +17771,8 @@
         </p:nvSpPr>
         <p:spPr>
           <a:xfrm>
-            <a:off x="5349240" y="6089904"/>
-            <a:ext cx="6659575" cy="347472"/>
+            <a:off x="6537960" y="6089904"/>
+            <a:ext cx="5470855" cy="347472"/>
           </a:xfrm>
           <a:prstGeom prst="rect">
             <a:avLst/>
@@ -17878,7 +17796,7 @@
                 <a:ea typeface="Times New Roman" pitchFamily="34" charset="-122"/>
                 <a:cs typeface="Times New Roman" pitchFamily="34" charset="-120"/>
               </a:rPr>
-              <a:t>Illustration: slope angle and soil depth</a:t>
+              <a:t>Illustration: the calculation table</a:t>
             </a:r>
             <a:endParaRPr lang="en-US" sz="1600" dirty="0"/>
           </a:p>
@@ -18013,7 +17931,7 @@
         <p:spPr>
           <a:xfrm>
             <a:off x="0" y="658368"/>
-            <a:ext cx="2468880" cy="5833872"/>
+            <a:ext cx="5120640" cy="5833872"/>
           </a:xfrm>
           <a:prstGeom prst="rect">
             <a:avLst/>
@@ -18028,8 +17946,8 @@
         </p:nvSpPr>
         <p:spPr>
           <a:xfrm>
-            <a:off x="2697480" y="1005840"/>
-            <a:ext cx="9174175" cy="731520"/>
+            <a:off x="5349240" y="1005840"/>
+            <a:ext cx="6522415" cy="731520"/>
           </a:xfrm>
           <a:prstGeom prst="rect">
             <a:avLst/>
@@ -18069,8 +17987,8 @@
         </p:nvSpPr>
         <p:spPr>
           <a:xfrm>
-            <a:off x="2697480" y="1783080"/>
-            <a:ext cx="9174175" cy="4663440"/>
+            <a:off x="5349240" y="1783080"/>
+            <a:ext cx="6522415" cy="4663440"/>
           </a:xfrm>
           <a:prstGeom prst="rect">
             <a:avLst/>
@@ -18097,7 +18015,7 @@
                 <a:ea typeface="Times New Roman" pitchFamily="34" charset="-122"/>
                 <a:cs typeface="Times New Roman" pitchFamily="34" charset="-120"/>
               </a:rPr>
-              <a:t>Result: </a:t>
+              <a:t>Calculation: </a:t>
             </a:r>
             <a:pPr algn="l" indent="0" marL="0">
               <a:spcAft>
@@ -18114,44 +18032,7 @@
                 <a:ea typeface="Times New Roman" pitchFamily="34" charset="-122"/>
                 <a:cs typeface="Times New Roman" pitchFamily="34" charset="-120"/>
               </a:rPr>
-              <a:t>Σd² = 48, so Rs = 1 − (6 × 48) ÷ (1,000 − 10) = 1 − 288 ÷ 990 ≈ +0.71.</a:t>
-            </a:r>
-            <a:endParaRPr lang="en-US" sz="4000" dirty="0"/>
-          </a:p>
-          <a:p>
-            <a:pPr algn="l" indent="0" marL="0">
-              <a:spcAft>
-                <a:spcPts val="800"/>
-              </a:spcAft>
-              <a:buNone/>
-            </a:pPr>
-            <a:r>
-              <a:rPr lang="en-US" sz="4000" b="1" dirty="0">
-                <a:solidFill>
-                  <a:srgbClr val="111111"/>
-                </a:solidFill>
-                <a:latin typeface="Times New Roman" pitchFamily="34" charset="0"/>
-                <a:ea typeface="Times New Roman" pitchFamily="34" charset="-122"/>
-                <a:cs typeface="Times New Roman" pitchFamily="34" charset="-120"/>
-              </a:rPr>
-              <a:t>Interpretation: </a:t>
-            </a:r>
-            <a:pPr algn="l" indent="0" marL="0">
-              <a:spcAft>
-                <a:spcPts val="800"/>
-              </a:spcAft>
-              <a:buNone/>
-            </a:pPr>
-            <a:r>
-              <a:rPr lang="en-US" sz="4000" dirty="0">
-                <a:solidFill>
-                  <a:srgbClr val="111111"/>
-                </a:solidFill>
-                <a:latin typeface="Times New Roman" pitchFamily="34" charset="0"/>
-                <a:ea typeface="Times New Roman" pitchFamily="34" charset="-122"/>
-                <a:cs typeface="Times New Roman" pitchFamily="34" charset="-120"/>
-              </a:rPr>
-              <a:t>Rs = +0.71 shows a fairly strong positive correlation: on this hill, soils tend to be deeper where slopes are steeper, perhaps because of vegetation or rock type.</a:t>
+              <a:t>The table gives Σd² = 48 and n = 10. Rs = 1 − (6 × 48) ÷ (1,000 − 10) = 1 − 288 ÷ 990 ≈ +0.71.</a:t>
             </a:r>
             <a:endParaRPr lang="en-US" sz="4000" dirty="0"/>
           </a:p>
@@ -18286,7 +18167,7 @@
         <p:spPr>
           <a:xfrm>
             <a:off x="0" y="658368"/>
-            <a:ext cx="2468880" cy="5833872"/>
+            <a:ext cx="3840480" cy="5833872"/>
           </a:xfrm>
           <a:prstGeom prst="rect">
             <a:avLst/>
@@ -18301,8 +18182,8 @@
         </p:nvSpPr>
         <p:spPr>
           <a:xfrm>
-            <a:off x="2697480" y="1005840"/>
-            <a:ext cx="9174175" cy="731520"/>
+            <a:off x="4069080" y="1005840"/>
+            <a:ext cx="7802575" cy="731520"/>
           </a:xfrm>
           <a:prstGeom prst="rect">
             <a:avLst/>
@@ -18328,7 +18209,7 @@
                 <a:ea typeface="Times New Roman" pitchFamily="34" charset="-122"/>
                 <a:cs typeface="Times New Roman" pitchFamily="34" charset="-120"/>
               </a:rPr>
-              <a:t>4. Interpretation and Significance</a:t>
+              <a:t>3. Worked Example: Slope Angle and Soil Depth</a:t>
             </a:r>
             <a:endParaRPr lang="en-US" sz="3600" dirty="0"/>
           </a:p>
@@ -18342,8 +18223,8 @@
         </p:nvSpPr>
         <p:spPr>
           <a:xfrm>
-            <a:off x="2697480" y="1783080"/>
-            <a:ext cx="9174175" cy="4663440"/>
+            <a:off x="4069080" y="1783080"/>
+            <a:ext cx="7802575" cy="4663440"/>
           </a:xfrm>
           <a:prstGeom prst="rect">
             <a:avLst/>
@@ -18362,7 +18243,7 @@
               <a:buNone/>
             </a:pPr>
             <a:r>
-              <a:rPr lang="en-US" sz="4000" i="1" dirty="0">
+              <a:rPr lang="en-US" sz="4000" b="1" dirty="0">
                 <a:solidFill>
                   <a:srgbClr val="111111"/>
                 </a:solidFill>
@@ -18370,11 +18251,8 @@
                 <a:ea typeface="Times New Roman" pitchFamily="34" charset="-122"/>
                 <a:cs typeface="Times New Roman" pitchFamily="34" charset="-120"/>
               </a:rPr>
-              <a:t>Rs is interpreted and tested as follows:</a:t>
-            </a:r>
-            <a:endParaRPr lang="en-US" sz="4000" dirty="0"/>
-          </a:p>
-          <a:p>
+              <a:t>Interpretation: </a:t>
+            </a:r>
             <a:pPr algn="l" indent="0" marL="0">
               <a:spcAft>
                 <a:spcPts val="800"/>
@@ -18382,7 +18260,7 @@
               <a:buNone/>
             </a:pPr>
             <a:r>
-              <a:rPr lang="en-US" sz="4000" b="1" dirty="0">
+              <a:rPr lang="en-US" sz="4000" dirty="0">
                 <a:solidFill>
                   <a:srgbClr val="111111"/>
                 </a:solidFill>
@@ -18390,91 +18268,7 @@
                 <a:ea typeface="Times New Roman" pitchFamily="34" charset="-122"/>
                 <a:cs typeface="Times New Roman" pitchFamily="34" charset="-120"/>
               </a:rPr>
-              <a:t>Scale:</a:t>
-            </a:r>
-            <a:endParaRPr lang="en-US" sz="4000" dirty="0"/>
-          </a:p>
-          <a:p>
-            <a:pPr algn="l" marL="342900" indent="-342900">
-              <a:spcAft>
-                <a:spcPts val="800"/>
-              </a:spcAft>
-              <a:buSzPct val="100000"/>
-              <a:buChar char="•"/>
-            </a:pPr>
-            <a:r>
-              <a:rPr lang="en-US" sz="4000" dirty="0">
-                <a:solidFill>
-                  <a:srgbClr val="111111"/>
-                </a:solidFill>
-                <a:latin typeface="Times New Roman" pitchFamily="34" charset="0"/>
-                <a:ea typeface="Times New Roman" pitchFamily="34" charset="-122"/>
-                <a:cs typeface="Times New Roman" pitchFamily="34" charset="-120"/>
-              </a:rPr>
-              <a:t>+1: perfect positive correlation.</a:t>
-            </a:r>
-            <a:endParaRPr lang="en-US" sz="4000" dirty="0"/>
-          </a:p>
-          <a:p>
-            <a:pPr algn="l" marL="342900" indent="-342900">
-              <a:spcAft>
-                <a:spcPts val="800"/>
-              </a:spcAft>
-              <a:buSzPct val="100000"/>
-              <a:buChar char="•"/>
-            </a:pPr>
-            <a:r>
-              <a:rPr lang="en-US" sz="4000" dirty="0">
-                <a:solidFill>
-                  <a:srgbClr val="111111"/>
-                </a:solidFill>
-                <a:latin typeface="Times New Roman" pitchFamily="34" charset="0"/>
-                <a:ea typeface="Times New Roman" pitchFamily="34" charset="-122"/>
-                <a:cs typeface="Times New Roman" pitchFamily="34" charset="-120"/>
-              </a:rPr>
-              <a:t>+0.5 to +0.9: strong positive.</a:t>
-            </a:r>
-            <a:endParaRPr lang="en-US" sz="4000" dirty="0"/>
-          </a:p>
-          <a:p>
-            <a:pPr algn="l" marL="342900" indent="-342900">
-              <a:spcAft>
-                <a:spcPts val="800"/>
-              </a:spcAft>
-              <a:buSzPct val="100000"/>
-              <a:buChar char="•"/>
-            </a:pPr>
-            <a:r>
-              <a:rPr lang="en-US" sz="4000" dirty="0">
-                <a:solidFill>
-                  <a:srgbClr val="111111"/>
-                </a:solidFill>
-                <a:latin typeface="Times New Roman" pitchFamily="34" charset="0"/>
-                <a:ea typeface="Times New Roman" pitchFamily="34" charset="-122"/>
-                <a:cs typeface="Times New Roman" pitchFamily="34" charset="-120"/>
-              </a:rPr>
-              <a:t>+0.1 to +0.4: weak positive.</a:t>
-            </a:r>
-            <a:endParaRPr lang="en-US" sz="4000" dirty="0"/>
-          </a:p>
-          <a:p>
-            <a:pPr algn="l" marL="342900" indent="-342900">
-              <a:spcAft>
-                <a:spcPts val="800"/>
-              </a:spcAft>
-              <a:buSzPct val="100000"/>
-              <a:buChar char="•"/>
-            </a:pPr>
-            <a:r>
-              <a:rPr lang="en-US" sz="4000" dirty="0">
-                <a:solidFill>
-                  <a:srgbClr val="111111"/>
-                </a:solidFill>
-                <a:latin typeface="Times New Roman" pitchFamily="34" charset="0"/>
-                <a:ea typeface="Times New Roman" pitchFamily="34" charset="-122"/>
-                <a:cs typeface="Times New Roman" pitchFamily="34" charset="-120"/>
-              </a:rPr>
-              <a:t>0: no correlation.</a:t>
+              <a:t>Rs = +0.71 shows a fairly strong positive correlation: on this hill, soils tend to be deeper where slopes are steeper. This may be explained by vegetation or rock type.</a:t>
             </a:r>
             <a:endParaRPr lang="en-US" sz="4000" dirty="0"/>
           </a:p>
@@ -18592,9 +18386,129 @@
           </a:p>
         </p:txBody>
       </p:sp>
+      <p:sp>
+        <p:nvSpPr>
+          <p:cNvPr id="3" name="Text 1"/>
+          <p:cNvSpPr/>
+          <p:nvPr/>
+        </p:nvSpPr>
+        <p:spPr>
+          <a:xfrm>
+            <a:off x="365760" y="1005840"/>
+            <a:ext cx="11460175" cy="731520"/>
+          </a:xfrm>
+          <a:prstGeom prst="rect">
+            <a:avLst/>
+          </a:prstGeom>
+          <a:noFill/>
+          <a:ln/>
+        </p:spPr>
+        <p:txBody>
+          <a:bodyPr wrap="square" lIns="0" tIns="0" rIns="0" bIns="0" rtlCol="0" anchor="ctr">
+            <a:normAutofit/>
+          </a:bodyPr>
+          <a:lstStyle/>
+          <a:p>
+            <a:pPr algn="ctr" indent="0" marL="0">
+              <a:buNone/>
+            </a:pPr>
+            <a:r>
+              <a:rPr lang="en-US" sz="3600" b="1" dirty="0">
+                <a:solidFill>
+                  <a:srgbClr val="990011"/>
+                </a:solidFill>
+                <a:latin typeface="Times New Roman" pitchFamily="34" charset="0"/>
+                <a:ea typeface="Times New Roman" pitchFamily="34" charset="-122"/>
+                <a:cs typeface="Times New Roman" pitchFamily="34" charset="-120"/>
+              </a:rPr>
+              <a:t>4. Interpretation and Significance</a:t>
+            </a:r>
+            <a:endParaRPr lang="en-US" sz="3600" dirty="0"/>
+          </a:p>
+        </p:txBody>
+      </p:sp>
+      <p:sp>
+        <p:nvSpPr>
+          <p:cNvPr id="4" name="Text 2"/>
+          <p:cNvSpPr/>
+          <p:nvPr/>
+        </p:nvSpPr>
+        <p:spPr>
+          <a:xfrm>
+            <a:off x="365760" y="1783080"/>
+            <a:ext cx="6035040" cy="4617720"/>
+          </a:xfrm>
+          <a:prstGeom prst="rect">
+            <a:avLst/>
+          </a:prstGeom>
+          <a:noFill/>
+          <a:ln/>
+        </p:spPr>
+        <p:txBody>
+          <a:bodyPr wrap="square" lIns="0" tIns="0" rIns="0" bIns="0" rtlCol="0" anchor="t"/>
+          <a:lstStyle/>
+          <a:p>
+            <a:pPr algn="l" indent="0" marL="0">
+              <a:spcAft>
+                <a:spcPts val="800"/>
+              </a:spcAft>
+              <a:buNone/>
+            </a:pPr>
+            <a:r>
+              <a:rPr lang="en-US" sz="3600" i="1" dirty="0">
+                <a:solidFill>
+                  <a:srgbClr val="111111"/>
+                </a:solidFill>
+                <a:latin typeface="Times New Roman" pitchFamily="34" charset="0"/>
+                <a:ea typeface="Times New Roman" pitchFamily="34" charset="-122"/>
+                <a:cs typeface="Times New Roman" pitchFamily="34" charset="-120"/>
+              </a:rPr>
+              <a:t>Rs is interpreted and tested as follows:</a:t>
+            </a:r>
+            <a:endParaRPr lang="en-US" sz="3600" dirty="0"/>
+          </a:p>
+          <a:p>
+            <a:pPr algn="l" indent="0" marL="0">
+              <a:spcAft>
+                <a:spcPts val="800"/>
+              </a:spcAft>
+              <a:buNone/>
+            </a:pPr>
+            <a:r>
+              <a:rPr lang="en-US" sz="3600" b="1" dirty="0">
+                <a:solidFill>
+                  <a:srgbClr val="111111"/>
+                </a:solidFill>
+                <a:latin typeface="Times New Roman" pitchFamily="34" charset="0"/>
+                <a:ea typeface="Times New Roman" pitchFamily="34" charset="-122"/>
+                <a:cs typeface="Times New Roman" pitchFamily="34" charset="-120"/>
+              </a:rPr>
+              <a:t>Positive values: </a:t>
+            </a:r>
+            <a:pPr algn="l" indent="0" marL="0">
+              <a:spcAft>
+                <a:spcPts val="800"/>
+              </a:spcAft>
+              <a:buNone/>
+            </a:pPr>
+            <a:r>
+              <a:rPr lang="en-US" sz="3600" dirty="0">
+                <a:solidFill>
+                  <a:srgbClr val="111111"/>
+                </a:solidFill>
+                <a:latin typeface="Times New Roman" pitchFamily="34" charset="0"/>
+                <a:ea typeface="Times New Roman" pitchFamily="34" charset="-122"/>
+                <a:cs typeface="Times New Roman" pitchFamily="34" charset="-120"/>
+              </a:rPr>
+              <a:t>Rs = +1 is a perfect positive correlation, +0.5 to +0.9 a strong one and +0.1 to +0.4 a weak one. Rs = 0 means there is no correlation.</a:t>
+            </a:r>
+            <a:endParaRPr lang="en-US" sz="3600" dirty="0"/>
+          </a:p>
+        </p:txBody>
+      </p:sp>
       <p:pic>
         <p:nvPicPr>
-          <p:cNvPr id="3" name="Image 0" descr="/home/claude/f4/img/minesec_sheet.png">    </p:cNvPr>
+          <p:cNvPr id="5" name="Image 0" descr="/home/claude/f4/img/v2/stat2_rs_scale.png">    </p:cNvPr>
           <p:cNvPicPr>
             <a:picLocks noChangeAspect="1"/>
           </p:cNvPicPr>
@@ -18608,8 +18522,8 @@
         </p:blipFill>
         <p:spPr>
           <a:xfrm>
-            <a:off x="0" y="658368"/>
-            <a:ext cx="5120640" cy="5833872"/>
+            <a:off x="6537960" y="2849678"/>
+            <a:ext cx="5470855" cy="2137053"/>
           </a:xfrm>
           <a:prstGeom prst="rect">
             <a:avLst/>
@@ -18618,14 +18532,14 @@
       </p:pic>
       <p:sp>
         <p:nvSpPr>
-          <p:cNvPr id="4" name="Text 1"/>
+          <p:cNvPr id="6" name="Text 3"/>
           <p:cNvSpPr/>
           <p:nvPr/>
         </p:nvSpPr>
         <p:spPr>
           <a:xfrm>
-            <a:off x="5349240" y="1005840"/>
-            <a:ext cx="6522415" cy="731520"/>
+            <a:off x="6537960" y="6089904"/>
+            <a:ext cx="5470855" cy="347472"/>
           </a:xfrm>
           <a:prstGeom prst="rect">
             <a:avLst/>
@@ -18634,69 +18548,24 @@
           <a:ln/>
         </p:spPr>
         <p:txBody>
-          <a:bodyPr wrap="square" lIns="0" tIns="0" rIns="0" bIns="0" rtlCol="0" anchor="ctr">
-            <a:normAutofit/>
-          </a:bodyPr>
+          <a:bodyPr wrap="square" lIns="0" tIns="0" rIns="0" bIns="0" rtlCol="0" anchor="ctr"/>
           <a:lstStyle/>
           <a:p>
             <a:pPr algn="ctr" indent="0" marL="0">
               <a:buNone/>
             </a:pPr>
             <a:r>
-              <a:rPr lang="en-US" sz="3600" b="1" dirty="0">
-                <a:solidFill>
-                  <a:srgbClr val="990011"/>
+              <a:rPr lang="en-US" sz="1600" i="1" dirty="0">
+                <a:solidFill>
+                  <a:srgbClr val="555555"/>
                 </a:solidFill>
                 <a:latin typeface="Times New Roman" pitchFamily="34" charset="0"/>
                 <a:ea typeface="Times New Roman" pitchFamily="34" charset="-122"/>
                 <a:cs typeface="Times New Roman" pitchFamily="34" charset="-120"/>
               </a:rPr>
-              <a:t>4. Interpretation and Significance (continued)</a:t>
-            </a:r>
-            <a:endParaRPr lang="en-US" sz="3600" dirty="0"/>
-          </a:p>
-        </p:txBody>
-      </p:sp>
-      <p:sp>
-        <p:nvSpPr>
-          <p:cNvPr id="5" name="Text 2"/>
-          <p:cNvSpPr/>
-          <p:nvPr/>
-        </p:nvSpPr>
-        <p:spPr>
-          <a:xfrm>
-            <a:off x="5349240" y="1783080"/>
-            <a:ext cx="6522415" cy="4663440"/>
-          </a:xfrm>
-          <a:prstGeom prst="rect">
-            <a:avLst/>
-          </a:prstGeom>
-          <a:noFill/>
-          <a:ln/>
-        </p:spPr>
-        <p:txBody>
-          <a:bodyPr wrap="square" lIns="0" tIns="0" rIns="0" bIns="0" rtlCol="0" anchor="t"/>
-          <a:lstStyle/>
-          <a:p>
-            <a:pPr algn="l" marL="342900" indent="-342900">
-              <a:spcAft>
-                <a:spcPts val="800"/>
-              </a:spcAft>
-              <a:buSzPct val="100000"/>
-              <a:buChar char="•"/>
-            </a:pPr>
-            <a:r>
-              <a:rPr lang="en-US" sz="4000" dirty="0">
-                <a:solidFill>
-                  <a:srgbClr val="111111"/>
-                </a:solidFill>
-                <a:latin typeface="Times New Roman" pitchFamily="34" charset="0"/>
-                <a:ea typeface="Times New Roman" pitchFamily="34" charset="-122"/>
-                <a:cs typeface="Times New Roman" pitchFamily="34" charset="-120"/>
-              </a:rPr>
-              <a:t>−0.1 to −0.4: weak negative; −0.5 to −0.9: strong negative; −1: perfect negative.</a:t>
-            </a:r>
-            <a:endParaRPr lang="en-US" sz="4000" dirty="0"/>
+              <a:t>Illustration: the scale of Rs</a:t>
+            </a:r>
+            <a:endParaRPr lang="en-US" sz="1600" dirty="0"/>
           </a:p>
         </p:txBody>
       </p:sp>
@@ -19031,109 +18900,9 @@
           </a:p>
         </p:txBody>
       </p:sp>
-      <p:sp>
-        <p:nvSpPr>
-          <p:cNvPr id="3" name="Text 1"/>
-          <p:cNvSpPr/>
-          <p:nvPr/>
-        </p:nvSpPr>
-        <p:spPr>
-          <a:xfrm>
-            <a:off x="365760" y="1005840"/>
-            <a:ext cx="11460175" cy="731520"/>
-          </a:xfrm>
-          <a:prstGeom prst="rect">
-            <a:avLst/>
-          </a:prstGeom>
-          <a:noFill/>
-          <a:ln/>
-        </p:spPr>
-        <p:txBody>
-          <a:bodyPr wrap="square" lIns="0" tIns="0" rIns="0" bIns="0" rtlCol="0" anchor="ctr">
-            <a:normAutofit/>
-          </a:bodyPr>
-          <a:lstStyle/>
-          <a:p>
-            <a:pPr algn="ctr" indent="0" marL="0">
-              <a:buNone/>
-            </a:pPr>
-            <a:r>
-              <a:rPr lang="en-US" sz="3600" b="1" dirty="0">
-                <a:solidFill>
-                  <a:srgbClr val="990011"/>
-                </a:solidFill>
-                <a:latin typeface="Times New Roman" pitchFamily="34" charset="0"/>
-                <a:ea typeface="Times New Roman" pitchFamily="34" charset="-122"/>
-                <a:cs typeface="Times New Roman" pitchFamily="34" charset="-120"/>
-              </a:rPr>
-              <a:t>4. Interpretation and Significance</a:t>
-            </a:r>
-            <a:endParaRPr lang="en-US" sz="3600" dirty="0"/>
-          </a:p>
-        </p:txBody>
-      </p:sp>
-      <p:sp>
-        <p:nvSpPr>
-          <p:cNvPr id="4" name="Text 2"/>
-          <p:cNvSpPr/>
-          <p:nvPr/>
-        </p:nvSpPr>
-        <p:spPr>
-          <a:xfrm>
-            <a:off x="365760" y="1783080"/>
-            <a:ext cx="4846320" cy="4617720"/>
-          </a:xfrm>
-          <a:prstGeom prst="rect">
-            <a:avLst/>
-          </a:prstGeom>
-          <a:noFill/>
-          <a:ln/>
-        </p:spPr>
-        <p:txBody>
-          <a:bodyPr wrap="square" lIns="0" tIns="0" rIns="0" bIns="0" rtlCol="0" anchor="t"/>
-          <a:lstStyle/>
-          <a:p>
-            <a:pPr algn="l" indent="0" marL="0">
-              <a:spcAft>
-                <a:spcPts val="800"/>
-              </a:spcAft>
-              <a:buNone/>
-            </a:pPr>
-            <a:r>
-              <a:rPr lang="en-US" sz="3600" b="1" dirty="0">
-                <a:solidFill>
-                  <a:srgbClr val="111111"/>
-                </a:solidFill>
-                <a:latin typeface="Times New Roman" pitchFamily="34" charset="0"/>
-                <a:ea typeface="Times New Roman" pitchFamily="34" charset="-122"/>
-                <a:cs typeface="Times New Roman" pitchFamily="34" charset="-120"/>
-              </a:rPr>
-              <a:t>Significance test: </a:t>
-            </a:r>
-            <a:pPr algn="l" indent="0" marL="0">
-              <a:spcAft>
-                <a:spcPts val="800"/>
-              </a:spcAft>
-              <a:buNone/>
-            </a:pPr>
-            <a:r>
-              <a:rPr lang="en-US" sz="3600" dirty="0">
-                <a:solidFill>
-                  <a:srgbClr val="111111"/>
-                </a:solidFill>
-                <a:latin typeface="Times New Roman" pitchFamily="34" charset="0"/>
-                <a:ea typeface="Times New Roman" pitchFamily="34" charset="-122"/>
-                <a:cs typeface="Times New Roman" pitchFamily="34" charset="-120"/>
-              </a:rPr>
-              <a:t>Rs is compared with critical values from tables for the same n.</a:t>
-            </a:r>
-            <a:endParaRPr lang="en-US" sz="3600" dirty="0"/>
-          </a:p>
-        </p:txBody>
-      </p:sp>
       <p:pic>
         <p:nvPicPr>
-          <p:cNvPr id="5" name="Image 0" descr="/home/claude/f4/img/v2/stat2_rs_scale.png">    </p:cNvPr>
+          <p:cNvPr id="3" name="Image 0" descr="/home/claude/f4/img/minesec_sheet.png">    </p:cNvPr>
           <p:cNvPicPr>
             <a:picLocks noChangeAspect="1"/>
           </p:cNvPicPr>
@@ -19147,8 +18916,8 @@
         </p:blipFill>
         <p:spPr>
           <a:xfrm>
-            <a:off x="5349240" y="2617506"/>
-            <a:ext cx="6659575" cy="2601397"/>
+            <a:off x="0" y="658368"/>
+            <a:ext cx="5120640" cy="5833872"/>
           </a:xfrm>
           <a:prstGeom prst="rect">
             <a:avLst/>
@@ -19157,14 +18926,14 @@
       </p:pic>
       <p:sp>
         <p:nvSpPr>
-          <p:cNvPr id="6" name="Text 3"/>
+          <p:cNvPr id="4" name="Text 1"/>
           <p:cNvSpPr/>
           <p:nvPr/>
         </p:nvSpPr>
         <p:spPr>
           <a:xfrm>
-            <a:off x="5349240" y="6089904"/>
-            <a:ext cx="6659575" cy="347472"/>
+            <a:off x="5349240" y="1005840"/>
+            <a:ext cx="6522415" cy="731520"/>
           </a:xfrm>
           <a:prstGeom prst="rect">
             <a:avLst/>
@@ -19173,24 +18942,85 @@
           <a:ln/>
         </p:spPr>
         <p:txBody>
-          <a:bodyPr wrap="square" lIns="0" tIns="0" rIns="0" bIns="0" rtlCol="0" anchor="ctr"/>
+          <a:bodyPr wrap="square" lIns="0" tIns="0" rIns="0" bIns="0" rtlCol="0" anchor="ctr">
+            <a:normAutofit/>
+          </a:bodyPr>
           <a:lstStyle/>
           <a:p>
             <a:pPr algn="ctr" indent="0" marL="0">
               <a:buNone/>
             </a:pPr>
             <a:r>
-              <a:rPr lang="en-US" sz="1600" i="1" dirty="0">
-                <a:solidFill>
-                  <a:srgbClr val="555555"/>
+              <a:rPr lang="en-US" sz="3600" b="1" dirty="0">
+                <a:solidFill>
+                  <a:srgbClr val="990011"/>
                 </a:solidFill>
                 <a:latin typeface="Times New Roman" pitchFamily="34" charset="0"/>
                 <a:ea typeface="Times New Roman" pitchFamily="34" charset="-122"/>
                 <a:cs typeface="Times New Roman" pitchFamily="34" charset="-120"/>
               </a:rPr>
-              <a:t>Illustration: interpreting Rs</a:t>
-            </a:r>
-            <a:endParaRPr lang="en-US" sz="1600" dirty="0"/>
+              <a:t>4. Interpretation and Significance</a:t>
+            </a:r>
+            <a:endParaRPr lang="en-US" sz="3600" dirty="0"/>
+          </a:p>
+        </p:txBody>
+      </p:sp>
+      <p:sp>
+        <p:nvSpPr>
+          <p:cNvPr id="5" name="Text 2"/>
+          <p:cNvSpPr/>
+          <p:nvPr/>
+        </p:nvSpPr>
+        <p:spPr>
+          <a:xfrm>
+            <a:off x="5349240" y="1783080"/>
+            <a:ext cx="6522415" cy="4663440"/>
+          </a:xfrm>
+          <a:prstGeom prst="rect">
+            <a:avLst/>
+          </a:prstGeom>
+          <a:noFill/>
+          <a:ln/>
+        </p:spPr>
+        <p:txBody>
+          <a:bodyPr wrap="square" lIns="0" tIns="0" rIns="0" bIns="0" rtlCol="0" anchor="t"/>
+          <a:lstStyle/>
+          <a:p>
+            <a:pPr algn="l" indent="0" marL="0">
+              <a:spcAft>
+                <a:spcPts val="800"/>
+              </a:spcAft>
+              <a:buNone/>
+            </a:pPr>
+            <a:r>
+              <a:rPr lang="en-US" sz="4000" b="1" dirty="0">
+                <a:solidFill>
+                  <a:srgbClr val="111111"/>
+                </a:solidFill>
+                <a:latin typeface="Times New Roman" pitchFamily="34" charset="0"/>
+                <a:ea typeface="Times New Roman" pitchFamily="34" charset="-122"/>
+                <a:cs typeface="Times New Roman" pitchFamily="34" charset="-120"/>
+              </a:rPr>
+              <a:t>Negative values: </a:t>
+            </a:r>
+            <a:pPr algn="l" indent="0" marL="0">
+              <a:spcAft>
+                <a:spcPts val="800"/>
+              </a:spcAft>
+              <a:buNone/>
+            </a:pPr>
+            <a:r>
+              <a:rPr lang="en-US" sz="4000" dirty="0">
+                <a:solidFill>
+                  <a:srgbClr val="111111"/>
+                </a:solidFill>
+                <a:latin typeface="Times New Roman" pitchFamily="34" charset="0"/>
+                <a:ea typeface="Times New Roman" pitchFamily="34" charset="-122"/>
+                <a:cs typeface="Times New Roman" pitchFamily="34" charset="-120"/>
+              </a:rPr>
+              <a:t>Rs = −1 is a perfect negative correlation, −0.5 to −0.9 a strong one and −0.1 to −0.4 a weak one. The sign shows the direction and the value shows the strength.</a:t>
+            </a:r>
+            <a:endParaRPr lang="en-US" sz="4000" dirty="0"/>
           </a:p>
         </p:txBody>
       </p:sp>
@@ -19323,7 +19153,7 @@
         <p:spPr>
           <a:xfrm>
             <a:off x="0" y="658368"/>
-            <a:ext cx="2468880" cy="5833872"/>
+            <a:ext cx="5120640" cy="5833872"/>
           </a:xfrm>
           <a:prstGeom prst="rect">
             <a:avLst/>
@@ -19338,8 +19168,8 @@
         </p:nvSpPr>
         <p:spPr>
           <a:xfrm>
-            <a:off x="2697480" y="1005840"/>
-            <a:ext cx="9174175" cy="731520"/>
+            <a:off x="5349240" y="1005840"/>
+            <a:ext cx="6522415" cy="731520"/>
           </a:xfrm>
           <a:prstGeom prst="rect">
             <a:avLst/>
@@ -19379,8 +19209,8 @@
         </p:nvSpPr>
         <p:spPr>
           <a:xfrm>
-            <a:off x="2697480" y="1783080"/>
-            <a:ext cx="9174175" cy="4663440"/>
+            <a:off x="5349240" y="1783080"/>
+            <a:ext cx="6522415" cy="4663440"/>
           </a:xfrm>
           <a:prstGeom prst="rect">
             <a:avLst/>
@@ -19407,7 +19237,7 @@
                 <a:ea typeface="Times New Roman" pitchFamily="34" charset="-122"/>
                 <a:cs typeface="Times New Roman" pitchFamily="34" charset="-120"/>
               </a:rPr>
-              <a:t>Application: </a:t>
+              <a:t>Significance test: </a:t>
             </a:r>
             <a:pPr algn="l" indent="0" marL="0">
               <a:spcAft>
@@ -19424,44 +19254,7 @@
                 <a:ea typeface="Times New Roman" pitchFamily="34" charset="-122"/>
                 <a:cs typeface="Times New Roman" pitchFamily="34" charset="-120"/>
               </a:rPr>
-              <a:t>For n = 10, the critical values are 0.648 (95 %) and 0.794 (99 %), so Rs = 0.71 is significant at 95 % but not at 99 %.</a:t>
-            </a:r>
-            <a:endParaRPr lang="en-US" sz="4000" dirty="0"/>
-          </a:p>
-          <a:p>
-            <a:pPr algn="l" indent="0" marL="0">
-              <a:spcAft>
-                <a:spcPts val="800"/>
-              </a:spcAft>
-              <a:buNone/>
-            </a:pPr>
-            <a:r>
-              <a:rPr lang="en-US" sz="4000" b="1" dirty="0">
-                <a:solidFill>
-                  <a:srgbClr val="111111"/>
-                </a:solidFill>
-                <a:latin typeface="Times New Roman" pitchFamily="34" charset="0"/>
-                <a:ea typeface="Times New Roman" pitchFamily="34" charset="-122"/>
-                <a:cs typeface="Times New Roman" pitchFamily="34" charset="-120"/>
-              </a:rPr>
-              <a:t>Conclusion: </a:t>
-            </a:r>
-            <a:pPr algn="l" indent="0" marL="0">
-              <a:spcAft>
-                <a:spcPts val="800"/>
-              </a:spcAft>
-              <a:buNone/>
-            </a:pPr>
-            <a:r>
-              <a:rPr lang="en-US" sz="4000" dirty="0">
-                <a:solidFill>
-                  <a:srgbClr val="111111"/>
-                </a:solidFill>
-                <a:latin typeface="Times New Roman" pitchFamily="34" charset="0"/>
-                <a:ea typeface="Times New Roman" pitchFamily="34" charset="-122"/>
-                <a:cs typeface="Times New Roman" pitchFamily="34" charset="-120"/>
-              </a:rPr>
-              <a:t>We reject H0 at the 95 % level: the relationship is real, not due to chance.</a:t>
+              <a:t>Rs is compared with the critical values given in tables for the same number of pairs. If Rs is greater than the critical value, the correlation is significant.</a:t>
             </a:r>
             <a:endParaRPr lang="en-US" sz="4000" dirty="0"/>
           </a:p>
@@ -19573,7 +19366,7 @@
                 <a:ea typeface="Calibri" pitchFamily="34" charset="-122"/>
                 <a:cs typeface="Calibri" pitchFamily="34" charset="-120"/>
               </a:rPr>
-              <a:t>FORMATIVE EVALUATION</a:t>
+              <a:t>BOARD SUMMARY</a:t>
             </a:r>
             <a:endParaRPr lang="en-US" sz="1400" dirty="0"/>
           </a:p>
@@ -19596,7 +19389,7 @@
         <p:spPr>
           <a:xfrm>
             <a:off x="0" y="658368"/>
-            <a:ext cx="5120640" cy="5833872"/>
+            <a:ext cx="2468880" cy="5833872"/>
           </a:xfrm>
           <a:prstGeom prst="rect">
             <a:avLst/>
@@ -19611,8 +19404,8 @@
         </p:nvSpPr>
         <p:spPr>
           <a:xfrm>
-            <a:off x="5349240" y="1005840"/>
-            <a:ext cx="6522415" cy="731520"/>
+            <a:off x="2697480" y="1005840"/>
+            <a:ext cx="9174175" cy="731520"/>
           </a:xfrm>
           <a:prstGeom prst="rect">
             <a:avLst/>
@@ -19638,7 +19431,7 @@
                 <a:ea typeface="Times New Roman" pitchFamily="34" charset="-122"/>
                 <a:cs typeface="Times New Roman" pitchFamily="34" charset="-120"/>
               </a:rPr>
-              <a:t>Evaluation 1</a:t>
+              <a:t>4. Interpretation and Significance</a:t>
             </a:r>
             <a:endParaRPr lang="en-US" sz="3600" dirty="0"/>
           </a:p>
@@ -19652,8 +19445,8 @@
         </p:nvSpPr>
         <p:spPr>
           <a:xfrm>
-            <a:off x="5349240" y="1783080"/>
-            <a:ext cx="6522415" cy="4663440"/>
+            <a:off x="2697480" y="1783080"/>
+            <a:ext cx="9174175" cy="4663440"/>
           </a:xfrm>
           <a:prstGeom prst="rect">
             <a:avLst/>
@@ -19672,7 +19465,7 @@
               <a:buNone/>
             </a:pPr>
             <a:r>
-              <a:rPr lang="en-US" sz="4000" dirty="0">
+              <a:rPr lang="en-US" sz="4000" b="1" dirty="0">
                 <a:solidFill>
                   <a:srgbClr val="111111"/>
                 </a:solidFill>
@@ -19680,7 +19473,24 @@
                 <a:ea typeface="Times New Roman" pitchFamily="34" charset="-122"/>
                 <a:cs typeface="Times New Roman" pitchFamily="34" charset="-120"/>
               </a:rPr>
-              <a:t>State a null hypothesis for rainfall and crop yield.</a:t>
+              <a:t>Application and conclusion: </a:t>
+            </a:r>
+            <a:pPr algn="l" indent="0" marL="0">
+              <a:spcAft>
+                <a:spcPts val="800"/>
+              </a:spcAft>
+              <a:buNone/>
+            </a:pPr>
+            <a:r>
+              <a:rPr lang="en-US" sz="4000" dirty="0">
+                <a:solidFill>
+                  <a:srgbClr val="111111"/>
+                </a:solidFill>
+                <a:latin typeface="Times New Roman" pitchFamily="34" charset="0"/>
+                <a:ea typeface="Times New Roman" pitchFamily="34" charset="-122"/>
+                <a:cs typeface="Times New Roman" pitchFamily="34" charset="-120"/>
+              </a:rPr>
+              <a:t>For n = 10, the critical values are 0.648 at 95 % and 0.794 at 99 %, so Rs = 0.71 is significant at 95 % but not at 99 %. We therefore reject H0 at the 95 % level: the relationship is real and not due to chance.</a:t>
             </a:r>
             <a:endParaRPr lang="en-US" sz="4000" dirty="0"/>
           </a:p>
@@ -19857,7 +19667,7 @@
                 <a:ea typeface="Times New Roman" pitchFamily="34" charset="-122"/>
                 <a:cs typeface="Times New Roman" pitchFamily="34" charset="-120"/>
               </a:rPr>
-              <a:t>Expected Answer</a:t>
+              <a:t>Evaluation 1</a:t>
             </a:r>
             <a:endParaRPr lang="en-US" sz="3600" dirty="0"/>
           </a:p>
@@ -19899,7 +19709,7 @@
                 <a:ea typeface="Times New Roman" pitchFamily="34" charset="-122"/>
                 <a:cs typeface="Times New Roman" pitchFamily="34" charset="-120"/>
               </a:rPr>
-              <a:t>H0: there is no significant relationship between annual rainfall and crop yield.</a:t>
+              <a:t>State a null hypothesis for rainfall and crop yield.</a:t>
             </a:r>
             <a:endParaRPr lang="en-US" sz="4000" dirty="0"/>
           </a:p>
@@ -20076,7 +19886,7 @@
                 <a:ea typeface="Times New Roman" pitchFamily="34" charset="-122"/>
                 <a:cs typeface="Times New Roman" pitchFamily="34" charset="-120"/>
               </a:rPr>
-              <a:t>Evaluation 2</a:t>
+              <a:t>Expected Answer</a:t>
             </a:r>
             <a:endParaRPr lang="en-US" sz="3600" dirty="0"/>
           </a:p>
@@ -20118,7 +19928,7 @@
                 <a:ea typeface="Times New Roman" pitchFamily="34" charset="-122"/>
                 <a:cs typeface="Times New Roman" pitchFamily="34" charset="-120"/>
               </a:rPr>
-              <a:t>Six pairs give Σd² = 4. Calculate Rs and interpret it.</a:t>
+              <a:t>H0: there is no significant relationship between annual rainfall and crop yield.</a:t>
             </a:r>
             <a:endParaRPr lang="en-US" sz="4000" dirty="0"/>
           </a:p>
@@ -20295,7 +20105,7 @@
                 <a:ea typeface="Times New Roman" pitchFamily="34" charset="-122"/>
                 <a:cs typeface="Times New Roman" pitchFamily="34" charset="-120"/>
               </a:rPr>
-              <a:t>Expected Answer</a:t>
+              <a:t>Evaluation 2</a:t>
             </a:r>
             <a:endParaRPr lang="en-US" sz="3600" dirty="0"/>
           </a:p>
@@ -20337,7 +20147,7 @@
                 <a:ea typeface="Times New Roman" pitchFamily="34" charset="-122"/>
                 <a:cs typeface="Times New Roman" pitchFamily="34" charset="-120"/>
               </a:rPr>
-              <a:t>Rs = 1 − 24 ÷ 210 ≈ +0.89: a strong positive correlation.</a:t>
+              <a:t>Six pairs give Σd² = 4. Calculate Rs and interpret it.</a:t>
             </a:r>
             <a:endParaRPr lang="en-US" sz="4000" dirty="0"/>
           </a:p>
@@ -20449,7 +20259,7 @@
                 <a:ea typeface="Calibri" pitchFamily="34" charset="-122"/>
                 <a:cs typeface="Calibri" pitchFamily="34" charset="-120"/>
               </a:rPr>
-              <a:t>REMEDIATION</a:t>
+              <a:t>FORMATIVE EVALUATION</a:t>
             </a:r>
             <a:endParaRPr lang="en-US" sz="1400" dirty="0"/>
           </a:p>
@@ -20472,7 +20282,7 @@
         <p:spPr>
           <a:xfrm>
             <a:off x="0" y="658368"/>
-            <a:ext cx="3840480" cy="5833872"/>
+            <a:ext cx="5120640" cy="5833872"/>
           </a:xfrm>
           <a:prstGeom prst="rect">
             <a:avLst/>
@@ -20487,8 +20297,8 @@
         </p:nvSpPr>
         <p:spPr>
           <a:xfrm>
-            <a:off x="4069080" y="1005840"/>
-            <a:ext cx="7802575" cy="731520"/>
+            <a:off x="5349240" y="1005840"/>
+            <a:ext cx="6522415" cy="731520"/>
           </a:xfrm>
           <a:prstGeom prst="rect">
             <a:avLst/>
@@ -20514,7 +20324,7 @@
                 <a:ea typeface="Times New Roman" pitchFamily="34" charset="-122"/>
                 <a:cs typeface="Times New Roman" pitchFamily="34" charset="-120"/>
               </a:rPr>
-              <a:t>Remediation</a:t>
+              <a:t>Expected Answer</a:t>
             </a:r>
             <a:endParaRPr lang="en-US" sz="3600" dirty="0"/>
           </a:p>
@@ -20528,8 +20338,8 @@
         </p:nvSpPr>
         <p:spPr>
           <a:xfrm>
-            <a:off x="4069080" y="1783080"/>
-            <a:ext cx="7802575" cy="4663440"/>
+            <a:off x="5349240" y="1783080"/>
+            <a:ext cx="6522415" cy="4663440"/>
           </a:xfrm>
           <a:prstGeom prst="rect">
             <a:avLst/>
@@ -20548,7 +20358,7 @@
               <a:buNone/>
             </a:pPr>
             <a:r>
-              <a:rPr lang="en-US" sz="4000" b="1" dirty="0">
+              <a:rPr lang="en-US" sz="4000" dirty="0">
                 <a:solidFill>
                   <a:srgbClr val="111111"/>
                 </a:solidFill>
@@ -20556,73 +20366,7 @@
                 <a:ea typeface="Times New Roman" pitchFamily="34" charset="-122"/>
                 <a:cs typeface="Times New Roman" pitchFamily="34" charset="-120"/>
               </a:rPr>
-              <a:t>Fill in the blanks:</a:t>
-            </a:r>
-            <a:endParaRPr lang="en-US" sz="4000" dirty="0"/>
-          </a:p>
-          <a:p>
-            <a:pPr algn="l" marL="342900" indent="-342900">
-              <a:spcAft>
-                <a:spcPts val="800"/>
-              </a:spcAft>
-              <a:buSzPct val="100000"/>
-              <a:buFont typeface="+mj-lt"/>
-              <a:buAutoNum type="arabicPeriod" startAt="1"/>
-            </a:pPr>
-            <a:r>
-              <a:rPr lang="en-US" sz="4000" dirty="0">
-                <a:solidFill>
-                  <a:srgbClr val="111111"/>
-                </a:solidFill>
-                <a:latin typeface="Times New Roman" pitchFamily="34" charset="0"/>
-                <a:ea typeface="Times New Roman" pitchFamily="34" charset="-122"/>
-                <a:cs typeface="Times New Roman" pitchFamily="34" charset="-120"/>
-              </a:rPr>
-              <a:t>Rs always lies between −1 and ______.</a:t>
-            </a:r>
-            <a:endParaRPr lang="en-US" sz="4000" dirty="0"/>
-          </a:p>
-          <a:p>
-            <a:pPr algn="l" marL="342900" indent="-342900">
-              <a:spcAft>
-                <a:spcPts val="800"/>
-              </a:spcAft>
-              <a:buSzPct val="100000"/>
-              <a:buFont typeface="+mj-lt"/>
-              <a:buAutoNum type="arabicPeriod" startAt="1"/>
-            </a:pPr>
-            <a:r>
-              <a:rPr lang="en-US" sz="4000" dirty="0">
-                <a:solidFill>
-                  <a:srgbClr val="111111"/>
-                </a:solidFill>
-                <a:latin typeface="Times New Roman" pitchFamily="34" charset="0"/>
-                <a:ea typeface="Times New Roman" pitchFamily="34" charset="-122"/>
-                <a:cs typeface="Times New Roman" pitchFamily="34" charset="-120"/>
-              </a:rPr>
-              <a:t>The null hypothesis says there is ______ relationship.</a:t>
-            </a:r>
-            <a:endParaRPr lang="en-US" sz="4000" dirty="0"/>
-          </a:p>
-          <a:p>
-            <a:pPr algn="l" marL="342900" indent="-342900">
-              <a:spcAft>
-                <a:spcPts val="800"/>
-              </a:spcAft>
-              <a:buSzPct val="100000"/>
-              <a:buFont typeface="+mj-lt"/>
-              <a:buAutoNum type="arabicPeriod" startAt="1"/>
-            </a:pPr>
-            <a:r>
-              <a:rPr lang="en-US" sz="4000" dirty="0">
-                <a:solidFill>
-                  <a:srgbClr val="111111"/>
-                </a:solidFill>
-                <a:latin typeface="Times New Roman" pitchFamily="34" charset="0"/>
-                <a:ea typeface="Times New Roman" pitchFamily="34" charset="-122"/>
-                <a:cs typeface="Times New Roman" pitchFamily="34" charset="-120"/>
-              </a:rPr>
-              <a:t>Rs = 1 − (6Σd²) ÷ (n³ − ______).</a:t>
+              <a:t>Rs = 1 − 24 ÷ 210 ≈ +0.89: a strong positive correlation.</a:t>
             </a:r>
             <a:endParaRPr lang="en-US" sz="4000" dirty="0"/>
           </a:p>
@@ -20734,7 +20478,7 @@
                 <a:ea typeface="Calibri" pitchFamily="34" charset="-122"/>
                 <a:cs typeface="Calibri" pitchFamily="34" charset="-120"/>
               </a:rPr>
-              <a:t>HOMEWORK</a:t>
+              <a:t>REMEDIATION</a:t>
             </a:r>
             <a:endParaRPr lang="en-US" sz="1400" dirty="0"/>
           </a:p>
@@ -20757,7 +20501,7 @@
         <p:spPr>
           <a:xfrm>
             <a:off x="0" y="658368"/>
-            <a:ext cx="5120640" cy="5833872"/>
+            <a:ext cx="3840480" cy="5833872"/>
           </a:xfrm>
           <a:prstGeom prst="rect">
             <a:avLst/>
@@ -20772,8 +20516,8 @@
         </p:nvSpPr>
         <p:spPr>
           <a:xfrm>
-            <a:off x="5349240" y="1005840"/>
-            <a:ext cx="6522415" cy="731520"/>
+            <a:off x="4069080" y="1005840"/>
+            <a:ext cx="7802575" cy="731520"/>
           </a:xfrm>
           <a:prstGeom prst="rect">
             <a:avLst/>
@@ -20799,7 +20543,7 @@
                 <a:ea typeface="Times New Roman" pitchFamily="34" charset="-122"/>
                 <a:cs typeface="Times New Roman" pitchFamily="34" charset="-120"/>
               </a:rPr>
-              <a:t>Homework</a:t>
+              <a:t>Remediation</a:t>
             </a:r>
             <a:endParaRPr lang="en-US" sz="3600" dirty="0"/>
           </a:p>
@@ -20813,8 +20557,8 @@
         </p:nvSpPr>
         <p:spPr>
           <a:xfrm>
-            <a:off x="5349240" y="1783080"/>
-            <a:ext cx="6522415" cy="4663440"/>
+            <a:off x="4069080" y="1783080"/>
+            <a:ext cx="7802575" cy="4663440"/>
           </a:xfrm>
           <a:prstGeom prst="rect">
             <a:avLst/>
@@ -20833,7 +20577,7 @@
               <a:buNone/>
             </a:pPr>
             <a:r>
-              <a:rPr lang="en-US" sz="4000" dirty="0">
+              <a:rPr lang="en-US" sz="4000" b="1" dirty="0">
                 <a:solidFill>
                   <a:srgbClr val="111111"/>
                 </a:solidFill>
@@ -20841,7 +20585,73 @@
                 <a:ea typeface="Times New Roman" pitchFamily="34" charset="-122"/>
                 <a:cs typeface="Times New Roman" pitchFamily="34" charset="-120"/>
               </a:rPr>
-              <a:t>Name three types of graphs.</a:t>
+              <a:t>Fill in the blanks:</a:t>
+            </a:r>
+            <a:endParaRPr lang="en-US" sz="4000" dirty="0"/>
+          </a:p>
+          <a:p>
+            <a:pPr algn="l" marL="342900" indent="-342900">
+              <a:spcAft>
+                <a:spcPts val="800"/>
+              </a:spcAft>
+              <a:buSzPct val="100000"/>
+              <a:buFont typeface="+mj-lt"/>
+              <a:buAutoNum type="arabicPeriod" startAt="1"/>
+            </a:pPr>
+            <a:r>
+              <a:rPr lang="en-US" sz="4000" dirty="0">
+                <a:solidFill>
+                  <a:srgbClr val="111111"/>
+                </a:solidFill>
+                <a:latin typeface="Times New Roman" pitchFamily="34" charset="0"/>
+                <a:ea typeface="Times New Roman" pitchFamily="34" charset="-122"/>
+                <a:cs typeface="Times New Roman" pitchFamily="34" charset="-120"/>
+              </a:rPr>
+              <a:t>Rs always lies between −1 and ______.</a:t>
+            </a:r>
+            <a:endParaRPr lang="en-US" sz="4000" dirty="0"/>
+          </a:p>
+          <a:p>
+            <a:pPr algn="l" marL="342900" indent="-342900">
+              <a:spcAft>
+                <a:spcPts val="800"/>
+              </a:spcAft>
+              <a:buSzPct val="100000"/>
+              <a:buFont typeface="+mj-lt"/>
+              <a:buAutoNum type="arabicPeriod" startAt="1"/>
+            </a:pPr>
+            <a:r>
+              <a:rPr lang="en-US" sz="4000" dirty="0">
+                <a:solidFill>
+                  <a:srgbClr val="111111"/>
+                </a:solidFill>
+                <a:latin typeface="Times New Roman" pitchFamily="34" charset="0"/>
+                <a:ea typeface="Times New Roman" pitchFamily="34" charset="-122"/>
+                <a:cs typeface="Times New Roman" pitchFamily="34" charset="-120"/>
+              </a:rPr>
+              <a:t>The null hypothesis says there is ______ relationship.</a:t>
+            </a:r>
+            <a:endParaRPr lang="en-US" sz="4000" dirty="0"/>
+          </a:p>
+          <a:p>
+            <a:pPr algn="l" marL="342900" indent="-342900">
+              <a:spcAft>
+                <a:spcPts val="800"/>
+              </a:spcAft>
+              <a:buSzPct val="100000"/>
+              <a:buFont typeface="+mj-lt"/>
+              <a:buAutoNum type="arabicPeriod" startAt="1"/>
+            </a:pPr>
+            <a:r>
+              <a:rPr lang="en-US" sz="4000" dirty="0">
+                <a:solidFill>
+                  <a:srgbClr val="111111"/>
+                </a:solidFill>
+                <a:latin typeface="Times New Roman" pitchFamily="34" charset="0"/>
+                <a:ea typeface="Times New Roman" pitchFamily="34" charset="-122"/>
+                <a:cs typeface="Times New Roman" pitchFamily="34" charset="-120"/>
+              </a:rPr>
+              <a:t>Rs = 1 − (6Σd²) ÷ (n³ − ______).</a:t>
             </a:r>
             <a:endParaRPr lang="en-US" sz="4000" dirty="0"/>
           </a:p>
@@ -20953,7 +20763,7 @@
                 <a:ea typeface="Calibri" pitchFamily="34" charset="-122"/>
                 <a:cs typeface="Calibri" pitchFamily="34" charset="-120"/>
               </a:rPr>
-              <a:t>NEXT LESSON</a:t>
+              <a:t>HOMEWORK</a:t>
             </a:r>
             <a:endParaRPr lang="en-US" sz="1400" dirty="0"/>
           </a:p>
@@ -21018,7 +20828,7 @@
                 <a:ea typeface="Times New Roman" pitchFamily="34" charset="-122"/>
                 <a:cs typeface="Times New Roman" pitchFamily="34" charset="-120"/>
               </a:rPr>
-              <a:t>Next Lesson</a:t>
+              <a:t>Homework</a:t>
             </a:r>
             <a:endParaRPr lang="en-US" sz="3600" dirty="0"/>
           </a:p>
@@ -21042,17 +20852,17 @@
           <a:ln/>
         </p:spPr>
         <p:txBody>
-          <a:bodyPr wrap="square" lIns="0" tIns="0" rIns="0" bIns="0" rtlCol="0" anchor="ctr"/>
-          <a:lstStyle/>
-          <a:p>
-            <a:pPr algn="ctr" indent="0" marL="0">
+          <a:bodyPr wrap="square" lIns="0" tIns="0" rIns="0" bIns="0" rtlCol="0" anchor="t"/>
+          <a:lstStyle/>
+          <a:p>
+            <a:pPr algn="l" indent="0" marL="0">
               <a:spcAft>
                 <a:spcPts val="800"/>
               </a:spcAft>
               <a:buNone/>
             </a:pPr>
             <a:r>
-              <a:rPr lang="en-US" sz="4000" b="1" dirty="0">
+              <a:rPr lang="en-US" sz="4000" dirty="0">
                 <a:solidFill>
                   <a:srgbClr val="111111"/>
                 </a:solidFill>
@@ -21060,27 +20870,7 @@
                 <a:ea typeface="Times New Roman" pitchFamily="34" charset="-122"/>
                 <a:cs typeface="Times New Roman" pitchFamily="34" charset="-120"/>
               </a:rPr>
-              <a:t>Our next lesson will be on:</a:t>
-            </a:r>
-            <a:endParaRPr lang="en-US" sz="4000" dirty="0"/>
-          </a:p>
-          <a:p>
-            <a:pPr algn="ctr" indent="0" marL="0">
-              <a:spcAft>
-                <a:spcPts val="800"/>
-              </a:spcAft>
-              <a:buNone/>
-            </a:pPr>
-            <a:r>
-              <a:rPr lang="en-US" sz="4000" b="1" dirty="0">
-                <a:solidFill>
-                  <a:srgbClr val="990011"/>
-                </a:solidFill>
-                <a:latin typeface="Times New Roman" pitchFamily="34" charset="0"/>
-                <a:ea typeface="Times New Roman" pitchFamily="34" charset="-122"/>
-                <a:cs typeface="Times New Roman" pitchFamily="34" charset="-120"/>
-              </a:rPr>
-              <a:t>Quantitative Techniques 4: Plotting and Interpreting Graphical Tools</a:t>
+              <a:t>Name three types of graphs.</a:t>
             </a:r>
             <a:endParaRPr lang="en-US" sz="4000" dirty="0"/>
           </a:p>
@@ -21192,6 +20982,576 @@
                 <a:ea typeface="Calibri" pitchFamily="34" charset="-122"/>
                 <a:cs typeface="Calibri" pitchFamily="34" charset="-120"/>
               </a:rPr>
+              <a:t>NEXT LESSON</a:t>
+            </a:r>
+            <a:endParaRPr lang="en-US" sz="1400" dirty="0"/>
+          </a:p>
+        </p:txBody>
+      </p:sp>
+      <p:pic>
+        <p:nvPicPr>
+          <p:cNvPr id="3" name="Image 0" descr="/home/claude/f4/img/minesec_sheet.png">    </p:cNvPr>
+          <p:cNvPicPr>
+            <a:picLocks noChangeAspect="1"/>
+          </p:cNvPicPr>
+          <p:nvPr/>
+        </p:nvPicPr>
+        <p:blipFill>
+          <a:blip r:embed="rId1"/>
+          <a:stretch>
+            <a:fillRect/>
+          </a:stretch>
+        </p:blipFill>
+        <p:spPr>
+          <a:xfrm>
+            <a:off x="0" y="658368"/>
+            <a:ext cx="5120640" cy="5833872"/>
+          </a:xfrm>
+          <a:prstGeom prst="rect">
+            <a:avLst/>
+          </a:prstGeom>
+        </p:spPr>
+      </p:pic>
+      <p:sp>
+        <p:nvSpPr>
+          <p:cNvPr id="4" name="Text 1"/>
+          <p:cNvSpPr/>
+          <p:nvPr/>
+        </p:nvSpPr>
+        <p:spPr>
+          <a:xfrm>
+            <a:off x="5349240" y="1005840"/>
+            <a:ext cx="6522415" cy="731520"/>
+          </a:xfrm>
+          <a:prstGeom prst="rect">
+            <a:avLst/>
+          </a:prstGeom>
+          <a:noFill/>
+          <a:ln/>
+        </p:spPr>
+        <p:txBody>
+          <a:bodyPr wrap="square" lIns="0" tIns="0" rIns="0" bIns="0" rtlCol="0" anchor="ctr">
+            <a:normAutofit/>
+          </a:bodyPr>
+          <a:lstStyle/>
+          <a:p>
+            <a:pPr algn="ctr" indent="0" marL="0">
+              <a:buNone/>
+            </a:pPr>
+            <a:r>
+              <a:rPr lang="en-US" sz="3600" b="1" dirty="0">
+                <a:solidFill>
+                  <a:srgbClr val="990011"/>
+                </a:solidFill>
+                <a:latin typeface="Times New Roman" pitchFamily="34" charset="0"/>
+                <a:ea typeface="Times New Roman" pitchFamily="34" charset="-122"/>
+                <a:cs typeface="Times New Roman" pitchFamily="34" charset="-120"/>
+              </a:rPr>
+              <a:t>Next Lesson</a:t>
+            </a:r>
+            <a:endParaRPr lang="en-US" sz="3600" dirty="0"/>
+          </a:p>
+        </p:txBody>
+      </p:sp>
+      <p:sp>
+        <p:nvSpPr>
+          <p:cNvPr id="5" name="Text 2"/>
+          <p:cNvSpPr/>
+          <p:nvPr/>
+        </p:nvSpPr>
+        <p:spPr>
+          <a:xfrm>
+            <a:off x="5349240" y="1783080"/>
+            <a:ext cx="6522415" cy="4663440"/>
+          </a:xfrm>
+          <a:prstGeom prst="rect">
+            <a:avLst/>
+          </a:prstGeom>
+          <a:noFill/>
+          <a:ln/>
+        </p:spPr>
+        <p:txBody>
+          <a:bodyPr wrap="square" lIns="0" tIns="0" rIns="0" bIns="0" rtlCol="0" anchor="ctr"/>
+          <a:lstStyle/>
+          <a:p>
+            <a:pPr algn="ctr" indent="0" marL="0">
+              <a:spcAft>
+                <a:spcPts val="800"/>
+              </a:spcAft>
+              <a:buNone/>
+            </a:pPr>
+            <a:r>
+              <a:rPr lang="en-US" sz="4000" b="1" dirty="0">
+                <a:solidFill>
+                  <a:srgbClr val="111111"/>
+                </a:solidFill>
+                <a:latin typeface="Times New Roman" pitchFamily="34" charset="0"/>
+                <a:ea typeface="Times New Roman" pitchFamily="34" charset="-122"/>
+                <a:cs typeface="Times New Roman" pitchFamily="34" charset="-120"/>
+              </a:rPr>
+              <a:t>Our next lesson will be on:</a:t>
+            </a:r>
+            <a:endParaRPr lang="en-US" sz="4000" dirty="0"/>
+          </a:p>
+          <a:p>
+            <a:pPr algn="ctr" indent="0" marL="0">
+              <a:spcAft>
+                <a:spcPts val="800"/>
+              </a:spcAft>
+              <a:buNone/>
+            </a:pPr>
+            <a:r>
+              <a:rPr lang="en-US" sz="4000" b="1" dirty="0">
+                <a:solidFill>
+                  <a:srgbClr val="990011"/>
+                </a:solidFill>
+                <a:latin typeface="Times New Roman" pitchFamily="34" charset="0"/>
+                <a:ea typeface="Times New Roman" pitchFamily="34" charset="-122"/>
+                <a:cs typeface="Times New Roman" pitchFamily="34" charset="-120"/>
+              </a:rPr>
+              <a:t>Quantitative Techniques 4: Plotting and Interpreting Graphical Tools</a:t>
+            </a:r>
+            <a:endParaRPr lang="en-US" sz="4000" dirty="0"/>
+          </a:p>
+        </p:txBody>
+      </p:sp>
+      <p:sp>
+        <p:nvSpPr>
+          <p:cNvPr id="25" name="Slide Number Placeholder 0"/>
+          <p:cNvSpPr>
+            <a:spLocks noGrp="1"/>
+          </p:cNvSpPr>
+          <p:nvPr>
+            <p:ph type="sldNum" sz="quarter" idx="4294967295"/>
+          </p:nvPr>
+        </p:nvSpPr>
+        <p:spPr>
+          <a:xfrm>
+            <a:off x="27432" y="91440"/>
+            <a:ext cx="585216" cy="475488"/>
+          </a:xfrm>
+          <a:prstGeom prst="rect">
+            <a:avLst/>
+          </a:prstGeom>
+          <a:extLst>
+            <a:ext uri="{C572A759-6A51-4108-AA02-DFA0A04FC94B}">
+              <ma14:wrappingTextBoxFlag xmlns:ma14="http://schemas.microsoft.com/office/mac/drawingml/2011/main" val="0"/>
+            </a:ext>
+          </a:extLst>
+        </p:spPr>
+        <p:txBody>
+          <a:bodyPr/>
+          <a:lstStyle>
+            <a:lvl1pPr>
+              <a:defRPr sz="2000">
+                <a:solidFill>
+                  <a:srgbClr val="FFFFFF"/>
+                </a:solidFill>
+                <a:latin typeface="Calibri"/>
+                <a:ea typeface="Calibri"/>
+                <a:cs typeface="Calibri"/>
+              </a:defRPr>
+            </a:lvl1pPr>
+          </a:lstStyle>
+          <a:p>
+            <a:pPr algn="ctr"/>
+            <a:fld id="{F7021451-1387-4CA6-816F-3879F97B5CBC}" type="slidenum">
+              <a:rPr b="1" lang="en-US"/>
+              <a:t>59</a:t>
+            </a:fld>
+            <a:endParaRPr lang="en-US"/>
+          </a:p>
+        </p:txBody>
+      </p:sp>
+    </p:spTree>
+  </p:cSld>
+  <p:clrMapOvr>
+    <a:masterClrMapping/>
+  </p:clrMapOvr>
+</p:sld>
+</file>
+
+<file path=ppt/slides/slide6.xml><?xml version="1.0" encoding="utf-8"?>
+<p:sld xmlns:a="http://schemas.openxmlformats.org/drawingml/2006/main" xmlns:r="http://schemas.openxmlformats.org/officeDocument/2006/relationships" xmlns:p="http://schemas.openxmlformats.org/presentationml/2006/main">
+  <p:cSld name="Slide 6">
+    <p:spTree>
+      <p:nvGrpSpPr>
+        <p:cNvPr id="1" name=""/>
+        <p:cNvGrpSpPr/>
+        <p:nvPr/>
+      </p:nvGrpSpPr>
+      <p:grpSpPr>
+        <a:xfrm>
+          <a:off x="0" y="0"/>
+          <a:ext cx="0" cy="0"/>
+          <a:chOff x="0" y="0"/>
+          <a:chExt cx="0" cy="0"/>
+        </a:xfrm>
+      </p:grpSpPr>
+      <p:sp>
+        <p:nvSpPr>
+          <p:cNvPr id="2" name="Text 0"/>
+          <p:cNvSpPr/>
+          <p:nvPr/>
+        </p:nvSpPr>
+        <p:spPr>
+          <a:xfrm>
+            <a:off x="457200" y="713232"/>
+            <a:ext cx="11368735" cy="274320"/>
+          </a:xfrm>
+          <a:prstGeom prst="rect">
+            <a:avLst/>
+          </a:prstGeom>
+          <a:noFill/>
+          <a:ln/>
+        </p:spPr>
+        <p:txBody>
+          <a:bodyPr wrap="square" lIns="0" tIns="0" rIns="0" bIns="0" rtlCol="0" anchor="ctr"/>
+          <a:lstStyle/>
+          <a:p>
+            <a:pPr algn="r" indent="0" marL="0">
+              <a:buNone/>
+            </a:pPr>
+            <a:r>
+              <a:rPr lang="en-US" sz="1400" b="1" dirty="0">
+                <a:solidFill>
+                  <a:srgbClr val="1C3F6E"/>
+                </a:solidFill>
+                <a:latin typeface="Calibri" pitchFamily="34" charset="0"/>
+                <a:ea typeface="Calibri" pitchFamily="34" charset="-122"/>
+                <a:cs typeface="Calibri" pitchFamily="34" charset="-120"/>
+              </a:rPr>
+              <a:t>LESSON PLAN</a:t>
+            </a:r>
+            <a:endParaRPr lang="en-US" sz="1400" dirty="0"/>
+          </a:p>
+        </p:txBody>
+      </p:sp>
+      <p:pic>
+        <p:nvPicPr>
+          <p:cNvPr id="3" name="Image 0" descr="/home/claude/f4/img/minesec_sheet.png">    </p:cNvPr>
+          <p:cNvPicPr>
+            <a:picLocks noChangeAspect="1"/>
+          </p:cNvPicPr>
+          <p:nvPr/>
+        </p:nvPicPr>
+        <p:blipFill>
+          <a:blip r:embed="rId1"/>
+          <a:stretch>
+            <a:fillRect/>
+          </a:stretch>
+        </p:blipFill>
+        <p:spPr>
+          <a:xfrm>
+            <a:off x="0" y="658368"/>
+            <a:ext cx="2468880" cy="5833872"/>
+          </a:xfrm>
+          <a:prstGeom prst="rect">
+            <a:avLst/>
+          </a:prstGeom>
+        </p:spPr>
+      </p:pic>
+      <p:sp>
+        <p:nvSpPr>
+          <p:cNvPr id="4" name="Text 1"/>
+          <p:cNvSpPr/>
+          <p:nvPr/>
+        </p:nvSpPr>
+        <p:spPr>
+          <a:xfrm>
+            <a:off x="2697480" y="1005840"/>
+            <a:ext cx="9174175" cy="731520"/>
+          </a:xfrm>
+          <a:prstGeom prst="rect">
+            <a:avLst/>
+          </a:prstGeom>
+          <a:noFill/>
+          <a:ln/>
+        </p:spPr>
+        <p:txBody>
+          <a:bodyPr wrap="square" lIns="0" tIns="0" rIns="0" bIns="0" rtlCol="0" anchor="ctr">
+            <a:normAutofit/>
+          </a:bodyPr>
+          <a:lstStyle/>
+          <a:p>
+            <a:pPr algn="ctr" indent="0" marL="0">
+              <a:buNone/>
+            </a:pPr>
+            <a:r>
+              <a:rPr lang="en-US" sz="3600" b="1" dirty="0">
+                <a:solidFill>
+                  <a:srgbClr val="990011"/>
+                </a:solidFill>
+                <a:latin typeface="Times New Roman" pitchFamily="34" charset="0"/>
+                <a:ea typeface="Times New Roman" pitchFamily="34" charset="-122"/>
+                <a:cs typeface="Times New Roman" pitchFamily="34" charset="-120"/>
+              </a:rPr>
+              <a:t>Lesson Plan</a:t>
+            </a:r>
+            <a:endParaRPr lang="en-US" sz="3600" dirty="0"/>
+          </a:p>
+        </p:txBody>
+      </p:sp>
+      <p:sp>
+        <p:nvSpPr>
+          <p:cNvPr id="5" name="Text 2"/>
+          <p:cNvSpPr/>
+          <p:nvPr/>
+        </p:nvSpPr>
+        <p:spPr>
+          <a:xfrm>
+            <a:off x="2697480" y="1783080"/>
+            <a:ext cx="9174175" cy="4663440"/>
+          </a:xfrm>
+          <a:prstGeom prst="rect">
+            <a:avLst/>
+          </a:prstGeom>
+          <a:noFill/>
+          <a:ln/>
+        </p:spPr>
+        <p:txBody>
+          <a:bodyPr wrap="square" lIns="0" tIns="0" rIns="0" bIns="0" rtlCol="0" anchor="t"/>
+          <a:lstStyle/>
+          <a:p>
+            <a:pPr algn="l" marL="342900" indent="-342900">
+              <a:spcAft>
+                <a:spcPts val="800"/>
+              </a:spcAft>
+              <a:buSzPct val="100000"/>
+              <a:buFont typeface="+mj-lt"/>
+              <a:buAutoNum type="arabicPeriod" startAt="1"/>
+            </a:pPr>
+            <a:r>
+              <a:rPr lang="en-US" sz="4000" dirty="0">
+                <a:solidFill>
+                  <a:srgbClr val="111111"/>
+                </a:solidFill>
+                <a:latin typeface="Times New Roman" pitchFamily="34" charset="0"/>
+                <a:ea typeface="Times New Roman" pitchFamily="34" charset="-122"/>
+                <a:cs typeface="Times New Roman" pitchFamily="34" charset="-120"/>
+              </a:rPr>
+              <a:t>Correction of the homework</a:t>
+            </a:r>
+            <a:endParaRPr lang="en-US" sz="4000" dirty="0"/>
+          </a:p>
+          <a:p>
+            <a:pPr algn="l" marL="342900" indent="-342900">
+              <a:spcAft>
+                <a:spcPts val="800"/>
+              </a:spcAft>
+              <a:buSzPct val="100000"/>
+              <a:buFont typeface="+mj-lt"/>
+              <a:buAutoNum type="arabicPeriod" startAt="1"/>
+            </a:pPr>
+            <a:r>
+              <a:rPr lang="en-US" sz="4000" dirty="0">
+                <a:solidFill>
+                  <a:srgbClr val="111111"/>
+                </a:solidFill>
+                <a:latin typeface="Times New Roman" pitchFamily="34" charset="0"/>
+                <a:ea typeface="Times New Roman" pitchFamily="34" charset="-122"/>
+                <a:cs typeface="Times New Roman" pitchFamily="34" charset="-120"/>
+              </a:rPr>
+              <a:t>Objectives and recall</a:t>
+            </a:r>
+            <a:endParaRPr lang="en-US" sz="4000" dirty="0"/>
+          </a:p>
+          <a:p>
+            <a:pPr algn="l" marL="342900" indent="-342900">
+              <a:spcAft>
+                <a:spcPts val="800"/>
+              </a:spcAft>
+              <a:buSzPct val="100000"/>
+              <a:buFont typeface="+mj-lt"/>
+              <a:buAutoNum type="arabicPeriod" startAt="1"/>
+            </a:pPr>
+            <a:r>
+              <a:rPr lang="en-US" sz="4000" dirty="0">
+                <a:solidFill>
+                  <a:srgbClr val="111111"/>
+                </a:solidFill>
+                <a:latin typeface="Times New Roman" pitchFamily="34" charset="0"/>
+                <a:ea typeface="Times New Roman" pitchFamily="34" charset="-122"/>
+                <a:cs typeface="Times New Roman" pitchFamily="34" charset="-120"/>
+              </a:rPr>
+              <a:t>Real-life situation and action to take</a:t>
+            </a:r>
+            <a:endParaRPr lang="en-US" sz="4000" dirty="0"/>
+          </a:p>
+          <a:p>
+            <a:pPr algn="l" marL="342900" indent="-342900">
+              <a:spcAft>
+                <a:spcPts val="800"/>
+              </a:spcAft>
+              <a:buSzPct val="100000"/>
+              <a:buFont typeface="+mj-lt"/>
+              <a:buAutoNum type="arabicPeriod" startAt="1"/>
+            </a:pPr>
+            <a:r>
+              <a:rPr lang="en-US" sz="4000" dirty="0">
+                <a:solidFill>
+                  <a:srgbClr val="111111"/>
+                </a:solidFill>
+                <a:latin typeface="Times New Roman" pitchFamily="34" charset="0"/>
+                <a:ea typeface="Times New Roman" pitchFamily="34" charset="-122"/>
+                <a:cs typeface="Times New Roman" pitchFamily="34" charset="-120"/>
+              </a:rPr>
+              <a:t>Learning activities</a:t>
+            </a:r>
+            <a:endParaRPr lang="en-US" sz="4000" dirty="0"/>
+          </a:p>
+          <a:p>
+            <a:pPr algn="l" marL="342900" indent="-342900">
+              <a:spcAft>
+                <a:spcPts val="800"/>
+              </a:spcAft>
+              <a:buSzPct val="100000"/>
+              <a:buFont typeface="+mj-lt"/>
+              <a:buAutoNum type="arabicPeriod" startAt="1"/>
+            </a:pPr>
+            <a:r>
+              <a:rPr lang="en-US" sz="4000" dirty="0">
+                <a:solidFill>
+                  <a:srgbClr val="111111"/>
+                </a:solidFill>
+                <a:latin typeface="Times New Roman" pitchFamily="34" charset="0"/>
+                <a:ea typeface="Times New Roman" pitchFamily="34" charset="-122"/>
+                <a:cs typeface="Times New Roman" pitchFamily="34" charset="-120"/>
+              </a:rPr>
+              <a:t>Board summary</a:t>
+            </a:r>
+            <a:endParaRPr lang="en-US" sz="4000" dirty="0"/>
+          </a:p>
+          <a:p>
+            <a:pPr algn="l" marL="342900" indent="-342900">
+              <a:spcAft>
+                <a:spcPts val="800"/>
+              </a:spcAft>
+              <a:buSzPct val="100000"/>
+              <a:buFont typeface="+mj-lt"/>
+              <a:buAutoNum type="arabicPeriod" startAt="1"/>
+            </a:pPr>
+            <a:r>
+              <a:rPr lang="en-US" sz="4000" dirty="0">
+                <a:solidFill>
+                  <a:srgbClr val="111111"/>
+                </a:solidFill>
+                <a:latin typeface="Times New Roman" pitchFamily="34" charset="0"/>
+                <a:ea typeface="Times New Roman" pitchFamily="34" charset="-122"/>
+                <a:cs typeface="Times New Roman" pitchFamily="34" charset="-120"/>
+              </a:rPr>
+              <a:t>Evaluation, remediation and homework</a:t>
+            </a:r>
+            <a:endParaRPr lang="en-US" sz="4000" dirty="0"/>
+          </a:p>
+        </p:txBody>
+      </p:sp>
+      <p:sp>
+        <p:nvSpPr>
+          <p:cNvPr id="25" name="Slide Number Placeholder 0"/>
+          <p:cNvSpPr>
+            <a:spLocks noGrp="1"/>
+          </p:cNvSpPr>
+          <p:nvPr>
+            <p:ph type="sldNum" sz="quarter" idx="4294967295"/>
+          </p:nvPr>
+        </p:nvSpPr>
+        <p:spPr>
+          <a:xfrm>
+            <a:off x="27432" y="91440"/>
+            <a:ext cx="585216" cy="475488"/>
+          </a:xfrm>
+          <a:prstGeom prst="rect">
+            <a:avLst/>
+          </a:prstGeom>
+          <a:extLst>
+            <a:ext uri="{C572A759-6A51-4108-AA02-DFA0A04FC94B}">
+              <ma14:wrappingTextBoxFlag xmlns:ma14="http://schemas.microsoft.com/office/mac/drawingml/2011/main" val="0"/>
+            </a:ext>
+          </a:extLst>
+        </p:spPr>
+        <p:txBody>
+          <a:bodyPr/>
+          <a:lstStyle>
+            <a:lvl1pPr>
+              <a:defRPr sz="2000">
+                <a:solidFill>
+                  <a:srgbClr val="FFFFFF"/>
+                </a:solidFill>
+                <a:latin typeface="Calibri"/>
+                <a:ea typeface="Calibri"/>
+                <a:cs typeface="Calibri"/>
+              </a:defRPr>
+            </a:lvl1pPr>
+          </a:lstStyle>
+          <a:p>
+            <a:pPr algn="ctr"/>
+            <a:fld id="{F7021451-1387-4CA6-816F-3879F97B5CBC}" type="slidenum">
+              <a:rPr b="1" lang="en-US"/>
+              <a:t>6</a:t>
+            </a:fld>
+            <a:endParaRPr lang="en-US"/>
+          </a:p>
+        </p:txBody>
+      </p:sp>
+    </p:spTree>
+  </p:cSld>
+  <p:clrMapOvr>
+    <a:masterClrMapping/>
+  </p:clrMapOvr>
+</p:sld>
+</file>
+
+<file path=ppt/slides/slide60.xml><?xml version="1.0" encoding="utf-8"?>
+<p:sld xmlns:a="http://schemas.openxmlformats.org/drawingml/2006/main" xmlns:r="http://schemas.openxmlformats.org/officeDocument/2006/relationships" xmlns:p="http://schemas.openxmlformats.org/presentationml/2006/main">
+  <p:cSld name="Slide 60">
+    <p:spTree>
+      <p:nvGrpSpPr>
+        <p:cNvPr id="1" name=""/>
+        <p:cNvGrpSpPr/>
+        <p:nvPr/>
+      </p:nvGrpSpPr>
+      <p:grpSpPr>
+        <a:xfrm>
+          <a:off x="0" y="0"/>
+          <a:ext cx="0" cy="0"/>
+          <a:chOff x="0" y="0"/>
+          <a:chExt cx="0" cy="0"/>
+        </a:xfrm>
+      </p:grpSpPr>
+      <p:sp>
+        <p:nvSpPr>
+          <p:cNvPr id="2" name="Text 0"/>
+          <p:cNvSpPr/>
+          <p:nvPr/>
+        </p:nvSpPr>
+        <p:spPr>
+          <a:xfrm>
+            <a:off x="457200" y="713232"/>
+            <a:ext cx="11368735" cy="274320"/>
+          </a:xfrm>
+          <a:prstGeom prst="rect">
+            <a:avLst/>
+          </a:prstGeom>
+          <a:noFill/>
+          <a:ln/>
+        </p:spPr>
+        <p:txBody>
+          <a:bodyPr wrap="square" lIns="0" tIns="0" rIns="0" bIns="0" rtlCol="0" anchor="ctr"/>
+          <a:lstStyle/>
+          <a:p>
+            <a:pPr algn="r" indent="0" marL="0">
+              <a:buNone/>
+            </a:pPr>
+            <a:r>
+              <a:rPr lang="en-US" sz="1400" b="1" dirty="0">
+                <a:solidFill>
+                  <a:srgbClr val="1C3F6E"/>
+                </a:solidFill>
+                <a:latin typeface="Calibri" pitchFamily="34" charset="0"/>
+                <a:ea typeface="Calibri" pitchFamily="34" charset="-122"/>
+                <a:cs typeface="Calibri" pitchFamily="34" charset="-120"/>
+              </a:rPr>
               <a:t>BILINGUAL GAME</a:t>
             </a:r>
             <a:endParaRPr lang="en-US" sz="1400" dirty="0"/>
@@ -21239,7 +21599,7 @@
       </p:sp>
       <p:graphicFrame>
         <p:nvGraphicFramePr>
-          <p:cNvPr id="60" name="Table 0"/>
+          <p:cNvPr id="61" name="Table 0"/>
           <p:cNvGraphicFramePr>
             <a:graphicFrameLocks noGrp="1"/>
           </p:cNvGraphicFramePr>
@@ -22275,7 +22635,7 @@
             <a:pPr algn="ctr"/>
             <a:fld id="{F7021451-1387-4CA6-816F-3879F97B5CBC}" type="slidenum">
               <a:rPr b="1" lang="en-US"/>
-              <a:t>59</a:t>
+              <a:t>60</a:t>
             </a:fld>
             <a:endParaRPr lang="en-US"/>
           </a:p>
@@ -22289,9 +22649,9 @@
 </p:sld>
 </file>
 
-<file path=ppt/slides/slide6.xml><?xml version="1.0" encoding="utf-8"?>
+<file path=ppt/slides/slide61.xml><?xml version="1.0" encoding="utf-8"?>
 <p:sld xmlns:a="http://schemas.openxmlformats.org/drawingml/2006/main" xmlns:r="http://schemas.openxmlformats.org/officeDocument/2006/relationships" xmlns:p="http://schemas.openxmlformats.org/presentationml/2006/main">
-  <p:cSld name="Slide 6">
+  <p:cSld name="Slide 61">
     <p:spTree>
       <p:nvGrpSpPr>
         <p:cNvPr id="1" name=""/>
@@ -22339,337 +22699,6 @@
                 <a:ea typeface="Calibri" pitchFamily="34" charset="-122"/>
                 <a:cs typeface="Calibri" pitchFamily="34" charset="-120"/>
               </a:rPr>
-              <a:t>LESSON PLAN</a:t>
-            </a:r>
-            <a:endParaRPr lang="en-US" sz="1400" dirty="0"/>
-          </a:p>
-        </p:txBody>
-      </p:sp>
-      <p:pic>
-        <p:nvPicPr>
-          <p:cNvPr id="3" name="Image 0" descr="/home/claude/f4/img/minesec_sheet.png">    </p:cNvPr>
-          <p:cNvPicPr>
-            <a:picLocks noChangeAspect="1"/>
-          </p:cNvPicPr>
-          <p:nvPr/>
-        </p:nvPicPr>
-        <p:blipFill>
-          <a:blip r:embed="rId1"/>
-          <a:stretch>
-            <a:fillRect/>
-          </a:stretch>
-        </p:blipFill>
-        <p:spPr>
-          <a:xfrm>
-            <a:off x="0" y="658368"/>
-            <a:ext cx="2468880" cy="5833872"/>
-          </a:xfrm>
-          <a:prstGeom prst="rect">
-            <a:avLst/>
-          </a:prstGeom>
-        </p:spPr>
-      </p:pic>
-      <p:sp>
-        <p:nvSpPr>
-          <p:cNvPr id="4" name="Text 1"/>
-          <p:cNvSpPr/>
-          <p:nvPr/>
-        </p:nvSpPr>
-        <p:spPr>
-          <a:xfrm>
-            <a:off x="2697480" y="1005840"/>
-            <a:ext cx="9174175" cy="731520"/>
-          </a:xfrm>
-          <a:prstGeom prst="rect">
-            <a:avLst/>
-          </a:prstGeom>
-          <a:noFill/>
-          <a:ln/>
-        </p:spPr>
-        <p:txBody>
-          <a:bodyPr wrap="square" lIns="0" tIns="0" rIns="0" bIns="0" rtlCol="0" anchor="ctr">
-            <a:normAutofit/>
-          </a:bodyPr>
-          <a:lstStyle/>
-          <a:p>
-            <a:pPr algn="ctr" indent="0" marL="0">
-              <a:buNone/>
-            </a:pPr>
-            <a:r>
-              <a:rPr lang="en-US" sz="3600" b="1" dirty="0">
-                <a:solidFill>
-                  <a:srgbClr val="990011"/>
-                </a:solidFill>
-                <a:latin typeface="Times New Roman" pitchFamily="34" charset="0"/>
-                <a:ea typeface="Times New Roman" pitchFamily="34" charset="-122"/>
-                <a:cs typeface="Times New Roman" pitchFamily="34" charset="-120"/>
-              </a:rPr>
-              <a:t>Lesson Plan</a:t>
-            </a:r>
-            <a:endParaRPr lang="en-US" sz="3600" dirty="0"/>
-          </a:p>
-        </p:txBody>
-      </p:sp>
-      <p:sp>
-        <p:nvSpPr>
-          <p:cNvPr id="5" name="Text 2"/>
-          <p:cNvSpPr/>
-          <p:nvPr/>
-        </p:nvSpPr>
-        <p:spPr>
-          <a:xfrm>
-            <a:off x="2697480" y="1783080"/>
-            <a:ext cx="9174175" cy="4663440"/>
-          </a:xfrm>
-          <a:prstGeom prst="rect">
-            <a:avLst/>
-          </a:prstGeom>
-          <a:noFill/>
-          <a:ln/>
-        </p:spPr>
-        <p:txBody>
-          <a:bodyPr wrap="square" lIns="0" tIns="0" rIns="0" bIns="0" rtlCol="0" anchor="t"/>
-          <a:lstStyle/>
-          <a:p>
-            <a:pPr algn="l" marL="342900" indent="-342900">
-              <a:spcAft>
-                <a:spcPts val="800"/>
-              </a:spcAft>
-              <a:buSzPct val="100000"/>
-              <a:buFont typeface="+mj-lt"/>
-              <a:buAutoNum type="arabicPeriod" startAt="1"/>
-            </a:pPr>
-            <a:r>
-              <a:rPr lang="en-US" sz="4000" dirty="0">
-                <a:solidFill>
-                  <a:srgbClr val="111111"/>
-                </a:solidFill>
-                <a:latin typeface="Times New Roman" pitchFamily="34" charset="0"/>
-                <a:ea typeface="Times New Roman" pitchFamily="34" charset="-122"/>
-                <a:cs typeface="Times New Roman" pitchFamily="34" charset="-120"/>
-              </a:rPr>
-              <a:t>Correction of the homework</a:t>
-            </a:r>
-            <a:endParaRPr lang="en-US" sz="4000" dirty="0"/>
-          </a:p>
-          <a:p>
-            <a:pPr algn="l" marL="342900" indent="-342900">
-              <a:spcAft>
-                <a:spcPts val="800"/>
-              </a:spcAft>
-              <a:buSzPct val="100000"/>
-              <a:buFont typeface="+mj-lt"/>
-              <a:buAutoNum type="arabicPeriod" startAt="1"/>
-            </a:pPr>
-            <a:r>
-              <a:rPr lang="en-US" sz="4000" dirty="0">
-                <a:solidFill>
-                  <a:srgbClr val="111111"/>
-                </a:solidFill>
-                <a:latin typeface="Times New Roman" pitchFamily="34" charset="0"/>
-                <a:ea typeface="Times New Roman" pitchFamily="34" charset="-122"/>
-                <a:cs typeface="Times New Roman" pitchFamily="34" charset="-120"/>
-              </a:rPr>
-              <a:t>Objectives and recall</a:t>
-            </a:r>
-            <a:endParaRPr lang="en-US" sz="4000" dirty="0"/>
-          </a:p>
-          <a:p>
-            <a:pPr algn="l" marL="342900" indent="-342900">
-              <a:spcAft>
-                <a:spcPts val="800"/>
-              </a:spcAft>
-              <a:buSzPct val="100000"/>
-              <a:buFont typeface="+mj-lt"/>
-              <a:buAutoNum type="arabicPeriod" startAt="1"/>
-            </a:pPr>
-            <a:r>
-              <a:rPr lang="en-US" sz="4000" dirty="0">
-                <a:solidFill>
-                  <a:srgbClr val="111111"/>
-                </a:solidFill>
-                <a:latin typeface="Times New Roman" pitchFamily="34" charset="0"/>
-                <a:ea typeface="Times New Roman" pitchFamily="34" charset="-122"/>
-                <a:cs typeface="Times New Roman" pitchFamily="34" charset="-120"/>
-              </a:rPr>
-              <a:t>Real-life situation and action to take</a:t>
-            </a:r>
-            <a:endParaRPr lang="en-US" sz="4000" dirty="0"/>
-          </a:p>
-          <a:p>
-            <a:pPr algn="l" marL="342900" indent="-342900">
-              <a:spcAft>
-                <a:spcPts val="800"/>
-              </a:spcAft>
-              <a:buSzPct val="100000"/>
-              <a:buFont typeface="+mj-lt"/>
-              <a:buAutoNum type="arabicPeriod" startAt="1"/>
-            </a:pPr>
-            <a:r>
-              <a:rPr lang="en-US" sz="4000" dirty="0">
-                <a:solidFill>
-                  <a:srgbClr val="111111"/>
-                </a:solidFill>
-                <a:latin typeface="Times New Roman" pitchFamily="34" charset="0"/>
-                <a:ea typeface="Times New Roman" pitchFamily="34" charset="-122"/>
-                <a:cs typeface="Times New Roman" pitchFamily="34" charset="-120"/>
-              </a:rPr>
-              <a:t>Learning activities</a:t>
-            </a:r>
-            <a:endParaRPr lang="en-US" sz="4000" dirty="0"/>
-          </a:p>
-          <a:p>
-            <a:pPr algn="l" marL="342900" indent="-342900">
-              <a:spcAft>
-                <a:spcPts val="800"/>
-              </a:spcAft>
-              <a:buSzPct val="100000"/>
-              <a:buFont typeface="+mj-lt"/>
-              <a:buAutoNum type="arabicPeriod" startAt="1"/>
-            </a:pPr>
-            <a:r>
-              <a:rPr lang="en-US" sz="4000" dirty="0">
-                <a:solidFill>
-                  <a:srgbClr val="111111"/>
-                </a:solidFill>
-                <a:latin typeface="Times New Roman" pitchFamily="34" charset="0"/>
-                <a:ea typeface="Times New Roman" pitchFamily="34" charset="-122"/>
-                <a:cs typeface="Times New Roman" pitchFamily="34" charset="-120"/>
-              </a:rPr>
-              <a:t>Board summary</a:t>
-            </a:r>
-            <a:endParaRPr lang="en-US" sz="4000" dirty="0"/>
-          </a:p>
-          <a:p>
-            <a:pPr algn="l" marL="342900" indent="-342900">
-              <a:spcAft>
-                <a:spcPts val="800"/>
-              </a:spcAft>
-              <a:buSzPct val="100000"/>
-              <a:buFont typeface="+mj-lt"/>
-              <a:buAutoNum type="arabicPeriod" startAt="1"/>
-            </a:pPr>
-            <a:r>
-              <a:rPr lang="en-US" sz="4000" dirty="0">
-                <a:solidFill>
-                  <a:srgbClr val="111111"/>
-                </a:solidFill>
-                <a:latin typeface="Times New Roman" pitchFamily="34" charset="0"/>
-                <a:ea typeface="Times New Roman" pitchFamily="34" charset="-122"/>
-                <a:cs typeface="Times New Roman" pitchFamily="34" charset="-120"/>
-              </a:rPr>
-              <a:t>Evaluation, remediation and homework</a:t>
-            </a:r>
-            <a:endParaRPr lang="en-US" sz="4000" dirty="0"/>
-          </a:p>
-        </p:txBody>
-      </p:sp>
-      <p:sp>
-        <p:nvSpPr>
-          <p:cNvPr id="25" name="Slide Number Placeholder 0"/>
-          <p:cNvSpPr>
-            <a:spLocks noGrp="1"/>
-          </p:cNvSpPr>
-          <p:nvPr>
-            <p:ph type="sldNum" sz="quarter" idx="4294967295"/>
-          </p:nvPr>
-        </p:nvSpPr>
-        <p:spPr>
-          <a:xfrm>
-            <a:off x="27432" y="91440"/>
-            <a:ext cx="585216" cy="475488"/>
-          </a:xfrm>
-          <a:prstGeom prst="rect">
-            <a:avLst/>
-          </a:prstGeom>
-          <a:extLst>
-            <a:ext uri="{C572A759-6A51-4108-AA02-DFA0A04FC94B}">
-              <ma14:wrappingTextBoxFlag xmlns:ma14="http://schemas.microsoft.com/office/mac/drawingml/2011/main" val="0"/>
-            </a:ext>
-          </a:extLst>
-        </p:spPr>
-        <p:txBody>
-          <a:bodyPr/>
-          <a:lstStyle>
-            <a:lvl1pPr>
-              <a:defRPr sz="2000">
-                <a:solidFill>
-                  <a:srgbClr val="FFFFFF"/>
-                </a:solidFill>
-                <a:latin typeface="Calibri"/>
-                <a:ea typeface="Calibri"/>
-                <a:cs typeface="Calibri"/>
-              </a:defRPr>
-            </a:lvl1pPr>
-          </a:lstStyle>
-          <a:p>
-            <a:pPr algn="ctr"/>
-            <a:fld id="{F7021451-1387-4CA6-816F-3879F97B5CBC}" type="slidenum">
-              <a:rPr b="1" lang="en-US"/>
-              <a:t>6</a:t>
-            </a:fld>
-            <a:endParaRPr lang="en-US"/>
-          </a:p>
-        </p:txBody>
-      </p:sp>
-    </p:spTree>
-  </p:cSld>
-  <p:clrMapOvr>
-    <a:masterClrMapping/>
-  </p:clrMapOvr>
-</p:sld>
-</file>
-
-<file path=ppt/slides/slide60.xml><?xml version="1.0" encoding="utf-8"?>
-<p:sld xmlns:a="http://schemas.openxmlformats.org/drawingml/2006/main" xmlns:r="http://schemas.openxmlformats.org/officeDocument/2006/relationships" xmlns:p="http://schemas.openxmlformats.org/presentationml/2006/main">
-  <p:cSld name="Slide 60">
-    <p:spTree>
-      <p:nvGrpSpPr>
-        <p:cNvPr id="1" name=""/>
-        <p:cNvGrpSpPr/>
-        <p:nvPr/>
-      </p:nvGrpSpPr>
-      <p:grpSpPr>
-        <a:xfrm>
-          <a:off x="0" y="0"/>
-          <a:ext cx="0" cy="0"/>
-          <a:chOff x="0" y="0"/>
-          <a:chExt cx="0" cy="0"/>
-        </a:xfrm>
-      </p:grpSpPr>
-      <p:sp>
-        <p:nvSpPr>
-          <p:cNvPr id="2" name="Text 0"/>
-          <p:cNvSpPr/>
-          <p:nvPr/>
-        </p:nvSpPr>
-        <p:spPr>
-          <a:xfrm>
-            <a:off x="457200" y="713232"/>
-            <a:ext cx="11368735" cy="274320"/>
-          </a:xfrm>
-          <a:prstGeom prst="rect">
-            <a:avLst/>
-          </a:prstGeom>
-          <a:noFill/>
-          <a:ln/>
-        </p:spPr>
-        <p:txBody>
-          <a:bodyPr wrap="square" lIns="0" tIns="0" rIns="0" bIns="0" rtlCol="0" anchor="ctr"/>
-          <a:lstStyle/>
-          <a:p>
-            <a:pPr algn="r" indent="0" marL="0">
-              <a:buNone/>
-            </a:pPr>
-            <a:r>
-              <a:rPr lang="en-US" sz="1400" b="1" dirty="0">
-                <a:solidFill>
-                  <a:srgbClr val="1C3F6E"/>
-                </a:solidFill>
-                <a:latin typeface="Calibri" pitchFamily="34" charset="0"/>
-                <a:ea typeface="Calibri" pitchFamily="34" charset="-122"/>
-                <a:cs typeface="Calibri" pitchFamily="34" charset="-120"/>
-              </a:rPr>
               <a:t>LOGBOOK</a:t>
             </a:r>
             <a:endParaRPr lang="en-US" sz="1400" dirty="0"/>
@@ -22717,7 +22746,7 @@
       </p:sp>
       <p:graphicFrame>
         <p:nvGraphicFramePr>
-          <p:cNvPr id="61" name="Table 0"/>
+          <p:cNvPr id="62" name="Table 0"/>
           <p:cNvGraphicFramePr>
             <a:graphicFrameLocks noGrp="1"/>
           </p:cNvGraphicFramePr>
@@ -23339,7 +23368,7 @@
             <a:pPr algn="ctr"/>
             <a:fld id="{F7021451-1387-4CA6-816F-3879F97B5CBC}" type="slidenum">
               <a:rPr b="1" lang="en-US"/>
-              <a:t>60</a:t>
+              <a:t>61</a:t>
             </a:fld>
             <a:endParaRPr lang="en-US"/>
           </a:p>
@@ -23353,9 +23382,9 @@
 </p:sld>
 </file>
 
-<file path=ppt/slides/slide61.xml><?xml version="1.0" encoding="utf-8"?>
+<file path=ppt/slides/slide62.xml><?xml version="1.0" encoding="utf-8"?>
 <p:sld xmlns:a="http://schemas.openxmlformats.org/drawingml/2006/main" xmlns:r="http://schemas.openxmlformats.org/officeDocument/2006/relationships" xmlns:p="http://schemas.openxmlformats.org/presentationml/2006/main">
-  <p:cSld name="Slide 61">
+  <p:cSld name="Slide 62">
     <p:spTree>
       <p:nvGrpSpPr>
         <p:cNvPr id="1" name=""/>
@@ -23450,7 +23479,7 @@
       </p:sp>
       <p:graphicFrame>
         <p:nvGraphicFramePr>
-          <p:cNvPr id="62" name="Table 0"/>
+          <p:cNvPr id="63" name="Table 0"/>
           <p:cNvGraphicFramePr>
             <a:graphicFrameLocks noGrp="1"/>
           </p:cNvGraphicFramePr>
@@ -24210,331 +24239,6 @@
             <a:pPr algn="ctr"/>
             <a:fld id="{F7021451-1387-4CA6-816F-3879F97B5CBC}" type="slidenum">
               <a:rPr b="1" lang="en-US"/>
-              <a:t>61</a:t>
-            </a:fld>
-            <a:endParaRPr lang="en-US"/>
-          </a:p>
-        </p:txBody>
-      </p:sp>
-    </p:spTree>
-  </p:cSld>
-  <p:clrMapOvr>
-    <a:masterClrMapping/>
-  </p:clrMapOvr>
-</p:sld>
-</file>
-
-<file path=ppt/slides/slide62.xml><?xml version="1.0" encoding="utf-8"?>
-<p:sld xmlns:a="http://schemas.openxmlformats.org/drawingml/2006/main" xmlns:r="http://schemas.openxmlformats.org/officeDocument/2006/relationships" xmlns:p="http://schemas.openxmlformats.org/presentationml/2006/main">
-  <p:cSld name="Slide 62">
-    <p:spTree>
-      <p:nvGrpSpPr>
-        <p:cNvPr id="1" name=""/>
-        <p:cNvGrpSpPr/>
-        <p:nvPr/>
-      </p:nvGrpSpPr>
-      <p:grpSpPr>
-        <a:xfrm>
-          <a:off x="0" y="0"/>
-          <a:ext cx="0" cy="0"/>
-          <a:chOff x="0" y="0"/>
-          <a:chExt cx="0" cy="0"/>
-        </a:xfrm>
-      </p:grpSpPr>
-      <p:sp>
-        <p:nvSpPr>
-          <p:cNvPr id="2" name="Text 0"/>
-          <p:cNvSpPr/>
-          <p:nvPr/>
-        </p:nvSpPr>
-        <p:spPr>
-          <a:xfrm>
-            <a:off x="457200" y="713232"/>
-            <a:ext cx="11368735" cy="274320"/>
-          </a:xfrm>
-          <a:prstGeom prst="rect">
-            <a:avLst/>
-          </a:prstGeom>
-          <a:noFill/>
-          <a:ln/>
-        </p:spPr>
-        <p:txBody>
-          <a:bodyPr wrap="square" lIns="0" tIns="0" rIns="0" bIns="0" rtlCol="0" anchor="ctr"/>
-          <a:lstStyle/>
-          <a:p>
-            <a:pPr algn="r" indent="0" marL="0">
-              <a:buNone/>
-            </a:pPr>
-            <a:r>
-              <a:rPr lang="en-US" sz="1400" b="1" dirty="0">
-                <a:solidFill>
-                  <a:srgbClr val="1C3F6E"/>
-                </a:solidFill>
-                <a:latin typeface="Calibri" pitchFamily="34" charset="0"/>
-                <a:ea typeface="Calibri" pitchFamily="34" charset="-122"/>
-                <a:cs typeface="Calibri" pitchFamily="34" charset="-120"/>
-              </a:rPr>
-              <a:t>TEACHER'S NOTE</a:t>
-            </a:r>
-            <a:endParaRPr lang="en-US" sz="1400" dirty="0"/>
-          </a:p>
-        </p:txBody>
-      </p:sp>
-      <p:pic>
-        <p:nvPicPr>
-          <p:cNvPr id="3" name="Image 0" descr="/home/claude/f4/img/minesec_sheet.png">    </p:cNvPr>
-          <p:cNvPicPr>
-            <a:picLocks noChangeAspect="1"/>
-          </p:cNvPicPr>
-          <p:nvPr/>
-        </p:nvPicPr>
-        <p:blipFill>
-          <a:blip r:embed="rId1"/>
-          <a:stretch>
-            <a:fillRect/>
-          </a:stretch>
-        </p:blipFill>
-        <p:spPr>
-          <a:xfrm>
-            <a:off x="0" y="658368"/>
-            <a:ext cx="2468880" cy="5833872"/>
-          </a:xfrm>
-          <a:prstGeom prst="rect">
-            <a:avLst/>
-          </a:prstGeom>
-        </p:spPr>
-      </p:pic>
-      <p:sp>
-        <p:nvSpPr>
-          <p:cNvPr id="4" name="Text 1"/>
-          <p:cNvSpPr/>
-          <p:nvPr/>
-        </p:nvSpPr>
-        <p:spPr>
-          <a:xfrm>
-            <a:off x="2697480" y="1005840"/>
-            <a:ext cx="9174175" cy="731520"/>
-          </a:xfrm>
-          <a:prstGeom prst="rect">
-            <a:avLst/>
-          </a:prstGeom>
-          <a:noFill/>
-          <a:ln/>
-        </p:spPr>
-        <p:txBody>
-          <a:bodyPr wrap="square" lIns="0" tIns="0" rIns="0" bIns="0" rtlCol="0" anchor="ctr">
-            <a:normAutofit/>
-          </a:bodyPr>
-          <a:lstStyle/>
-          <a:p>
-            <a:pPr algn="ctr" indent="0" marL="0">
-              <a:buNone/>
-            </a:pPr>
-            <a:r>
-              <a:rPr lang="en-US" sz="3600" b="1" dirty="0">
-                <a:solidFill>
-                  <a:srgbClr val="990011"/>
-                </a:solidFill>
-                <a:latin typeface="Times New Roman" pitchFamily="34" charset="0"/>
-                <a:ea typeface="Times New Roman" pitchFamily="34" charset="-122"/>
-                <a:cs typeface="Times New Roman" pitchFamily="34" charset="-120"/>
-              </a:rPr>
-              <a:t>Teacher's Note</a:t>
-            </a:r>
-            <a:endParaRPr lang="en-US" sz="3600" dirty="0"/>
-          </a:p>
-        </p:txBody>
-      </p:sp>
-      <p:sp>
-        <p:nvSpPr>
-          <p:cNvPr id="5" name="Text 2"/>
-          <p:cNvSpPr/>
-          <p:nvPr/>
-        </p:nvSpPr>
-        <p:spPr>
-          <a:xfrm>
-            <a:off x="2697480" y="1783080"/>
-            <a:ext cx="9174175" cy="4663440"/>
-          </a:xfrm>
-          <a:prstGeom prst="rect">
-            <a:avLst/>
-          </a:prstGeom>
-          <a:noFill/>
-          <a:ln/>
-        </p:spPr>
-        <p:txBody>
-          <a:bodyPr wrap="square" lIns="0" tIns="0" rIns="0" bIns="0" rtlCol="0" anchor="t"/>
-          <a:lstStyle/>
-          <a:p>
-            <a:pPr algn="l" marL="342900" indent="-342900">
-              <a:spcAft>
-                <a:spcPts val="800"/>
-              </a:spcAft>
-              <a:buSzPct val="100000"/>
-              <a:buChar char="•"/>
-            </a:pPr>
-            <a:r>
-              <a:rPr lang="en-US" sz="2000" dirty="0">
-                <a:solidFill>
-                  <a:srgbClr val="111111"/>
-                </a:solidFill>
-                <a:latin typeface="Calibri" pitchFamily="34" charset="0"/>
-                <a:ea typeface="Calibri" pitchFamily="34" charset="-122"/>
-                <a:cs typeface="Calibri" pitchFamily="34" charset="-120"/>
-              </a:rPr>
-              <a:t>Timing: Homework correction, plan, objectives 8 min | Recall, situation, action 10 min | 5 activities 30 min | Board summary (copying) 30 min | Evaluation, remediation 10 min | Homework, next lesson 5 min | Logbook 7 min</a:t>
-            </a:r>
-            <a:endParaRPr lang="en-US" sz="2000" dirty="0"/>
-          </a:p>
-          <a:p>
-            <a:pPr algn="l" marL="342900" indent="-342900">
-              <a:spcAft>
-                <a:spcPts val="800"/>
-              </a:spcAft>
-              <a:buSzPct val="100000"/>
-              <a:buChar char="•"/>
-            </a:pPr>
-            <a:r>
-              <a:rPr lang="en-US" sz="2000" dirty="0">
-                <a:solidFill>
-                  <a:srgbClr val="111111"/>
-                </a:solidFill>
-                <a:latin typeface="Calibri" pitchFamily="34" charset="0"/>
-                <a:ea typeface="Calibri" pitchFamily="34" charset="-122"/>
-                <a:cs typeface="Calibri" pitchFamily="34" charset="-120"/>
-              </a:rPr>
-              <a:t>Without the projector (Activity 1): draw positive and negative patterns.</a:t>
-            </a:r>
-            <a:endParaRPr lang="en-US" sz="2000" dirty="0"/>
-          </a:p>
-          <a:p>
-            <a:pPr algn="l" marL="342900" indent="-342900">
-              <a:spcAft>
-                <a:spcPts val="800"/>
-              </a:spcAft>
-              <a:buSzPct val="100000"/>
-              <a:buChar char="•"/>
-            </a:pPr>
-            <a:r>
-              <a:rPr lang="en-US" sz="2000" dirty="0">
-                <a:solidFill>
-                  <a:srgbClr val="111111"/>
-                </a:solidFill>
-                <a:latin typeface="Calibri" pitchFamily="34" charset="0"/>
-                <a:ea typeface="Calibri" pitchFamily="34" charset="-122"/>
-                <a:cs typeface="Calibri" pitchFamily="34" charset="-120"/>
-              </a:rPr>
-              <a:t>Without the projector (Activity 2): rank the heights of five students.</a:t>
-            </a:r>
-            <a:endParaRPr lang="en-US" sz="2000" dirty="0"/>
-          </a:p>
-          <a:p>
-            <a:pPr algn="l" marL="342900" indent="-342900">
-              <a:spcAft>
-                <a:spcPts val="800"/>
-              </a:spcAft>
-              <a:buSzPct val="100000"/>
-              <a:buChar char="•"/>
-            </a:pPr>
-            <a:r>
-              <a:rPr lang="en-US" sz="2000" dirty="0">
-                <a:solidFill>
-                  <a:srgbClr val="111111"/>
-                </a:solidFill>
-                <a:latin typeface="Calibri" pitchFamily="34" charset="0"/>
-                <a:ea typeface="Calibri" pitchFamily="34" charset="-122"/>
-                <a:cs typeface="Calibri" pitchFamily="34" charset="-120"/>
-              </a:rPr>
-              <a:t>Without the projector (Activity 3): complete the table on the board.</a:t>
-            </a:r>
-            <a:endParaRPr lang="en-US" sz="2000" dirty="0"/>
-          </a:p>
-          <a:p>
-            <a:pPr algn="l" marL="342900" indent="-342900">
-              <a:spcAft>
-                <a:spcPts val="800"/>
-              </a:spcAft>
-              <a:buSzPct val="100000"/>
-              <a:buChar char="•"/>
-            </a:pPr>
-            <a:r>
-              <a:rPr lang="en-US" sz="2000" dirty="0">
-                <a:solidFill>
-                  <a:srgbClr val="111111"/>
-                </a:solidFill>
-                <a:latin typeface="Calibri" pitchFamily="34" charset="0"/>
-                <a:ea typeface="Calibri" pitchFamily="34" charset="-122"/>
-                <a:cs typeface="Calibri" pitchFamily="34" charset="-120"/>
-              </a:rPr>
-              <a:t>Without the projector (Activity 4): draw the scale from −1 to +1.</a:t>
-            </a:r>
-            <a:endParaRPr lang="en-US" sz="2000" dirty="0"/>
-          </a:p>
-          <a:p>
-            <a:pPr algn="l" marL="342900" indent="-342900">
-              <a:spcAft>
-                <a:spcPts val="800"/>
-              </a:spcAft>
-              <a:buSzPct val="100000"/>
-              <a:buChar char="•"/>
-            </a:pPr>
-            <a:r>
-              <a:rPr lang="en-US" sz="2000" dirty="0">
-                <a:solidFill>
-                  <a:srgbClr val="111111"/>
-                </a:solidFill>
-                <a:latin typeface="Calibri" pitchFamily="34" charset="0"/>
-                <a:ea typeface="Calibri" pitchFamily="34" charset="-122"/>
-                <a:cs typeface="Calibri" pitchFamily="34" charset="-120"/>
-              </a:rPr>
-              <a:t>Without the projector (Activity 5): compare with the critical value.</a:t>
-            </a:r>
-            <a:endParaRPr lang="en-US" sz="2000" dirty="0"/>
-          </a:p>
-        </p:txBody>
-      </p:sp>
-      <p:sp>
-        <p:nvSpPr>
-          <p:cNvPr id="25" name="Slide Number Placeholder 0"/>
-          <p:cNvSpPr>
-            <a:spLocks noGrp="1"/>
-          </p:cNvSpPr>
-          <p:nvPr>
-            <p:ph type="sldNum" sz="quarter" idx="4294967295"/>
-          </p:nvPr>
-        </p:nvSpPr>
-        <p:spPr>
-          <a:xfrm>
-            <a:off x="27432" y="91440"/>
-            <a:ext cx="585216" cy="475488"/>
-          </a:xfrm>
-          <a:prstGeom prst="rect">
-            <a:avLst/>
-          </a:prstGeom>
-          <a:extLst>
-            <a:ext uri="{C572A759-6A51-4108-AA02-DFA0A04FC94B}">
-              <ma14:wrappingTextBoxFlag xmlns:ma14="http://schemas.microsoft.com/office/mac/drawingml/2011/main" val="0"/>
-            </a:ext>
-          </a:extLst>
-        </p:spPr>
-        <p:txBody>
-          <a:bodyPr/>
-          <a:lstStyle>
-            <a:lvl1pPr>
-              <a:defRPr sz="2000">
-                <a:solidFill>
-                  <a:srgbClr val="FFFFFF"/>
-                </a:solidFill>
-                <a:latin typeface="Calibri"/>
-                <a:ea typeface="Calibri"/>
-                <a:cs typeface="Calibri"/>
-              </a:defRPr>
-            </a:lvl1pPr>
-          </a:lstStyle>
-          <a:p>
-            <a:pPr algn="ctr"/>
-            <a:fld id="{F7021451-1387-4CA6-816F-3879F97B5CBC}" type="slidenum">
-              <a:rPr b="1" lang="en-US"/>
               <a:t>62</a:t>
             </a:fld>
             <a:endParaRPr lang="en-US"/>
@@ -24599,7 +24303,7 @@
                 <a:ea typeface="Calibri" pitchFamily="34" charset="-122"/>
                 <a:cs typeface="Calibri" pitchFamily="34" charset="-120"/>
               </a:rPr>
-              <a:t>REFERENCES</a:t>
+              <a:t>TEACHER'S NOTE</a:t>
             </a:r>
             <a:endParaRPr lang="en-US" sz="1400" dirty="0"/>
           </a:p>
@@ -24622,7 +24326,7 @@
         <p:spPr>
           <a:xfrm>
             <a:off x="0" y="658368"/>
-            <a:ext cx="5120640" cy="5833872"/>
+            <a:ext cx="2468880" cy="5833872"/>
           </a:xfrm>
           <a:prstGeom prst="rect">
             <a:avLst/>
@@ -24637,8 +24341,8 @@
         </p:nvSpPr>
         <p:spPr>
           <a:xfrm>
-            <a:off x="5349240" y="1005840"/>
-            <a:ext cx="6522415" cy="731520"/>
+            <a:off x="2697480" y="1005840"/>
+            <a:ext cx="9174175" cy="731520"/>
           </a:xfrm>
           <a:prstGeom prst="rect">
             <a:avLst/>
@@ -24664,7 +24368,7 @@
                 <a:ea typeface="Times New Roman" pitchFamily="34" charset="-122"/>
                 <a:cs typeface="Times New Roman" pitchFamily="34" charset="-120"/>
               </a:rPr>
-              <a:t>References</a:t>
+              <a:t>Teacher's Note</a:t>
             </a:r>
             <a:endParaRPr lang="en-US" sz="3600" dirty="0"/>
           </a:p>
@@ -24678,8 +24382,8 @@
         </p:nvSpPr>
         <p:spPr>
           <a:xfrm>
-            <a:off x="5349240" y="1783080"/>
-            <a:ext cx="6522415" cy="4663440"/>
+            <a:off x="2697480" y="1783080"/>
+            <a:ext cx="9174175" cy="4663440"/>
           </a:xfrm>
           <a:prstGeom prst="rect">
             <a:avLst/>
@@ -24699,7 +24403,7 @@
               <a:buChar char="•"/>
             </a:pPr>
             <a:r>
-              <a:rPr lang="en-US" sz="1800" dirty="0">
+              <a:rPr lang="en-US" sz="2000" dirty="0">
                 <a:solidFill>
                   <a:srgbClr val="111111"/>
                 </a:solidFill>
@@ -24707,9 +24411,9 @@
                 <a:ea typeface="Calibri" pitchFamily="34" charset="-122"/>
                 <a:cs typeface="Calibri" pitchFamily="34" charset="-120"/>
               </a:rPr>
-              <a:t>Geography Syllabus for Sixth Forms (Lower and Upper Sixth), MINESEC, 2019 — Module 8 (Practical Geography).</a:t>
-            </a:r>
-            <a:endParaRPr lang="en-US" sz="1800" dirty="0"/>
+              <a:t>Timing: Homework correction, plan, objectives 8 min | Recall, situation, action 10 min | 5 activities 30 min | Board summary (copying) 30 min | Evaluation, remediation 10 min | Homework, next lesson 5 min | Logbook 7 min</a:t>
+            </a:r>
+            <a:endParaRPr lang="en-US" sz="2000" dirty="0"/>
           </a:p>
           <a:p>
             <a:pPr algn="l" marL="342900" indent="-342900">
@@ -24720,7 +24424,7 @@
               <a:buChar char="•"/>
             </a:pPr>
             <a:r>
-              <a:rPr lang="en-US" sz="1800" dirty="0">
+              <a:rPr lang="en-US" sz="2000" dirty="0">
                 <a:solidFill>
                   <a:srgbClr val="111111"/>
                 </a:solidFill>
@@ -24728,9 +24432,9 @@
                 <a:ea typeface="Calibri" pitchFamily="34" charset="-122"/>
                 <a:cs typeface="Calibri" pitchFamily="34" charset="-120"/>
               </a:rPr>
-              <a:t>Teacher's course notes: Mr KAMDEM E., Statistical Techniques in Geographical Analysis (USA), GBHS Garoua, 2026.</a:t>
-            </a:r>
-            <a:endParaRPr lang="en-US" sz="1800" dirty="0"/>
+              <a:t>Without the projector (Activity 1): draw positive and negative patterns.</a:t>
+            </a:r>
+            <a:endParaRPr lang="en-US" sz="2000" dirty="0"/>
           </a:p>
           <a:p>
             <a:pPr algn="l" marL="342900" indent="-342900">
@@ -24741,7 +24445,7 @@
               <a:buChar char="•"/>
             </a:pPr>
             <a:r>
-              <a:rPr lang="en-US" sz="1800" dirty="0">
+              <a:rPr lang="en-US" sz="2000" dirty="0">
                 <a:solidFill>
                   <a:srgbClr val="111111"/>
                 </a:solidFill>
@@ -24749,9 +24453,9 @@
                 <a:ea typeface="Calibri" pitchFamily="34" charset="-122"/>
                 <a:cs typeface="Calibri" pitchFamily="34" charset="-120"/>
               </a:rPr>
-              <a:t>Photo, Activity 5: “Humic Dystrudept (fine-loamy, isotic, frigid)” by SoilScience.info, CC BY 2.0, via Flickr (https://www.flickr.com/photos/22503286@N06/5140645742)</a:t>
-            </a:r>
-            <a:endParaRPr lang="en-US" sz="1800" dirty="0"/>
+              <a:t>Without the projector (Activity 2): rank the heights of five students.</a:t>
+            </a:r>
+            <a:endParaRPr lang="en-US" sz="2000" dirty="0"/>
           </a:p>
           <a:p>
             <a:pPr algn="l" marL="342900" indent="-342900">
@@ -24762,7 +24466,7 @@
               <a:buChar char="•"/>
             </a:pPr>
             <a:r>
-              <a:rPr lang="en-US" sz="1800" dirty="0">
+              <a:rPr lang="en-US" sz="2000" dirty="0">
                 <a:solidFill>
                   <a:srgbClr val="111111"/>
                 </a:solidFill>
@@ -24770,9 +24474,51 @@
                 <a:ea typeface="Calibri" pitchFamily="34" charset="-122"/>
                 <a:cs typeface="Calibri" pitchFamily="34" charset="-120"/>
               </a:rPr>
-              <a:t>Diagrams and animations: drawn for this lesson (Geography Department).</a:t>
-            </a:r>
-            <a:endParaRPr lang="en-US" sz="1800" dirty="0"/>
+              <a:t>Without the projector (Activity 3): complete the table on the board.</a:t>
+            </a:r>
+            <a:endParaRPr lang="en-US" sz="2000" dirty="0"/>
+          </a:p>
+          <a:p>
+            <a:pPr algn="l" marL="342900" indent="-342900">
+              <a:spcAft>
+                <a:spcPts val="800"/>
+              </a:spcAft>
+              <a:buSzPct val="100000"/>
+              <a:buChar char="•"/>
+            </a:pPr>
+            <a:r>
+              <a:rPr lang="en-US" sz="2000" dirty="0">
+                <a:solidFill>
+                  <a:srgbClr val="111111"/>
+                </a:solidFill>
+                <a:latin typeface="Calibri" pitchFamily="34" charset="0"/>
+                <a:ea typeface="Calibri" pitchFamily="34" charset="-122"/>
+                <a:cs typeface="Calibri" pitchFamily="34" charset="-120"/>
+              </a:rPr>
+              <a:t>Without the projector (Activity 4): draw the scale from −1 to +1.</a:t>
+            </a:r>
+            <a:endParaRPr lang="en-US" sz="2000" dirty="0"/>
+          </a:p>
+          <a:p>
+            <a:pPr algn="l" marL="342900" indent="-342900">
+              <a:spcAft>
+                <a:spcPts val="800"/>
+              </a:spcAft>
+              <a:buSzPct val="100000"/>
+              <a:buChar char="•"/>
+            </a:pPr>
+            <a:r>
+              <a:rPr lang="en-US" sz="2000" dirty="0">
+                <a:solidFill>
+                  <a:srgbClr val="111111"/>
+                </a:solidFill>
+                <a:latin typeface="Calibri" pitchFamily="34" charset="0"/>
+                <a:ea typeface="Calibri" pitchFamily="34" charset="-122"/>
+                <a:cs typeface="Calibri" pitchFamily="34" charset="-120"/>
+              </a:rPr>
+              <a:t>Without the projector (Activity 5): compare with the critical value.</a:t>
+            </a:r>
+            <a:endParaRPr lang="en-US" sz="2000" dirty="0"/>
           </a:p>
         </p:txBody>
       </p:sp>
@@ -24819,6 +24565,289 @@
             <a:fld id="{F7021451-1387-4CA6-816F-3879F97B5CBC}" type="slidenum">
               <a:rPr b="1" lang="en-US"/>
               <a:t>63</a:t>
+            </a:fld>
+            <a:endParaRPr lang="en-US"/>
+          </a:p>
+        </p:txBody>
+      </p:sp>
+    </p:spTree>
+  </p:cSld>
+  <p:clrMapOvr>
+    <a:masterClrMapping/>
+  </p:clrMapOvr>
+</p:sld>
+</file>
+
+<file path=ppt/slides/slide64.xml><?xml version="1.0" encoding="utf-8"?>
+<p:sld xmlns:a="http://schemas.openxmlformats.org/drawingml/2006/main" xmlns:r="http://schemas.openxmlformats.org/officeDocument/2006/relationships" xmlns:p="http://schemas.openxmlformats.org/presentationml/2006/main">
+  <p:cSld name="Slide 64">
+    <p:spTree>
+      <p:nvGrpSpPr>
+        <p:cNvPr id="1" name=""/>
+        <p:cNvGrpSpPr/>
+        <p:nvPr/>
+      </p:nvGrpSpPr>
+      <p:grpSpPr>
+        <a:xfrm>
+          <a:off x="0" y="0"/>
+          <a:ext cx="0" cy="0"/>
+          <a:chOff x="0" y="0"/>
+          <a:chExt cx="0" cy="0"/>
+        </a:xfrm>
+      </p:grpSpPr>
+      <p:sp>
+        <p:nvSpPr>
+          <p:cNvPr id="2" name="Text 0"/>
+          <p:cNvSpPr/>
+          <p:nvPr/>
+        </p:nvSpPr>
+        <p:spPr>
+          <a:xfrm>
+            <a:off x="457200" y="713232"/>
+            <a:ext cx="11368735" cy="274320"/>
+          </a:xfrm>
+          <a:prstGeom prst="rect">
+            <a:avLst/>
+          </a:prstGeom>
+          <a:noFill/>
+          <a:ln/>
+        </p:spPr>
+        <p:txBody>
+          <a:bodyPr wrap="square" lIns="0" tIns="0" rIns="0" bIns="0" rtlCol="0" anchor="ctr"/>
+          <a:lstStyle/>
+          <a:p>
+            <a:pPr algn="r" indent="0" marL="0">
+              <a:buNone/>
+            </a:pPr>
+            <a:r>
+              <a:rPr lang="en-US" sz="1400" b="1" dirty="0">
+                <a:solidFill>
+                  <a:srgbClr val="1C3F6E"/>
+                </a:solidFill>
+                <a:latin typeface="Calibri" pitchFamily="34" charset="0"/>
+                <a:ea typeface="Calibri" pitchFamily="34" charset="-122"/>
+                <a:cs typeface="Calibri" pitchFamily="34" charset="-120"/>
+              </a:rPr>
+              <a:t>REFERENCES</a:t>
+            </a:r>
+            <a:endParaRPr lang="en-US" sz="1400" dirty="0"/>
+          </a:p>
+        </p:txBody>
+      </p:sp>
+      <p:pic>
+        <p:nvPicPr>
+          <p:cNvPr id="3" name="Image 0" descr="/home/claude/f4/img/minesec_sheet.png">    </p:cNvPr>
+          <p:cNvPicPr>
+            <a:picLocks noChangeAspect="1"/>
+          </p:cNvPicPr>
+          <p:nvPr/>
+        </p:nvPicPr>
+        <p:blipFill>
+          <a:blip r:embed="rId1"/>
+          <a:stretch>
+            <a:fillRect/>
+          </a:stretch>
+        </p:blipFill>
+        <p:spPr>
+          <a:xfrm>
+            <a:off x="0" y="658368"/>
+            <a:ext cx="5120640" cy="5833872"/>
+          </a:xfrm>
+          <a:prstGeom prst="rect">
+            <a:avLst/>
+          </a:prstGeom>
+        </p:spPr>
+      </p:pic>
+      <p:sp>
+        <p:nvSpPr>
+          <p:cNvPr id="4" name="Text 1"/>
+          <p:cNvSpPr/>
+          <p:nvPr/>
+        </p:nvSpPr>
+        <p:spPr>
+          <a:xfrm>
+            <a:off x="5349240" y="1005840"/>
+            <a:ext cx="6522415" cy="731520"/>
+          </a:xfrm>
+          <a:prstGeom prst="rect">
+            <a:avLst/>
+          </a:prstGeom>
+          <a:noFill/>
+          <a:ln/>
+        </p:spPr>
+        <p:txBody>
+          <a:bodyPr wrap="square" lIns="0" tIns="0" rIns="0" bIns="0" rtlCol="0" anchor="ctr">
+            <a:normAutofit/>
+          </a:bodyPr>
+          <a:lstStyle/>
+          <a:p>
+            <a:pPr algn="ctr" indent="0" marL="0">
+              <a:buNone/>
+            </a:pPr>
+            <a:r>
+              <a:rPr lang="en-US" sz="3600" b="1" dirty="0">
+                <a:solidFill>
+                  <a:srgbClr val="990011"/>
+                </a:solidFill>
+                <a:latin typeface="Times New Roman" pitchFamily="34" charset="0"/>
+                <a:ea typeface="Times New Roman" pitchFamily="34" charset="-122"/>
+                <a:cs typeface="Times New Roman" pitchFamily="34" charset="-120"/>
+              </a:rPr>
+              <a:t>References</a:t>
+            </a:r>
+            <a:endParaRPr lang="en-US" sz="3600" dirty="0"/>
+          </a:p>
+        </p:txBody>
+      </p:sp>
+      <p:sp>
+        <p:nvSpPr>
+          <p:cNvPr id="5" name="Text 2"/>
+          <p:cNvSpPr/>
+          <p:nvPr/>
+        </p:nvSpPr>
+        <p:spPr>
+          <a:xfrm>
+            <a:off x="5349240" y="1783080"/>
+            <a:ext cx="6522415" cy="4663440"/>
+          </a:xfrm>
+          <a:prstGeom prst="rect">
+            <a:avLst/>
+          </a:prstGeom>
+          <a:noFill/>
+          <a:ln/>
+        </p:spPr>
+        <p:txBody>
+          <a:bodyPr wrap="square" lIns="0" tIns="0" rIns="0" bIns="0" rtlCol="0" anchor="t"/>
+          <a:lstStyle/>
+          <a:p>
+            <a:pPr algn="l" marL="342900" indent="-342900">
+              <a:spcAft>
+                <a:spcPts val="800"/>
+              </a:spcAft>
+              <a:buSzPct val="100000"/>
+              <a:buChar char="•"/>
+            </a:pPr>
+            <a:r>
+              <a:rPr lang="en-US" sz="1800" dirty="0">
+                <a:solidFill>
+                  <a:srgbClr val="111111"/>
+                </a:solidFill>
+                <a:latin typeface="Calibri" pitchFamily="34" charset="0"/>
+                <a:ea typeface="Calibri" pitchFamily="34" charset="-122"/>
+                <a:cs typeface="Calibri" pitchFamily="34" charset="-120"/>
+              </a:rPr>
+              <a:t>Geography Syllabus for Sixth Forms (Lower and Upper Sixth), MINESEC, 2019 — Module 8 (Practical Geography).</a:t>
+            </a:r>
+            <a:endParaRPr lang="en-US" sz="1800" dirty="0"/>
+          </a:p>
+          <a:p>
+            <a:pPr algn="l" marL="342900" indent="-342900">
+              <a:spcAft>
+                <a:spcPts val="800"/>
+              </a:spcAft>
+              <a:buSzPct val="100000"/>
+              <a:buChar char="•"/>
+            </a:pPr>
+            <a:r>
+              <a:rPr lang="en-US" sz="1800" dirty="0">
+                <a:solidFill>
+                  <a:srgbClr val="111111"/>
+                </a:solidFill>
+                <a:latin typeface="Calibri" pitchFamily="34" charset="0"/>
+                <a:ea typeface="Calibri" pitchFamily="34" charset="-122"/>
+                <a:cs typeface="Calibri" pitchFamily="34" charset="-120"/>
+              </a:rPr>
+              <a:t>Teacher's course notes: Mr KAMDEM E., Statistical Techniques in Geographical Analysis (USA), GBHS Garoua, 2026.</a:t>
+            </a:r>
+            <a:endParaRPr lang="en-US" sz="1800" dirty="0"/>
+          </a:p>
+          <a:p>
+            <a:pPr algn="l" marL="342900" indent="-342900">
+              <a:spcAft>
+                <a:spcPts val="800"/>
+              </a:spcAft>
+              <a:buSzPct val="100000"/>
+              <a:buChar char="•"/>
+            </a:pPr>
+            <a:r>
+              <a:rPr lang="en-US" sz="1800" dirty="0">
+                <a:solidFill>
+                  <a:srgbClr val="111111"/>
+                </a:solidFill>
+                <a:latin typeface="Calibri" pitchFamily="34" charset="0"/>
+                <a:ea typeface="Calibri" pitchFamily="34" charset="-122"/>
+                <a:cs typeface="Calibri" pitchFamily="34" charset="-120"/>
+              </a:rPr>
+              <a:t>Photo, Activity 5: “Humic Dystrudept (fine-loamy, isotic, frigid)” by SoilScience.info, CC BY 2.0, via Flickr (https://www.flickr.com/photos/22503286@N06/5140645742)</a:t>
+            </a:r>
+            <a:endParaRPr lang="en-US" sz="1800" dirty="0"/>
+          </a:p>
+          <a:p>
+            <a:pPr algn="l" marL="342900" indent="-342900">
+              <a:spcAft>
+                <a:spcPts val="800"/>
+              </a:spcAft>
+              <a:buSzPct val="100000"/>
+              <a:buChar char="•"/>
+            </a:pPr>
+            <a:r>
+              <a:rPr lang="en-US" sz="1800" dirty="0">
+                <a:solidFill>
+                  <a:srgbClr val="111111"/>
+                </a:solidFill>
+                <a:latin typeface="Calibri" pitchFamily="34" charset="0"/>
+                <a:ea typeface="Calibri" pitchFamily="34" charset="-122"/>
+                <a:cs typeface="Calibri" pitchFamily="34" charset="-120"/>
+              </a:rPr>
+              <a:t>Diagrams and animations: drawn for this lesson (Geography Department).</a:t>
+            </a:r>
+            <a:endParaRPr lang="en-US" sz="1800" dirty="0"/>
+          </a:p>
+        </p:txBody>
+      </p:sp>
+      <p:sp>
+        <p:nvSpPr>
+          <p:cNvPr id="25" name="Slide Number Placeholder 0"/>
+          <p:cNvSpPr>
+            <a:spLocks noGrp="1"/>
+          </p:cNvSpPr>
+          <p:nvPr>
+            <p:ph type="sldNum" sz="quarter" idx="4294967295"/>
+          </p:nvPr>
+        </p:nvSpPr>
+        <p:spPr>
+          <a:xfrm>
+            <a:off x="27432" y="91440"/>
+            <a:ext cx="585216" cy="475488"/>
+          </a:xfrm>
+          <a:prstGeom prst="rect">
+            <a:avLst/>
+          </a:prstGeom>
+          <a:extLst>
+            <a:ext uri="{C572A759-6A51-4108-AA02-DFA0A04FC94B}">
+              <ma14:wrappingTextBoxFlag xmlns:ma14="http://schemas.microsoft.com/office/mac/drawingml/2011/main" val="0"/>
+            </a:ext>
+          </a:extLst>
+        </p:spPr>
+        <p:txBody>
+          <a:bodyPr/>
+          <a:lstStyle>
+            <a:lvl1pPr>
+              <a:defRPr sz="2000">
+                <a:solidFill>
+                  <a:srgbClr val="FFFFFF"/>
+                </a:solidFill>
+                <a:latin typeface="Calibri"/>
+                <a:ea typeface="Calibri"/>
+                <a:cs typeface="Calibri"/>
+              </a:defRPr>
+            </a:lvl1pPr>
+          </a:lstStyle>
+          <a:p>
+            <a:pPr algn="ctr"/>
+            <a:fld id="{F7021451-1387-4CA6-816F-3879F97B5CBC}" type="slidenum">
+              <a:rPr b="1" lang="en-US"/>
+              <a:t>64</a:t>
             </a:fld>
             <a:endParaRPr lang="en-US"/>
           </a:p>

--- a/lecons/USA/Practical Geography/14_USA_PRA_QT03c_Measures_of_Association_Spearman.pptx
+++ b/lecons/USA/Practical Geography/14_USA_PRA_QT03c_Measures_of_Association_Spearman.pptx
@@ -69,9 +69,11 @@
     <p:sldId id="317" r:id="rId63"/>
     <p:sldId id="318" r:id="rId64"/>
     <p:sldId id="319" r:id="rId65"/>
+    <p:sldId id="320" r:id="rId66"/>
+    <p:sldId id="321" r:id="rId67"/>
   </p:sldIdLst>
   <p:notesMasterIdLst>
-    <p:notesMasterId r:id="rId66"/>
+    <p:notesMasterId r:id="rId68"/>
   </p:notesMasterIdLst>
   <p:sldSz cx="12192000" cy="6858000"/>
   <p:notesSz cx="6858000" cy="12192000"/>
@@ -3733,7 +3735,7 @@
           <a:p>
             <a:r>
               <a:rPr lang="en-US" dirty="0"/>
-              <a:t>Let us copy Formula and Steps of Calculation. Rs is calculated in the following steps. Copy the point on Formula on the left, then draw the diagram on the right: spearman's formula. Give it a title and label it clearly.</a:t>
+              <a:t>Let us copy The Formula. The formula of Spearman is used as follows. Copy the point on Formula on the left, then draw the diagram on the right: spearman's formula. Give it a title and label it clearly.</a:t>
             </a:r>
             <a:endParaRPr lang="en-US" dirty="0"/>
           </a:p>
@@ -3821,7 +3823,7 @@
           <a:p>
             <a:r>
               <a:rPr lang="en-US" dirty="0"/>
-              <a:t>We continue with Formula and Steps of Calculation. Copy the point on Stating the hypothesis and ranking: write the key term first, then its explanation.</a:t>
+              <a:t>We continue with The Formula. Copy the point on Tied ranks: write the key term first, then its explanation.</a:t>
             </a:r>
             <a:endParaRPr lang="en-US" dirty="0"/>
           </a:p>
@@ -3909,7 +3911,7 @@
           <a:p>
             <a:r>
               <a:rPr lang="en-US" dirty="0"/>
-              <a:t>We continue with Formula and Steps of Calculation. Copy the point on Calculating: write the key term first, then its explanation.</a:t>
+              <a:t>Let us copy The Steps. Rs is calculated in the following steps. Copy the point on Step 1, the hypothesis: write the key term first, then its explanation.</a:t>
             </a:r>
             <a:endParaRPr lang="en-US" dirty="0"/>
           </a:p>
@@ -3997,7 +3999,7 @@
           <a:p>
             <a:r>
               <a:rPr lang="en-US" dirty="0"/>
-              <a:t>We continue with Formula and Steps of Calculation. Copy the point on Tied ranks: write the key term first, then its explanation.</a:t>
+              <a:t>We continue with The Steps. Copy the point on Step 2, the ranks: write the key term first, then its explanation.</a:t>
             </a:r>
             <a:endParaRPr lang="en-US" dirty="0"/>
           </a:p>
@@ -4085,7 +4087,7 @@
           <a:p>
             <a:r>
               <a:rPr lang="en-US" dirty="0"/>
-              <a:t>Let us copy Worked Example: Slope Angle and Soil Depth. The worked example is solved as follows. Copy the point on Hypothesis and data on the left, then draw the diagram on the right: the calculation table. Give it a title and label it clearly.</a:t>
+              <a:t>We continue with The Steps. Copy the point on Step 3, the differences: write the key term first, then its explanation.</a:t>
             </a:r>
             <a:endParaRPr lang="en-US" dirty="0"/>
           </a:p>
@@ -4173,7 +4175,7 @@
           <a:p>
             <a:r>
               <a:rPr lang="en-US" dirty="0"/>
-              <a:t>We continue with Worked Example: Slope Angle and Soil Depth. Copy the point on Calculation: write the key term first, then its explanation.</a:t>
+              <a:t>We continue with The Steps. Copy the point on Step 4, the result: write the key term first, then its explanation.</a:t>
             </a:r>
             <a:endParaRPr lang="en-US" dirty="0"/>
           </a:p>
@@ -4261,7 +4263,7 @@
           <a:p>
             <a:r>
               <a:rPr lang="en-US" dirty="0"/>
-              <a:t>We continue with Worked Example: Slope Angle and Soil Depth. Copy the point on Interpretation: write the key term first, then its explanation.</a:t>
+              <a:t>Let us copy Worked Example: Slope Angle and Soil Depth. The worked example is solved as follows. Copy the point on Hypothesis and data on the left, then draw the diagram on the right: the calculation table. Give it a title and label it clearly.</a:t>
             </a:r>
             <a:endParaRPr lang="en-US" dirty="0"/>
           </a:p>
@@ -4349,7 +4351,7 @@
           <a:p>
             <a:r>
               <a:rPr lang="en-US" dirty="0"/>
-              <a:t>Let us copy Interpretation and Significance. Rs is interpreted and tested as follows. Copy the point on Positive values on the left, then draw the diagram on the right: the scale of Rs. Give it a title and label it clearly.</a:t>
+              <a:t>We continue with Worked Example: Slope Angle and Soil Depth. Copy the point on Calculation: write the key term first, then its explanation.</a:t>
             </a:r>
             <a:endParaRPr lang="en-US" dirty="0"/>
           </a:p>
@@ -4525,7 +4527,7 @@
           <a:p>
             <a:r>
               <a:rPr lang="en-US" dirty="0"/>
-              <a:t>We continue with Interpretation and Significance. Copy the point on Negative values: write the key term first, then its explanation.</a:t>
+              <a:t>We continue with Worked Example: Slope Angle and Soil Depth. Copy the point on Interpretation: write the key term first, then its explanation.</a:t>
             </a:r>
             <a:endParaRPr lang="en-US" dirty="0"/>
           </a:p>
@@ -4613,7 +4615,7 @@
           <a:p>
             <a:r>
               <a:rPr lang="en-US" dirty="0"/>
-              <a:t>We continue with Interpretation and Significance. Copy the point on Significance test: write the key term first, then its explanation.</a:t>
+              <a:t>Let us copy Interpretation and Significance. Rs is interpreted and tested as follows. Copy the point on Positive values on the left, then draw the diagram on the right: the scale of Rs. Give it a title and label it clearly.</a:t>
             </a:r>
             <a:endParaRPr lang="en-US" dirty="0"/>
           </a:p>
@@ -4701,7 +4703,7 @@
           <a:p>
             <a:r>
               <a:rPr lang="en-US" dirty="0"/>
-              <a:t>We continue with Interpretation and Significance. Copy the point on Application and conclusion: write the key term first, then its explanation.</a:t>
+              <a:t>We continue with Interpretation and Significance. Copy the point on Negative values: write the key term first, then its explanation.</a:t>
             </a:r>
             <a:endParaRPr lang="en-US" dirty="0"/>
           </a:p>
@@ -4789,7 +4791,7 @@
           <a:p>
             <a:r>
               <a:rPr lang="en-US" dirty="0"/>
-              <a:t>Now let us check what you have understood. Question 1: State a null hypothesis for rainfall and crop yield. Answer in your exercise book.</a:t>
+              <a:t>We continue with Interpretation and Significance. Copy the point on Significance test: write the key term first, then its explanation.</a:t>
             </a:r>
             <a:endParaRPr lang="en-US" dirty="0"/>
           </a:p>
@@ -4877,7 +4879,7 @@
           <a:p>
             <a:r>
               <a:rPr lang="en-US" dirty="0"/>
-              <a:t>The expected answer is: h0: there is no significant relationship between annual rainfall and crop yield. If you got it right, well done.</a:t>
+              <a:t>We continue with Interpretation and Significance. Copy the point on Application and conclusion: write the key term first, then its explanation.</a:t>
             </a:r>
             <a:endParaRPr lang="en-US" dirty="0"/>
           </a:p>
@@ -4965,7 +4967,7 @@
           <a:p>
             <a:r>
               <a:rPr lang="en-US" dirty="0"/>
-              <a:t>Now let us check what you have understood. Question 2: Six pairs give Σd² = 4. Calculate Rs and interpret it. Answer in your exercise book.</a:t>
+              <a:t>Now let us check what you have understood. Question 1: State a null hypothesis for rainfall and crop yield. Answer in your exercise book.</a:t>
             </a:r>
             <a:endParaRPr lang="en-US" dirty="0"/>
           </a:p>
@@ -5053,7 +5055,7 @@
           <a:p>
             <a:r>
               <a:rPr lang="en-US" dirty="0"/>
-              <a:t>The expected answer is: rs = 1 − 24 ÷ 210 ≈ +0.89: a strong positive correlation. If you got it right, well done.</a:t>
+              <a:t>The expected answer is: h0: there is no significant relationship between annual rainfall and crop yield. If you got it right, well done.</a:t>
             </a:r>
             <a:endParaRPr lang="en-US" dirty="0"/>
           </a:p>
@@ -5141,7 +5143,7 @@
           <a:p>
             <a:r>
               <a:rPr lang="en-US" dirty="0"/>
-              <a:t>For those who need more practice, fill in the blanks in your exercise book. The answers are: number 1, +1; number 2, no; number 3, n.</a:t>
+              <a:t>Now let us check what you have understood. Question 2: Six pairs give Σd² = 4. Calculate Rs and interpret it. Answer in your exercise book.</a:t>
             </a:r>
             <a:endParaRPr lang="en-US" dirty="0"/>
           </a:p>
@@ -5229,7 +5231,7 @@
           <a:p>
             <a:r>
               <a:rPr lang="en-US" dirty="0"/>
-              <a:t>For your homework: Name three types of graphs. We shall correct it at the beginning of our next lesson.</a:t>
+              <a:t>The expected answer is: rs = 1 − 24 ÷ 210 ≈ +0.89: a strong positive correlation. If you got it right, well done.</a:t>
             </a:r>
             <a:endParaRPr lang="en-US" dirty="0"/>
           </a:p>
@@ -5317,7 +5319,7 @@
           <a:p>
             <a:r>
               <a:rPr lang="en-US" dirty="0"/>
-              <a:t>Our next lesson will be on Quantitative Techniques 4: Plotting and Interpreting Graphical Tools. Thank you for your attention, and see you next time.</a:t>
+              <a:t>For those who need more practice, fill in the blanks in your exercise book. The answers are: number 1, +1; number 2, no; number 3, n.</a:t>
             </a:r>
             <a:endParaRPr lang="en-US" dirty="0"/>
           </a:p>
@@ -5493,7 +5495,7 @@
           <a:p>
             <a:r>
               <a:rPr lang="en-US" dirty="0"/>
-              <a:t>Let us play the bilingual game. I say a word in English, and you give me the French word. Then we do the reverse.</a:t>
+              <a:t>For your homework: Name three types of graphs. We shall correct it at the beginning of our next lesson.</a:t>
             </a:r>
             <a:endParaRPr lang="en-US" dirty="0"/>
           </a:p>
@@ -5581,7 +5583,7 @@
           <a:p>
             <a:r>
               <a:rPr lang="en-US" dirty="0"/>
-              <a:t>I record this information in the official logbook of the class after the lesson.</a:t>
+              <a:t>Our next lesson will be on Quantitative Techniques 4: Plotting and Interpreting Graphical Tools. Thank you for your attention, and see you next time.</a:t>
             </a:r>
             <a:endParaRPr lang="en-US" dirty="0"/>
           </a:p>
@@ -5669,7 +5671,7 @@
           <a:p>
             <a:r>
               <a:rPr lang="en-US" dirty="0"/>
-              <a:t>I complete the second page of the logbook: the matter taught, the evaluation, the homework and the attendance.</a:t>
+              <a:t>Let us play the bilingual game. I say a word in English, and you give me the French word. Then we do the reverse.</a:t>
             </a:r>
             <a:endParaRPr lang="en-US" dirty="0"/>
           </a:p>
@@ -5757,7 +5759,7 @@
           <a:p>
             <a:r>
               <a:rPr lang="en-US" dirty="0"/>
-              <a:t>This slide is for me, the teacher: it gives the timing of the lesson and what to do if the projector is not available.</a:t>
+              <a:t>I record this information in the official logbook of the class after the lesson.</a:t>
             </a:r>
             <a:endParaRPr lang="en-US" dirty="0"/>
           </a:p>
@@ -5845,7 +5847,7 @@
           <a:p>
             <a:r>
               <a:rPr lang="en-US" dirty="0"/>
-              <a:t>These are the references and picture credits used to prepare this lesson.</a:t>
+              <a:t>I complete the second page of the logbook: the matter taught, the evaluation, the homework and the attendance.</a:t>
             </a:r>
             <a:endParaRPr lang="en-US" dirty="0"/>
           </a:p>
@@ -5869,6 +5871,182 @@
             <a:fld id="{F7021451-1387-4CA6-816F-3879F97B5CBC}" type="slidenum">
               <a:rPr lang="en-US"/>
               <a:t>64</a:t>
+            </a:fld>
+            <a:endParaRPr lang="en-US"/>
+          </a:p>
+        </p:txBody>
+      </p:sp>
+    </p:spTree>
+    <p:extLst>
+      <p:ext uri="{BB962C8B-B14F-4D97-AF65-F5344CB8AC3E}">
+        <p14:creationId xmlns:p14="http://schemas.microsoft.com/office/powerpoint/2010/main" val="1024086991"/>
+      </p:ext>
+    </p:extLst>
+  </p:cSld>
+  <p:clrMapOvr>
+    <a:masterClrMapping/>
+  </p:clrMapOvr>
+</p:notes>
+</file>
+
+<file path=ppt/notesSlides/notesSlide65.xml><?xml version="1.0" encoding="utf-8"?>
+<p:notes xmlns:a="http://schemas.openxmlformats.org/drawingml/2006/main" xmlns:r="http://schemas.openxmlformats.org/officeDocument/2006/relationships" xmlns:p="http://schemas.openxmlformats.org/presentationml/2006/main">
+  <p:cSld>
+    <p:spTree>
+      <p:nvGrpSpPr>
+        <p:cNvPr id="1" name=""/>
+        <p:cNvGrpSpPr/>
+        <p:nvPr/>
+      </p:nvGrpSpPr>
+      <p:grpSpPr>
+        <a:xfrm>
+          <a:off x="0" y="0"/>
+          <a:ext cx="0" cy="0"/>
+          <a:chOff x="0" y="0"/>
+          <a:chExt cx="0" cy="0"/>
+        </a:xfrm>
+      </p:grpSpPr>
+      <p:sp>
+        <p:nvSpPr>
+          <p:cNvPr id="2" name="Slide Image Placeholder 1"/>
+          <p:cNvSpPr>
+            <a:spLocks noGrp="1" noRot="1" noChangeAspect="1"/>
+          </p:cNvSpPr>
+          <p:nvPr>
+            <p:ph type="sldImg"/>
+          </p:nvPr>
+        </p:nvSpPr>
+        <p:spPr/>
+      </p:sp>
+      <p:sp>
+        <p:nvSpPr>
+          <p:cNvPr id="3" name="Notes Placeholder 2"/>
+          <p:cNvSpPr>
+            <a:spLocks noGrp="1"/>
+          </p:cNvSpPr>
+          <p:nvPr>
+            <p:ph type="body" idx="1"/>
+          </p:nvPr>
+        </p:nvSpPr>
+        <p:spPr/>
+        <p:txBody>
+          <a:bodyPr/>
+          <a:lstStyle/>
+          <a:p>
+            <a:r>
+              <a:rPr lang="en-US" dirty="0"/>
+              <a:t>This slide is for me, the teacher: it gives the timing of the lesson and what to do if the projector is not available.</a:t>
+            </a:r>
+            <a:endParaRPr lang="en-US" dirty="0"/>
+          </a:p>
+        </p:txBody>
+      </p:sp>
+      <p:sp>
+        <p:nvSpPr>
+          <p:cNvPr id="4" name="Slide Number Placeholder 3"/>
+          <p:cNvSpPr>
+            <a:spLocks noGrp="1"/>
+          </p:cNvSpPr>
+          <p:nvPr>
+            <p:ph type="sldNum" sz="quarter" idx="10"/>
+          </p:nvPr>
+        </p:nvSpPr>
+        <p:spPr/>
+        <p:txBody>
+          <a:bodyPr/>
+          <a:lstStyle/>
+          <a:p>
+            <a:fld id="{F7021451-1387-4CA6-816F-3879F97B5CBC}" type="slidenum">
+              <a:rPr lang="en-US"/>
+              <a:t>65</a:t>
+            </a:fld>
+            <a:endParaRPr lang="en-US"/>
+          </a:p>
+        </p:txBody>
+      </p:sp>
+    </p:spTree>
+    <p:extLst>
+      <p:ext uri="{BB962C8B-B14F-4D97-AF65-F5344CB8AC3E}">
+        <p14:creationId xmlns:p14="http://schemas.microsoft.com/office/powerpoint/2010/main" val="1024086991"/>
+      </p:ext>
+    </p:extLst>
+  </p:cSld>
+  <p:clrMapOvr>
+    <a:masterClrMapping/>
+  </p:clrMapOvr>
+</p:notes>
+</file>
+
+<file path=ppt/notesSlides/notesSlide66.xml><?xml version="1.0" encoding="utf-8"?>
+<p:notes xmlns:a="http://schemas.openxmlformats.org/drawingml/2006/main" xmlns:r="http://schemas.openxmlformats.org/officeDocument/2006/relationships" xmlns:p="http://schemas.openxmlformats.org/presentationml/2006/main">
+  <p:cSld>
+    <p:spTree>
+      <p:nvGrpSpPr>
+        <p:cNvPr id="1" name=""/>
+        <p:cNvGrpSpPr/>
+        <p:nvPr/>
+      </p:nvGrpSpPr>
+      <p:grpSpPr>
+        <a:xfrm>
+          <a:off x="0" y="0"/>
+          <a:ext cx="0" cy="0"/>
+          <a:chOff x="0" y="0"/>
+          <a:chExt cx="0" cy="0"/>
+        </a:xfrm>
+      </p:grpSpPr>
+      <p:sp>
+        <p:nvSpPr>
+          <p:cNvPr id="2" name="Slide Image Placeholder 1"/>
+          <p:cNvSpPr>
+            <a:spLocks noGrp="1" noRot="1" noChangeAspect="1"/>
+          </p:cNvSpPr>
+          <p:nvPr>
+            <p:ph type="sldImg"/>
+          </p:nvPr>
+        </p:nvSpPr>
+        <p:spPr/>
+      </p:sp>
+      <p:sp>
+        <p:nvSpPr>
+          <p:cNvPr id="3" name="Notes Placeholder 2"/>
+          <p:cNvSpPr>
+            <a:spLocks noGrp="1"/>
+          </p:cNvSpPr>
+          <p:nvPr>
+            <p:ph type="body" idx="1"/>
+          </p:nvPr>
+        </p:nvSpPr>
+        <p:spPr/>
+        <p:txBody>
+          <a:bodyPr/>
+          <a:lstStyle/>
+          <a:p>
+            <a:r>
+              <a:rPr lang="en-US" dirty="0"/>
+              <a:t>These are the references and picture credits used to prepare this lesson.</a:t>
+            </a:r>
+            <a:endParaRPr lang="en-US" dirty="0"/>
+          </a:p>
+        </p:txBody>
+      </p:sp>
+      <p:sp>
+        <p:nvSpPr>
+          <p:cNvPr id="4" name="Slide Number Placeholder 3"/>
+          <p:cNvSpPr>
+            <a:spLocks noGrp="1"/>
+          </p:cNvSpPr>
+          <p:nvPr>
+            <p:ph type="sldNum" sz="quarter" idx="10"/>
+          </p:nvPr>
+        </p:nvSpPr>
+        <p:spPr/>
+        <p:txBody>
+          <a:bodyPr/>
+          <a:lstStyle/>
+          <a:p>
+            <a:fld id="{F7021451-1387-4CA6-816F-3879F97B5CBC}" type="slidenum">
+              <a:rPr lang="en-US"/>
+              <a:t>66</a:t>
             </a:fld>
             <a:endParaRPr lang="en-US"/>
           </a:p>
@@ -16665,8 +16843,49 @@
         </p:nvSpPr>
         <p:spPr>
           <a:xfrm>
-            <a:off x="365760" y="1783080"/>
-            <a:ext cx="6035040" cy="4617720"/>
+            <a:off x="365760" y="1737360"/>
+            <a:ext cx="6035040" cy="457200"/>
+          </a:xfrm>
+          <a:prstGeom prst="rect">
+            <a:avLst/>
+          </a:prstGeom>
+          <a:noFill/>
+          <a:ln/>
+        </p:spPr>
+        <p:txBody>
+          <a:bodyPr wrap="square" lIns="0" tIns="0" rIns="0" bIns="0" rtlCol="0" anchor="ctr">
+            <a:normAutofit/>
+          </a:bodyPr>
+          <a:lstStyle/>
+          <a:p>
+            <a:pPr algn="l" indent="0" marL="0">
+              <a:buNone/>
+            </a:pPr>
+            <a:r>
+              <a:rPr lang="en-US" sz="3000" b="1" dirty="0">
+                <a:solidFill>
+                  <a:srgbClr val="990011"/>
+                </a:solidFill>
+                <a:latin typeface="Times New Roman" pitchFamily="34" charset="0"/>
+                <a:ea typeface="Times New Roman" pitchFamily="34" charset="-122"/>
+                <a:cs typeface="Times New Roman" pitchFamily="34" charset="-120"/>
+              </a:rPr>
+              <a:t>A) The Formula</a:t>
+            </a:r>
+            <a:endParaRPr lang="en-US" sz="3000" dirty="0"/>
+          </a:p>
+        </p:txBody>
+      </p:sp>
+      <p:sp>
+        <p:nvSpPr>
+          <p:cNvPr id="5" name="Text 3"/>
+          <p:cNvSpPr/>
+          <p:nvPr/>
+        </p:nvSpPr>
+        <p:spPr>
+          <a:xfrm>
+            <a:off x="365760" y="2240280"/>
+            <a:ext cx="6035040" cy="4160520"/>
           </a:xfrm>
           <a:prstGeom prst="rect">
             <a:avLst/>
@@ -16685,7 +16904,7 @@
               <a:buNone/>
             </a:pPr>
             <a:r>
-              <a:rPr lang="en-US" sz="3400" i="1" dirty="0">
+              <a:rPr lang="en-US" sz="3200" i="1" dirty="0">
                 <a:solidFill>
                   <a:srgbClr val="111111"/>
                 </a:solidFill>
@@ -16693,9 +16912,9 @@
                 <a:ea typeface="Times New Roman" pitchFamily="34" charset="-122"/>
                 <a:cs typeface="Times New Roman" pitchFamily="34" charset="-120"/>
               </a:rPr>
-              <a:t>Rs is calculated in the following steps:</a:t>
-            </a:r>
-            <a:endParaRPr lang="en-US" sz="3400" dirty="0"/>
+              <a:t>The formula of Spearman is used as follows:</a:t>
+            </a:r>
+            <a:endParaRPr lang="en-US" sz="3200" dirty="0"/>
           </a:p>
           <a:p>
             <a:pPr algn="l" indent="0" marL="0">
@@ -16705,7 +16924,7 @@
               <a:buNone/>
             </a:pPr>
             <a:r>
-              <a:rPr lang="en-US" sz="3400" b="1" dirty="0">
+              <a:rPr lang="en-US" sz="3200" b="1" dirty="0">
                 <a:solidFill>
                   <a:srgbClr val="111111"/>
                 </a:solidFill>
@@ -16722,7 +16941,7 @@
               <a:buNone/>
             </a:pPr>
             <a:r>
-              <a:rPr lang="en-US" sz="3400" dirty="0">
+              <a:rPr lang="en-US" sz="3200" dirty="0">
                 <a:solidFill>
                   <a:srgbClr val="111111"/>
                 </a:solidFill>
@@ -16732,13 +16951,13 @@
               </a:rPr>
               <a:t>Rs = 1 − (6Σd²) ÷ (n³ − n), where d is the difference between the two ranks of each pair and n is the number of pairs. The result always lies between −1 and +1.</a:t>
             </a:r>
-            <a:endParaRPr lang="en-US" sz="3400" dirty="0"/>
+            <a:endParaRPr lang="en-US" sz="3200" dirty="0"/>
           </a:p>
         </p:txBody>
       </p:sp>
       <p:pic>
         <p:nvPicPr>
-          <p:cNvPr id="5" name="Image 0" descr="/home/claude/f4/img/v2/spearman_big.png">    </p:cNvPr>
+          <p:cNvPr id="6" name="Image 0" descr="/home/claude/f4/img/v2/spearman_big.png">    </p:cNvPr>
           <p:cNvPicPr>
             <a:picLocks noChangeAspect="1"/>
           </p:cNvPicPr>
@@ -16762,7 +16981,7 @@
       </p:pic>
       <p:sp>
         <p:nvSpPr>
-          <p:cNvPr id="6" name="Text 3"/>
+          <p:cNvPr id="7" name="Text 4"/>
           <p:cNvSpPr/>
           <p:nvPr/>
         </p:nvSpPr>
@@ -16928,7 +17147,7 @@
         <p:spPr>
           <a:xfrm>
             <a:off x="0" y="658368"/>
-            <a:ext cx="5120640" cy="5833872"/>
+            <a:ext cx="3840480" cy="5833872"/>
           </a:xfrm>
           <a:prstGeom prst="rect">
             <a:avLst/>
@@ -16943,8 +17162,8 @@
         </p:nvSpPr>
         <p:spPr>
           <a:xfrm>
-            <a:off x="5349240" y="1005840"/>
-            <a:ext cx="6522415" cy="731520"/>
+            <a:off x="4069080" y="1005840"/>
+            <a:ext cx="7802575" cy="731520"/>
           </a:xfrm>
           <a:prstGeom prst="rect">
             <a:avLst/>
@@ -16984,8 +17203,47 @@
         </p:nvSpPr>
         <p:spPr>
           <a:xfrm>
-            <a:off x="5349240" y="1783080"/>
-            <a:ext cx="6522415" cy="4663440"/>
+            <a:off x="4069080" y="1737360"/>
+            <a:ext cx="7802575" cy="457200"/>
+          </a:xfrm>
+          <a:prstGeom prst="rect">
+            <a:avLst/>
+          </a:prstGeom>
+          <a:noFill/>
+          <a:ln/>
+        </p:spPr>
+        <p:txBody>
+          <a:bodyPr wrap="square" lIns="0" tIns="0" rIns="0" bIns="0" rtlCol="0" anchor="ctr"/>
+          <a:lstStyle/>
+          <a:p>
+            <a:pPr algn="l" indent="0" marL="0">
+              <a:buNone/>
+            </a:pPr>
+            <a:r>
+              <a:rPr lang="en-US" sz="3200" b="1" dirty="0">
+                <a:solidFill>
+                  <a:srgbClr val="990011"/>
+                </a:solidFill>
+                <a:latin typeface="Times New Roman" pitchFamily="34" charset="0"/>
+                <a:ea typeface="Times New Roman" pitchFamily="34" charset="-122"/>
+                <a:cs typeface="Times New Roman" pitchFamily="34" charset="-120"/>
+              </a:rPr>
+              <a:t>A) The Formula</a:t>
+            </a:r>
+            <a:endParaRPr lang="en-US" sz="3200" dirty="0"/>
+          </a:p>
+        </p:txBody>
+      </p:sp>
+      <p:sp>
+        <p:nvSpPr>
+          <p:cNvPr id="6" name="Text 3"/>
+          <p:cNvSpPr/>
+          <p:nvPr/>
+        </p:nvSpPr>
+        <p:spPr>
+          <a:xfrm>
+            <a:off x="4069080" y="2240280"/>
+            <a:ext cx="7802575" cy="4206240"/>
           </a:xfrm>
           <a:prstGeom prst="rect">
             <a:avLst/>
@@ -17012,7 +17270,7 @@
                 <a:ea typeface="Times New Roman" pitchFamily="34" charset="-122"/>
                 <a:cs typeface="Times New Roman" pitchFamily="34" charset="-120"/>
               </a:rPr>
-              <a:t>Stating the hypothesis and ranking: </a:t>
+              <a:t>Tied ranks: </a:t>
             </a:r>
             <a:pPr algn="l" indent="0" marL="0">
               <a:spcAft>
@@ -17029,7 +17287,7 @@
                 <a:ea typeface="Times New Roman" pitchFamily="34" charset="-122"/>
                 <a:cs typeface="Times New Roman" pitchFamily="34" charset="-120"/>
               </a:rPr>
-              <a:t>First state the null hypothesis (H0) and count the pairs (n). Then rank each variable separately, giving rank 1 to the highest value.</a:t>
+              <a:t>When two values are equal, they share the average of the ranks they occupy. For example, two soil depths of 60 cm occupying ranks 1 and 2 each get rank 1.5.</a:t>
             </a:r>
             <a:endParaRPr lang="en-US" sz="4000" dirty="0"/>
           </a:p>
@@ -17164,7 +17422,7 @@
         <p:spPr>
           <a:xfrm>
             <a:off x="0" y="658368"/>
-            <a:ext cx="5120640" cy="5833872"/>
+            <a:ext cx="2468880" cy="5833872"/>
           </a:xfrm>
           <a:prstGeom prst="rect">
             <a:avLst/>
@@ -17179,8 +17437,8 @@
         </p:nvSpPr>
         <p:spPr>
           <a:xfrm>
-            <a:off x="5349240" y="1005840"/>
-            <a:ext cx="6522415" cy="731520"/>
+            <a:off x="2697480" y="1005840"/>
+            <a:ext cx="9174175" cy="731520"/>
           </a:xfrm>
           <a:prstGeom prst="rect">
             <a:avLst/>
@@ -17220,8 +17478,47 @@
         </p:nvSpPr>
         <p:spPr>
           <a:xfrm>
-            <a:off x="5349240" y="1783080"/>
-            <a:ext cx="6522415" cy="4663440"/>
+            <a:off x="2697480" y="1737360"/>
+            <a:ext cx="9174175" cy="457200"/>
+          </a:xfrm>
+          <a:prstGeom prst="rect">
+            <a:avLst/>
+          </a:prstGeom>
+          <a:noFill/>
+          <a:ln/>
+        </p:spPr>
+        <p:txBody>
+          <a:bodyPr wrap="square" lIns="0" tIns="0" rIns="0" bIns="0" rtlCol="0" anchor="ctr"/>
+          <a:lstStyle/>
+          <a:p>
+            <a:pPr algn="l" indent="0" marL="0">
+              <a:buNone/>
+            </a:pPr>
+            <a:r>
+              <a:rPr lang="en-US" sz="3200" b="1" dirty="0">
+                <a:solidFill>
+                  <a:srgbClr val="990011"/>
+                </a:solidFill>
+                <a:latin typeface="Times New Roman" pitchFamily="34" charset="0"/>
+                <a:ea typeface="Times New Roman" pitchFamily="34" charset="-122"/>
+                <a:cs typeface="Times New Roman" pitchFamily="34" charset="-120"/>
+              </a:rPr>
+              <a:t>B) The Steps</a:t>
+            </a:r>
+            <a:endParaRPr lang="en-US" sz="3200" dirty="0"/>
+          </a:p>
+        </p:txBody>
+      </p:sp>
+      <p:sp>
+        <p:nvSpPr>
+          <p:cNvPr id="6" name="Text 3"/>
+          <p:cNvSpPr/>
+          <p:nvPr/>
+        </p:nvSpPr>
+        <p:spPr>
+          <a:xfrm>
+            <a:off x="2697480" y="2240280"/>
+            <a:ext cx="9174175" cy="4206240"/>
           </a:xfrm>
           <a:prstGeom prst="rect">
             <a:avLst/>
@@ -17240,7 +17537,7 @@
               <a:buNone/>
             </a:pPr>
             <a:r>
-              <a:rPr lang="en-US" sz="4000" b="1" dirty="0">
+              <a:rPr lang="en-US" sz="4000" i="1" dirty="0">
                 <a:solidFill>
                   <a:srgbClr val="111111"/>
                 </a:solidFill>
@@ -17248,8 +17545,11 @@
                 <a:ea typeface="Times New Roman" pitchFamily="34" charset="-122"/>
                 <a:cs typeface="Times New Roman" pitchFamily="34" charset="-120"/>
               </a:rPr>
-              <a:t>Calculating: </a:t>
-            </a:r>
+              <a:t>Rs is calculated in the following steps:</a:t>
+            </a:r>
+            <a:endParaRPr lang="en-US" sz="4000" dirty="0"/>
+          </a:p>
+          <a:p>
             <a:pPr algn="l" indent="0" marL="0">
               <a:spcAft>
                 <a:spcPts val="800"/>
@@ -17257,7 +17557,7 @@
               <a:buNone/>
             </a:pPr>
             <a:r>
-              <a:rPr lang="en-US" sz="4000" dirty="0">
+              <a:rPr lang="en-US" sz="4000" b="1" dirty="0">
                 <a:solidFill>
                   <a:srgbClr val="111111"/>
                 </a:solidFill>
@@ -17265,7 +17565,24 @@
                 <a:ea typeface="Times New Roman" pitchFamily="34" charset="-122"/>
                 <a:cs typeface="Times New Roman" pitchFamily="34" charset="-120"/>
               </a:rPr>
-              <a:t>For each pair, calculate d, then d², and add them to find Σd². Substitute Σd² and n into the formula and interpret the result.</a:t>
+              <a:t>Step 1, the hypothesis: </a:t>
+            </a:r>
+            <a:pPr algn="l" indent="0" marL="0">
+              <a:spcAft>
+                <a:spcPts val="800"/>
+              </a:spcAft>
+              <a:buNone/>
+            </a:pPr>
+            <a:r>
+              <a:rPr lang="en-US" sz="4000" dirty="0">
+                <a:solidFill>
+                  <a:srgbClr val="111111"/>
+                </a:solidFill>
+                <a:latin typeface="Times New Roman" pitchFamily="34" charset="0"/>
+                <a:ea typeface="Times New Roman" pitchFamily="34" charset="-122"/>
+                <a:cs typeface="Times New Roman" pitchFamily="34" charset="-120"/>
+              </a:rPr>
+              <a:t>State the null hypothesis (H0), which says that there is no relationship between the two variables. Then count the number of pairs (n).</a:t>
             </a:r>
             <a:endParaRPr lang="en-US" sz="4000" dirty="0"/>
           </a:p>
@@ -17456,8 +17773,47 @@
         </p:nvSpPr>
         <p:spPr>
           <a:xfrm>
-            <a:off x="5349240" y="1783080"/>
-            <a:ext cx="6522415" cy="4663440"/>
+            <a:off x="5349240" y="1737360"/>
+            <a:ext cx="6522415" cy="457200"/>
+          </a:xfrm>
+          <a:prstGeom prst="rect">
+            <a:avLst/>
+          </a:prstGeom>
+          <a:noFill/>
+          <a:ln/>
+        </p:spPr>
+        <p:txBody>
+          <a:bodyPr wrap="square" lIns="0" tIns="0" rIns="0" bIns="0" rtlCol="0" anchor="ctr"/>
+          <a:lstStyle/>
+          <a:p>
+            <a:pPr algn="l" indent="0" marL="0">
+              <a:buNone/>
+            </a:pPr>
+            <a:r>
+              <a:rPr lang="en-US" sz="3200" b="1" dirty="0">
+                <a:solidFill>
+                  <a:srgbClr val="990011"/>
+                </a:solidFill>
+                <a:latin typeface="Times New Roman" pitchFamily="34" charset="0"/>
+                <a:ea typeface="Times New Roman" pitchFamily="34" charset="-122"/>
+                <a:cs typeface="Times New Roman" pitchFamily="34" charset="-120"/>
+              </a:rPr>
+              <a:t>B) The Steps</a:t>
+            </a:r>
+            <a:endParaRPr lang="en-US" sz="3200" dirty="0"/>
+          </a:p>
+        </p:txBody>
+      </p:sp>
+      <p:sp>
+        <p:nvSpPr>
+          <p:cNvPr id="6" name="Text 3"/>
+          <p:cNvSpPr/>
+          <p:nvPr/>
+        </p:nvSpPr>
+        <p:spPr>
+          <a:xfrm>
+            <a:off x="5349240" y="2240280"/>
+            <a:ext cx="6522415" cy="4206240"/>
           </a:xfrm>
           <a:prstGeom prst="rect">
             <a:avLst/>
@@ -17484,7 +17840,7 @@
                 <a:ea typeface="Times New Roman" pitchFamily="34" charset="-122"/>
                 <a:cs typeface="Times New Roman" pitchFamily="34" charset="-120"/>
               </a:rPr>
-              <a:t>Tied ranks: </a:t>
+              <a:t>Step 2, the ranks: </a:t>
             </a:r>
             <a:pPr algn="l" indent="0" marL="0">
               <a:spcAft>
@@ -17501,7 +17857,7 @@
                 <a:ea typeface="Times New Roman" pitchFamily="34" charset="-122"/>
                 <a:cs typeface="Times New Roman" pitchFamily="34" charset="-120"/>
               </a:rPr>
-              <a:t>When two values are equal, they share the average of the ranks they occupy. For example, two soil depths of 60 cm occupying ranks 1 and 2 each get rank 1.5.</a:t>
+              <a:t>Rank each variable separately, giving rank 1 to the highest value. Write the two ranks of each pair side by side in a table.</a:t>
             </a:r>
             <a:endParaRPr lang="en-US" sz="4000" dirty="0"/>
           </a:p>
@@ -17619,129 +17975,9 @@
           </a:p>
         </p:txBody>
       </p:sp>
-      <p:sp>
-        <p:nvSpPr>
-          <p:cNvPr id="3" name="Text 1"/>
-          <p:cNvSpPr/>
-          <p:nvPr/>
-        </p:nvSpPr>
-        <p:spPr>
-          <a:xfrm>
-            <a:off x="365760" y="1005840"/>
-            <a:ext cx="11460175" cy="731520"/>
-          </a:xfrm>
-          <a:prstGeom prst="rect">
-            <a:avLst/>
-          </a:prstGeom>
-          <a:noFill/>
-          <a:ln/>
-        </p:spPr>
-        <p:txBody>
-          <a:bodyPr wrap="square" lIns="0" tIns="0" rIns="0" bIns="0" rtlCol="0" anchor="ctr">
-            <a:normAutofit/>
-          </a:bodyPr>
-          <a:lstStyle/>
-          <a:p>
-            <a:pPr algn="ctr" indent="0" marL="0">
-              <a:buNone/>
-            </a:pPr>
-            <a:r>
-              <a:rPr lang="en-US" sz="3600" b="1" dirty="0">
-                <a:solidFill>
-                  <a:srgbClr val="990011"/>
-                </a:solidFill>
-                <a:latin typeface="Times New Roman" pitchFamily="34" charset="0"/>
-                <a:ea typeface="Times New Roman" pitchFamily="34" charset="-122"/>
-                <a:cs typeface="Times New Roman" pitchFamily="34" charset="-120"/>
-              </a:rPr>
-              <a:t>3. Worked Example: Slope Angle and Soil Depth</a:t>
-            </a:r>
-            <a:endParaRPr lang="en-US" sz="3600" dirty="0"/>
-          </a:p>
-        </p:txBody>
-      </p:sp>
-      <p:sp>
-        <p:nvSpPr>
-          <p:cNvPr id="4" name="Text 2"/>
-          <p:cNvSpPr/>
-          <p:nvPr/>
-        </p:nvSpPr>
-        <p:spPr>
-          <a:xfrm>
-            <a:off x="365760" y="1783080"/>
-            <a:ext cx="6035040" cy="4617720"/>
-          </a:xfrm>
-          <a:prstGeom prst="rect">
-            <a:avLst/>
-          </a:prstGeom>
-          <a:noFill/>
-          <a:ln/>
-        </p:spPr>
-        <p:txBody>
-          <a:bodyPr wrap="square" lIns="0" tIns="0" rIns="0" bIns="0" rtlCol="0" anchor="t"/>
-          <a:lstStyle/>
-          <a:p>
-            <a:pPr algn="l" indent="0" marL="0">
-              <a:spcAft>
-                <a:spcPts val="800"/>
-              </a:spcAft>
-              <a:buNone/>
-            </a:pPr>
-            <a:r>
-              <a:rPr lang="en-US" sz="3200" i="1" dirty="0">
-                <a:solidFill>
-                  <a:srgbClr val="111111"/>
-                </a:solidFill>
-                <a:latin typeface="Times New Roman" pitchFamily="34" charset="0"/>
-                <a:ea typeface="Times New Roman" pitchFamily="34" charset="-122"/>
-                <a:cs typeface="Times New Roman" pitchFamily="34" charset="-120"/>
-              </a:rPr>
-              <a:t>The worked example is solved as follows:</a:t>
-            </a:r>
-            <a:endParaRPr lang="en-US" sz="3200" dirty="0"/>
-          </a:p>
-          <a:p>
-            <a:pPr algn="l" indent="0" marL="0">
-              <a:spcAft>
-                <a:spcPts val="800"/>
-              </a:spcAft>
-              <a:buNone/>
-            </a:pPr>
-            <a:r>
-              <a:rPr lang="en-US" sz="3200" b="1" dirty="0">
-                <a:solidFill>
-                  <a:srgbClr val="111111"/>
-                </a:solidFill>
-                <a:latin typeface="Times New Roman" pitchFamily="34" charset="0"/>
-                <a:ea typeface="Times New Roman" pitchFamily="34" charset="-122"/>
-                <a:cs typeface="Times New Roman" pitchFamily="34" charset="-120"/>
-              </a:rPr>
-              <a:t>Hypothesis and data: </a:t>
-            </a:r>
-            <a:pPr algn="l" indent="0" marL="0">
-              <a:spcAft>
-                <a:spcPts val="800"/>
-              </a:spcAft>
-              <a:buNone/>
-            </a:pPr>
-            <a:r>
-              <a:rPr lang="en-US" sz="3200" dirty="0">
-                <a:solidFill>
-                  <a:srgbClr val="111111"/>
-                </a:solidFill>
-                <a:latin typeface="Times New Roman" pitchFamily="34" charset="0"/>
-                <a:ea typeface="Times New Roman" pitchFamily="34" charset="-122"/>
-                <a:cs typeface="Times New Roman" pitchFamily="34" charset="-120"/>
-              </a:rPr>
-              <a:t>H0: there is no significant relationship between slope angle and soil depth. Slope angle and soil depth are measured at 10 points on a hill, and each variable is ranked.</a:t>
-            </a:r>
-            <a:endParaRPr lang="en-US" sz="3200" dirty="0"/>
-          </a:p>
-        </p:txBody>
-      </p:sp>
       <p:pic>
         <p:nvPicPr>
-          <p:cNvPr id="5" name="Image 0" descr="/home/claude/f4/img/v2/stat2_spearman.png">    </p:cNvPr>
+          <p:cNvPr id="3" name="Image 0" descr="/home/claude/f4/img/minesec_sheet.png">    </p:cNvPr>
           <p:cNvPicPr>
             <a:picLocks noChangeAspect="1"/>
           </p:cNvPicPr>
@@ -17755,8 +17991,8 @@
         </p:blipFill>
         <p:spPr>
           <a:xfrm>
-            <a:off x="6537960" y="2849678"/>
-            <a:ext cx="5470855" cy="2137053"/>
+            <a:off x="0" y="658368"/>
+            <a:ext cx="5120640" cy="5833872"/>
           </a:xfrm>
           <a:prstGeom prst="rect">
             <a:avLst/>
@@ -17765,14 +18001,14 @@
       </p:pic>
       <p:sp>
         <p:nvSpPr>
-          <p:cNvPr id="6" name="Text 3"/>
+          <p:cNvPr id="4" name="Text 1"/>
           <p:cNvSpPr/>
           <p:nvPr/>
         </p:nvSpPr>
         <p:spPr>
           <a:xfrm>
-            <a:off x="6537960" y="6089904"/>
-            <a:ext cx="5470855" cy="347472"/>
+            <a:off x="5349240" y="1005840"/>
+            <a:ext cx="6522415" cy="731520"/>
           </a:xfrm>
           <a:prstGeom prst="rect">
             <a:avLst/>
@@ -17781,24 +18017,124 @@
           <a:ln/>
         </p:spPr>
         <p:txBody>
-          <a:bodyPr wrap="square" lIns="0" tIns="0" rIns="0" bIns="0" rtlCol="0" anchor="ctr"/>
+          <a:bodyPr wrap="square" lIns="0" tIns="0" rIns="0" bIns="0" rtlCol="0" anchor="ctr">
+            <a:normAutofit/>
+          </a:bodyPr>
           <a:lstStyle/>
           <a:p>
             <a:pPr algn="ctr" indent="0" marL="0">
               <a:buNone/>
             </a:pPr>
             <a:r>
-              <a:rPr lang="en-US" sz="1600" i="1" dirty="0">
-                <a:solidFill>
-                  <a:srgbClr val="555555"/>
+              <a:rPr lang="en-US" sz="3600" b="1" dirty="0">
+                <a:solidFill>
+                  <a:srgbClr val="990011"/>
                 </a:solidFill>
                 <a:latin typeface="Times New Roman" pitchFamily="34" charset="0"/>
                 <a:ea typeface="Times New Roman" pitchFamily="34" charset="-122"/>
                 <a:cs typeface="Times New Roman" pitchFamily="34" charset="-120"/>
               </a:rPr>
-              <a:t>Illustration: the calculation table</a:t>
-            </a:r>
-            <a:endParaRPr lang="en-US" sz="1600" dirty="0"/>
+              <a:t>2. Formula and Steps of Calculation</a:t>
+            </a:r>
+            <a:endParaRPr lang="en-US" sz="3600" dirty="0"/>
+          </a:p>
+        </p:txBody>
+      </p:sp>
+      <p:sp>
+        <p:nvSpPr>
+          <p:cNvPr id="5" name="Text 2"/>
+          <p:cNvSpPr/>
+          <p:nvPr/>
+        </p:nvSpPr>
+        <p:spPr>
+          <a:xfrm>
+            <a:off x="5349240" y="1737360"/>
+            <a:ext cx="6522415" cy="457200"/>
+          </a:xfrm>
+          <a:prstGeom prst="rect">
+            <a:avLst/>
+          </a:prstGeom>
+          <a:noFill/>
+          <a:ln/>
+        </p:spPr>
+        <p:txBody>
+          <a:bodyPr wrap="square" lIns="0" tIns="0" rIns="0" bIns="0" rtlCol="0" anchor="ctr"/>
+          <a:lstStyle/>
+          <a:p>
+            <a:pPr algn="l" indent="0" marL="0">
+              <a:buNone/>
+            </a:pPr>
+            <a:r>
+              <a:rPr lang="en-US" sz="3200" b="1" dirty="0">
+                <a:solidFill>
+                  <a:srgbClr val="990011"/>
+                </a:solidFill>
+                <a:latin typeface="Times New Roman" pitchFamily="34" charset="0"/>
+                <a:ea typeface="Times New Roman" pitchFamily="34" charset="-122"/>
+                <a:cs typeface="Times New Roman" pitchFamily="34" charset="-120"/>
+              </a:rPr>
+              <a:t>B) The Steps</a:t>
+            </a:r>
+            <a:endParaRPr lang="en-US" sz="3200" dirty="0"/>
+          </a:p>
+        </p:txBody>
+      </p:sp>
+      <p:sp>
+        <p:nvSpPr>
+          <p:cNvPr id="6" name="Text 3"/>
+          <p:cNvSpPr/>
+          <p:nvPr/>
+        </p:nvSpPr>
+        <p:spPr>
+          <a:xfrm>
+            <a:off x="5349240" y="2240280"/>
+            <a:ext cx="6522415" cy="4206240"/>
+          </a:xfrm>
+          <a:prstGeom prst="rect">
+            <a:avLst/>
+          </a:prstGeom>
+          <a:noFill/>
+          <a:ln/>
+        </p:spPr>
+        <p:txBody>
+          <a:bodyPr wrap="square" lIns="0" tIns="0" rIns="0" bIns="0" rtlCol="0" anchor="t"/>
+          <a:lstStyle/>
+          <a:p>
+            <a:pPr algn="l" indent="0" marL="0">
+              <a:spcAft>
+                <a:spcPts val="800"/>
+              </a:spcAft>
+              <a:buNone/>
+            </a:pPr>
+            <a:r>
+              <a:rPr lang="en-US" sz="4000" b="1" dirty="0">
+                <a:solidFill>
+                  <a:srgbClr val="111111"/>
+                </a:solidFill>
+                <a:latin typeface="Times New Roman" pitchFamily="34" charset="0"/>
+                <a:ea typeface="Times New Roman" pitchFamily="34" charset="-122"/>
+                <a:cs typeface="Times New Roman" pitchFamily="34" charset="-120"/>
+              </a:rPr>
+              <a:t>Step 3, the differences: </a:t>
+            </a:r>
+            <a:pPr algn="l" indent="0" marL="0">
+              <a:spcAft>
+                <a:spcPts val="800"/>
+              </a:spcAft>
+              <a:buNone/>
+            </a:pPr>
+            <a:r>
+              <a:rPr lang="en-US" sz="4000" dirty="0">
+                <a:solidFill>
+                  <a:srgbClr val="111111"/>
+                </a:solidFill>
+                <a:latin typeface="Times New Roman" pitchFamily="34" charset="0"/>
+                <a:ea typeface="Times New Roman" pitchFamily="34" charset="-122"/>
+                <a:cs typeface="Times New Roman" pitchFamily="34" charset="-120"/>
+              </a:rPr>
+              <a:t>For each pair, calculate the difference d between the two ranks and square it. Add all the squares to find Σd².</a:t>
+            </a:r>
+            <a:endParaRPr lang="en-US" sz="4000" dirty="0"/>
           </a:p>
         </p:txBody>
       </p:sp>
@@ -17973,7 +18309,7 @@
                 <a:ea typeface="Times New Roman" pitchFamily="34" charset="-122"/>
                 <a:cs typeface="Times New Roman" pitchFamily="34" charset="-120"/>
               </a:rPr>
-              <a:t>3. Worked Example: Slope Angle and Soil Depth</a:t>
+              <a:t>2. Formula and Steps of Calculation</a:t>
             </a:r>
             <a:endParaRPr lang="en-US" sz="3600" dirty="0"/>
           </a:p>
@@ -17987,8 +18323,47 @@
         </p:nvSpPr>
         <p:spPr>
           <a:xfrm>
-            <a:off x="5349240" y="1783080"/>
-            <a:ext cx="6522415" cy="4663440"/>
+            <a:off x="5349240" y="1737360"/>
+            <a:ext cx="6522415" cy="457200"/>
+          </a:xfrm>
+          <a:prstGeom prst="rect">
+            <a:avLst/>
+          </a:prstGeom>
+          <a:noFill/>
+          <a:ln/>
+        </p:spPr>
+        <p:txBody>
+          <a:bodyPr wrap="square" lIns="0" tIns="0" rIns="0" bIns="0" rtlCol="0" anchor="ctr"/>
+          <a:lstStyle/>
+          <a:p>
+            <a:pPr algn="l" indent="0" marL="0">
+              <a:buNone/>
+            </a:pPr>
+            <a:r>
+              <a:rPr lang="en-US" sz="3200" b="1" dirty="0">
+                <a:solidFill>
+                  <a:srgbClr val="990011"/>
+                </a:solidFill>
+                <a:latin typeface="Times New Roman" pitchFamily="34" charset="0"/>
+                <a:ea typeface="Times New Roman" pitchFamily="34" charset="-122"/>
+                <a:cs typeface="Times New Roman" pitchFamily="34" charset="-120"/>
+              </a:rPr>
+              <a:t>B) The Steps</a:t>
+            </a:r>
+            <a:endParaRPr lang="en-US" sz="3200" dirty="0"/>
+          </a:p>
+        </p:txBody>
+      </p:sp>
+      <p:sp>
+        <p:nvSpPr>
+          <p:cNvPr id="6" name="Text 3"/>
+          <p:cNvSpPr/>
+          <p:nvPr/>
+        </p:nvSpPr>
+        <p:spPr>
+          <a:xfrm>
+            <a:off x="5349240" y="2240280"/>
+            <a:ext cx="6522415" cy="4206240"/>
           </a:xfrm>
           <a:prstGeom prst="rect">
             <a:avLst/>
@@ -18015,7 +18390,7 @@
                 <a:ea typeface="Times New Roman" pitchFamily="34" charset="-122"/>
                 <a:cs typeface="Times New Roman" pitchFamily="34" charset="-120"/>
               </a:rPr>
-              <a:t>Calculation: </a:t>
+              <a:t>Step 4, the result: </a:t>
             </a:r>
             <a:pPr algn="l" indent="0" marL="0">
               <a:spcAft>
@@ -18032,7 +18407,7 @@
                 <a:ea typeface="Times New Roman" pitchFamily="34" charset="-122"/>
                 <a:cs typeface="Times New Roman" pitchFamily="34" charset="-120"/>
               </a:rPr>
-              <a:t>The table gives Σd² = 48 and n = 10. Rs = 1 − (6 × 48) ÷ (1,000 − 10) = 1 − 288 ÷ 990 ≈ +0.71.</a:t>
+              <a:t>Substitute Σd² and n into the formula to find Rs. Then interpret its sign and its value.</a:t>
             </a:r>
             <a:endParaRPr lang="en-US" sz="4000" dirty="0"/>
           </a:p>
@@ -18150,9 +18525,129 @@
           </a:p>
         </p:txBody>
       </p:sp>
+      <p:sp>
+        <p:nvSpPr>
+          <p:cNvPr id="3" name="Text 1"/>
+          <p:cNvSpPr/>
+          <p:nvPr/>
+        </p:nvSpPr>
+        <p:spPr>
+          <a:xfrm>
+            <a:off x="365760" y="1005840"/>
+            <a:ext cx="11460175" cy="731520"/>
+          </a:xfrm>
+          <a:prstGeom prst="rect">
+            <a:avLst/>
+          </a:prstGeom>
+          <a:noFill/>
+          <a:ln/>
+        </p:spPr>
+        <p:txBody>
+          <a:bodyPr wrap="square" lIns="0" tIns="0" rIns="0" bIns="0" rtlCol="0" anchor="ctr">
+            <a:normAutofit/>
+          </a:bodyPr>
+          <a:lstStyle/>
+          <a:p>
+            <a:pPr algn="ctr" indent="0" marL="0">
+              <a:buNone/>
+            </a:pPr>
+            <a:r>
+              <a:rPr lang="en-US" sz="3600" b="1" dirty="0">
+                <a:solidFill>
+                  <a:srgbClr val="990011"/>
+                </a:solidFill>
+                <a:latin typeface="Times New Roman" pitchFamily="34" charset="0"/>
+                <a:ea typeface="Times New Roman" pitchFamily="34" charset="-122"/>
+                <a:cs typeface="Times New Roman" pitchFamily="34" charset="-120"/>
+              </a:rPr>
+              <a:t>3. Worked Example: Slope Angle and Soil Depth</a:t>
+            </a:r>
+            <a:endParaRPr lang="en-US" sz="3600" dirty="0"/>
+          </a:p>
+        </p:txBody>
+      </p:sp>
+      <p:sp>
+        <p:nvSpPr>
+          <p:cNvPr id="4" name="Text 2"/>
+          <p:cNvSpPr/>
+          <p:nvPr/>
+        </p:nvSpPr>
+        <p:spPr>
+          <a:xfrm>
+            <a:off x="365760" y="1783080"/>
+            <a:ext cx="6035040" cy="4617720"/>
+          </a:xfrm>
+          <a:prstGeom prst="rect">
+            <a:avLst/>
+          </a:prstGeom>
+          <a:noFill/>
+          <a:ln/>
+        </p:spPr>
+        <p:txBody>
+          <a:bodyPr wrap="square" lIns="0" tIns="0" rIns="0" bIns="0" rtlCol="0" anchor="t"/>
+          <a:lstStyle/>
+          <a:p>
+            <a:pPr algn="l" indent="0" marL="0">
+              <a:spcAft>
+                <a:spcPts val="800"/>
+              </a:spcAft>
+              <a:buNone/>
+            </a:pPr>
+            <a:r>
+              <a:rPr lang="en-US" sz="3200" i="1" dirty="0">
+                <a:solidFill>
+                  <a:srgbClr val="111111"/>
+                </a:solidFill>
+                <a:latin typeface="Times New Roman" pitchFamily="34" charset="0"/>
+                <a:ea typeface="Times New Roman" pitchFamily="34" charset="-122"/>
+                <a:cs typeface="Times New Roman" pitchFamily="34" charset="-120"/>
+              </a:rPr>
+              <a:t>The worked example is solved as follows:</a:t>
+            </a:r>
+            <a:endParaRPr lang="en-US" sz="3200" dirty="0"/>
+          </a:p>
+          <a:p>
+            <a:pPr algn="l" indent="0" marL="0">
+              <a:spcAft>
+                <a:spcPts val="800"/>
+              </a:spcAft>
+              <a:buNone/>
+            </a:pPr>
+            <a:r>
+              <a:rPr lang="en-US" sz="3200" b="1" dirty="0">
+                <a:solidFill>
+                  <a:srgbClr val="111111"/>
+                </a:solidFill>
+                <a:latin typeface="Times New Roman" pitchFamily="34" charset="0"/>
+                <a:ea typeface="Times New Roman" pitchFamily="34" charset="-122"/>
+                <a:cs typeface="Times New Roman" pitchFamily="34" charset="-120"/>
+              </a:rPr>
+              <a:t>Hypothesis and data: </a:t>
+            </a:r>
+            <a:pPr algn="l" indent="0" marL="0">
+              <a:spcAft>
+                <a:spcPts val="800"/>
+              </a:spcAft>
+              <a:buNone/>
+            </a:pPr>
+            <a:r>
+              <a:rPr lang="en-US" sz="3200" dirty="0">
+                <a:solidFill>
+                  <a:srgbClr val="111111"/>
+                </a:solidFill>
+                <a:latin typeface="Times New Roman" pitchFamily="34" charset="0"/>
+                <a:ea typeface="Times New Roman" pitchFamily="34" charset="-122"/>
+                <a:cs typeface="Times New Roman" pitchFamily="34" charset="-120"/>
+              </a:rPr>
+              <a:t>H0: there is no significant relationship between slope angle and soil depth. Slope angle and soil depth are measured at 10 points on a hill, and each variable is ranked.</a:t>
+            </a:r>
+            <a:endParaRPr lang="en-US" sz="3200" dirty="0"/>
+          </a:p>
+        </p:txBody>
+      </p:sp>
       <p:pic>
         <p:nvPicPr>
-          <p:cNvPr id="3" name="Image 0" descr="/home/claude/f4/img/minesec_sheet.png">    </p:cNvPr>
+          <p:cNvPr id="5" name="Image 0" descr="/home/claude/f4/img/v2/stat2_spearman.png">    </p:cNvPr>
           <p:cNvPicPr>
             <a:picLocks noChangeAspect="1"/>
           </p:cNvPicPr>
@@ -18166,8 +18661,8 @@
         </p:blipFill>
         <p:spPr>
           <a:xfrm>
-            <a:off x="0" y="658368"/>
-            <a:ext cx="3840480" cy="5833872"/>
+            <a:off x="6537960" y="2849678"/>
+            <a:ext cx="5470855" cy="2137053"/>
           </a:xfrm>
           <a:prstGeom prst="rect">
             <a:avLst/>
@@ -18176,14 +18671,14 @@
       </p:pic>
       <p:sp>
         <p:nvSpPr>
-          <p:cNvPr id="4" name="Text 1"/>
+          <p:cNvPr id="6" name="Text 3"/>
           <p:cNvSpPr/>
           <p:nvPr/>
         </p:nvSpPr>
         <p:spPr>
           <a:xfrm>
-            <a:off x="4069080" y="1005840"/>
-            <a:ext cx="7802575" cy="731520"/>
+            <a:off x="6537960" y="6089904"/>
+            <a:ext cx="5470855" cy="347472"/>
           </a:xfrm>
           <a:prstGeom prst="rect">
             <a:avLst/>
@@ -18192,85 +18687,24 @@
           <a:ln/>
         </p:spPr>
         <p:txBody>
-          <a:bodyPr wrap="square" lIns="0" tIns="0" rIns="0" bIns="0" rtlCol="0" anchor="ctr">
-            <a:normAutofit/>
-          </a:bodyPr>
+          <a:bodyPr wrap="square" lIns="0" tIns="0" rIns="0" bIns="0" rtlCol="0" anchor="ctr"/>
           <a:lstStyle/>
           <a:p>
             <a:pPr algn="ctr" indent="0" marL="0">
               <a:buNone/>
             </a:pPr>
             <a:r>
-              <a:rPr lang="en-US" sz="3600" b="1" dirty="0">
-                <a:solidFill>
-                  <a:srgbClr val="990011"/>
+              <a:rPr lang="en-US" sz="1600" i="1" dirty="0">
+                <a:solidFill>
+                  <a:srgbClr val="555555"/>
                 </a:solidFill>
                 <a:latin typeface="Times New Roman" pitchFamily="34" charset="0"/>
                 <a:ea typeface="Times New Roman" pitchFamily="34" charset="-122"/>
                 <a:cs typeface="Times New Roman" pitchFamily="34" charset="-120"/>
               </a:rPr>
-              <a:t>3. Worked Example: Slope Angle and Soil Depth</a:t>
-            </a:r>
-            <a:endParaRPr lang="en-US" sz="3600" dirty="0"/>
-          </a:p>
-        </p:txBody>
-      </p:sp>
-      <p:sp>
-        <p:nvSpPr>
-          <p:cNvPr id="5" name="Text 2"/>
-          <p:cNvSpPr/>
-          <p:nvPr/>
-        </p:nvSpPr>
-        <p:spPr>
-          <a:xfrm>
-            <a:off x="4069080" y="1783080"/>
-            <a:ext cx="7802575" cy="4663440"/>
-          </a:xfrm>
-          <a:prstGeom prst="rect">
-            <a:avLst/>
-          </a:prstGeom>
-          <a:noFill/>
-          <a:ln/>
-        </p:spPr>
-        <p:txBody>
-          <a:bodyPr wrap="square" lIns="0" tIns="0" rIns="0" bIns="0" rtlCol="0" anchor="t"/>
-          <a:lstStyle/>
-          <a:p>
-            <a:pPr algn="l" indent="0" marL="0">
-              <a:spcAft>
-                <a:spcPts val="800"/>
-              </a:spcAft>
-              <a:buNone/>
-            </a:pPr>
-            <a:r>
-              <a:rPr lang="en-US" sz="4000" b="1" dirty="0">
-                <a:solidFill>
-                  <a:srgbClr val="111111"/>
-                </a:solidFill>
-                <a:latin typeface="Times New Roman" pitchFamily="34" charset="0"/>
-                <a:ea typeface="Times New Roman" pitchFamily="34" charset="-122"/>
-                <a:cs typeface="Times New Roman" pitchFamily="34" charset="-120"/>
-              </a:rPr>
-              <a:t>Interpretation: </a:t>
-            </a:r>
-            <a:pPr algn="l" indent="0" marL="0">
-              <a:spcAft>
-                <a:spcPts val="800"/>
-              </a:spcAft>
-              <a:buNone/>
-            </a:pPr>
-            <a:r>
-              <a:rPr lang="en-US" sz="4000" dirty="0">
-                <a:solidFill>
-                  <a:srgbClr val="111111"/>
-                </a:solidFill>
-                <a:latin typeface="Times New Roman" pitchFamily="34" charset="0"/>
-                <a:ea typeface="Times New Roman" pitchFamily="34" charset="-122"/>
-                <a:cs typeface="Times New Roman" pitchFamily="34" charset="-120"/>
-              </a:rPr>
-              <a:t>Rs = +0.71 shows a fairly strong positive correlation: on this hill, soils tend to be deeper where slopes are steeper. This may be explained by vegetation or rock type.</a:t>
-            </a:r>
-            <a:endParaRPr lang="en-US" sz="4000" dirty="0"/>
+              <a:t>Illustration: the calculation table</a:t>
+            </a:r>
+            <a:endParaRPr lang="en-US" sz="1600" dirty="0"/>
           </a:p>
         </p:txBody>
       </p:sp>
@@ -18386,129 +18820,9 @@
           </a:p>
         </p:txBody>
       </p:sp>
-      <p:sp>
-        <p:nvSpPr>
-          <p:cNvPr id="3" name="Text 1"/>
-          <p:cNvSpPr/>
-          <p:nvPr/>
-        </p:nvSpPr>
-        <p:spPr>
-          <a:xfrm>
-            <a:off x="365760" y="1005840"/>
-            <a:ext cx="11460175" cy="731520"/>
-          </a:xfrm>
-          <a:prstGeom prst="rect">
-            <a:avLst/>
-          </a:prstGeom>
-          <a:noFill/>
-          <a:ln/>
-        </p:spPr>
-        <p:txBody>
-          <a:bodyPr wrap="square" lIns="0" tIns="0" rIns="0" bIns="0" rtlCol="0" anchor="ctr">
-            <a:normAutofit/>
-          </a:bodyPr>
-          <a:lstStyle/>
-          <a:p>
-            <a:pPr algn="ctr" indent="0" marL="0">
-              <a:buNone/>
-            </a:pPr>
-            <a:r>
-              <a:rPr lang="en-US" sz="3600" b="1" dirty="0">
-                <a:solidFill>
-                  <a:srgbClr val="990011"/>
-                </a:solidFill>
-                <a:latin typeface="Times New Roman" pitchFamily="34" charset="0"/>
-                <a:ea typeface="Times New Roman" pitchFamily="34" charset="-122"/>
-                <a:cs typeface="Times New Roman" pitchFamily="34" charset="-120"/>
-              </a:rPr>
-              <a:t>4. Interpretation and Significance</a:t>
-            </a:r>
-            <a:endParaRPr lang="en-US" sz="3600" dirty="0"/>
-          </a:p>
-        </p:txBody>
-      </p:sp>
-      <p:sp>
-        <p:nvSpPr>
-          <p:cNvPr id="4" name="Text 2"/>
-          <p:cNvSpPr/>
-          <p:nvPr/>
-        </p:nvSpPr>
-        <p:spPr>
-          <a:xfrm>
-            <a:off x="365760" y="1783080"/>
-            <a:ext cx="6035040" cy="4617720"/>
-          </a:xfrm>
-          <a:prstGeom prst="rect">
-            <a:avLst/>
-          </a:prstGeom>
-          <a:noFill/>
-          <a:ln/>
-        </p:spPr>
-        <p:txBody>
-          <a:bodyPr wrap="square" lIns="0" tIns="0" rIns="0" bIns="0" rtlCol="0" anchor="t"/>
-          <a:lstStyle/>
-          <a:p>
-            <a:pPr algn="l" indent="0" marL="0">
-              <a:spcAft>
-                <a:spcPts val="800"/>
-              </a:spcAft>
-              <a:buNone/>
-            </a:pPr>
-            <a:r>
-              <a:rPr lang="en-US" sz="3600" i="1" dirty="0">
-                <a:solidFill>
-                  <a:srgbClr val="111111"/>
-                </a:solidFill>
-                <a:latin typeface="Times New Roman" pitchFamily="34" charset="0"/>
-                <a:ea typeface="Times New Roman" pitchFamily="34" charset="-122"/>
-                <a:cs typeface="Times New Roman" pitchFamily="34" charset="-120"/>
-              </a:rPr>
-              <a:t>Rs is interpreted and tested as follows:</a:t>
-            </a:r>
-            <a:endParaRPr lang="en-US" sz="3600" dirty="0"/>
-          </a:p>
-          <a:p>
-            <a:pPr algn="l" indent="0" marL="0">
-              <a:spcAft>
-                <a:spcPts val="800"/>
-              </a:spcAft>
-              <a:buNone/>
-            </a:pPr>
-            <a:r>
-              <a:rPr lang="en-US" sz="3600" b="1" dirty="0">
-                <a:solidFill>
-                  <a:srgbClr val="111111"/>
-                </a:solidFill>
-                <a:latin typeface="Times New Roman" pitchFamily="34" charset="0"/>
-                <a:ea typeface="Times New Roman" pitchFamily="34" charset="-122"/>
-                <a:cs typeface="Times New Roman" pitchFamily="34" charset="-120"/>
-              </a:rPr>
-              <a:t>Positive values: </a:t>
-            </a:r>
-            <a:pPr algn="l" indent="0" marL="0">
-              <a:spcAft>
-                <a:spcPts val="800"/>
-              </a:spcAft>
-              <a:buNone/>
-            </a:pPr>
-            <a:r>
-              <a:rPr lang="en-US" sz="3600" dirty="0">
-                <a:solidFill>
-                  <a:srgbClr val="111111"/>
-                </a:solidFill>
-                <a:latin typeface="Times New Roman" pitchFamily="34" charset="0"/>
-                <a:ea typeface="Times New Roman" pitchFamily="34" charset="-122"/>
-                <a:cs typeface="Times New Roman" pitchFamily="34" charset="-120"/>
-              </a:rPr>
-              <a:t>Rs = +1 is a perfect positive correlation, +0.5 to +0.9 a strong one and +0.1 to +0.4 a weak one. Rs = 0 means there is no correlation.</a:t>
-            </a:r>
-            <a:endParaRPr lang="en-US" sz="3600" dirty="0"/>
-          </a:p>
-        </p:txBody>
-      </p:sp>
       <p:pic>
         <p:nvPicPr>
-          <p:cNvPr id="5" name="Image 0" descr="/home/claude/f4/img/v2/stat2_rs_scale.png">    </p:cNvPr>
+          <p:cNvPr id="3" name="Image 0" descr="/home/claude/f4/img/minesec_sheet.png">    </p:cNvPr>
           <p:cNvPicPr>
             <a:picLocks noChangeAspect="1"/>
           </p:cNvPicPr>
@@ -18522,8 +18836,8 @@
         </p:blipFill>
         <p:spPr>
           <a:xfrm>
-            <a:off x="6537960" y="2849678"/>
-            <a:ext cx="5470855" cy="2137053"/>
+            <a:off x="0" y="658368"/>
+            <a:ext cx="5120640" cy="5833872"/>
           </a:xfrm>
           <a:prstGeom prst="rect">
             <a:avLst/>
@@ -18532,14 +18846,14 @@
       </p:pic>
       <p:sp>
         <p:nvSpPr>
-          <p:cNvPr id="6" name="Text 3"/>
+          <p:cNvPr id="4" name="Text 1"/>
           <p:cNvSpPr/>
           <p:nvPr/>
         </p:nvSpPr>
         <p:spPr>
           <a:xfrm>
-            <a:off x="6537960" y="6089904"/>
-            <a:ext cx="5470855" cy="347472"/>
+            <a:off x="5349240" y="1005840"/>
+            <a:ext cx="6522415" cy="731520"/>
           </a:xfrm>
           <a:prstGeom prst="rect">
             <a:avLst/>
@@ -18548,24 +18862,85 @@
           <a:ln/>
         </p:spPr>
         <p:txBody>
-          <a:bodyPr wrap="square" lIns="0" tIns="0" rIns="0" bIns="0" rtlCol="0" anchor="ctr"/>
+          <a:bodyPr wrap="square" lIns="0" tIns="0" rIns="0" bIns="0" rtlCol="0" anchor="ctr">
+            <a:normAutofit/>
+          </a:bodyPr>
           <a:lstStyle/>
           <a:p>
             <a:pPr algn="ctr" indent="0" marL="0">
               <a:buNone/>
             </a:pPr>
             <a:r>
-              <a:rPr lang="en-US" sz="1600" i="1" dirty="0">
-                <a:solidFill>
-                  <a:srgbClr val="555555"/>
+              <a:rPr lang="en-US" sz="3600" b="1" dirty="0">
+                <a:solidFill>
+                  <a:srgbClr val="990011"/>
                 </a:solidFill>
                 <a:latin typeface="Times New Roman" pitchFamily="34" charset="0"/>
                 <a:ea typeface="Times New Roman" pitchFamily="34" charset="-122"/>
                 <a:cs typeface="Times New Roman" pitchFamily="34" charset="-120"/>
               </a:rPr>
-              <a:t>Illustration: the scale of Rs</a:t>
-            </a:r>
-            <a:endParaRPr lang="en-US" sz="1600" dirty="0"/>
+              <a:t>3. Worked Example: Slope Angle and Soil Depth</a:t>
+            </a:r>
+            <a:endParaRPr lang="en-US" sz="3600" dirty="0"/>
+          </a:p>
+        </p:txBody>
+      </p:sp>
+      <p:sp>
+        <p:nvSpPr>
+          <p:cNvPr id="5" name="Text 2"/>
+          <p:cNvSpPr/>
+          <p:nvPr/>
+        </p:nvSpPr>
+        <p:spPr>
+          <a:xfrm>
+            <a:off x="5349240" y="1783080"/>
+            <a:ext cx="6522415" cy="4663440"/>
+          </a:xfrm>
+          <a:prstGeom prst="rect">
+            <a:avLst/>
+          </a:prstGeom>
+          <a:noFill/>
+          <a:ln/>
+        </p:spPr>
+        <p:txBody>
+          <a:bodyPr wrap="square" lIns="0" tIns="0" rIns="0" bIns="0" rtlCol="0" anchor="t"/>
+          <a:lstStyle/>
+          <a:p>
+            <a:pPr algn="l" indent="0" marL="0">
+              <a:spcAft>
+                <a:spcPts val="800"/>
+              </a:spcAft>
+              <a:buNone/>
+            </a:pPr>
+            <a:r>
+              <a:rPr lang="en-US" sz="4000" b="1" dirty="0">
+                <a:solidFill>
+                  <a:srgbClr val="111111"/>
+                </a:solidFill>
+                <a:latin typeface="Times New Roman" pitchFamily="34" charset="0"/>
+                <a:ea typeface="Times New Roman" pitchFamily="34" charset="-122"/>
+                <a:cs typeface="Times New Roman" pitchFamily="34" charset="-120"/>
+              </a:rPr>
+              <a:t>Calculation: </a:t>
+            </a:r>
+            <a:pPr algn="l" indent="0" marL="0">
+              <a:spcAft>
+                <a:spcPts val="800"/>
+              </a:spcAft>
+              <a:buNone/>
+            </a:pPr>
+            <a:r>
+              <a:rPr lang="en-US" sz="4000" dirty="0">
+                <a:solidFill>
+                  <a:srgbClr val="111111"/>
+                </a:solidFill>
+                <a:latin typeface="Times New Roman" pitchFamily="34" charset="0"/>
+                <a:ea typeface="Times New Roman" pitchFamily="34" charset="-122"/>
+                <a:cs typeface="Times New Roman" pitchFamily="34" charset="-120"/>
+              </a:rPr>
+              <a:t>The table gives Σd² = 48 and n = 10. Rs = 1 − (6 × 48) ÷ (1,000 − 10) = 1 − 288 ÷ 990 ≈ +0.71.</a:t>
+            </a:r>
+            <a:endParaRPr lang="en-US" sz="4000" dirty="0"/>
           </a:p>
         </p:txBody>
       </p:sp>
@@ -18917,7 +19292,7 @@
         <p:spPr>
           <a:xfrm>
             <a:off x="0" y="658368"/>
-            <a:ext cx="5120640" cy="5833872"/>
+            <a:ext cx="3840480" cy="5833872"/>
           </a:xfrm>
           <a:prstGeom prst="rect">
             <a:avLst/>
@@ -18932,8 +19307,8 @@
         </p:nvSpPr>
         <p:spPr>
           <a:xfrm>
-            <a:off x="5349240" y="1005840"/>
-            <a:ext cx="6522415" cy="731520"/>
+            <a:off x="4069080" y="1005840"/>
+            <a:ext cx="7802575" cy="731520"/>
           </a:xfrm>
           <a:prstGeom prst="rect">
             <a:avLst/>
@@ -18959,7 +19334,7 @@
                 <a:ea typeface="Times New Roman" pitchFamily="34" charset="-122"/>
                 <a:cs typeface="Times New Roman" pitchFamily="34" charset="-120"/>
               </a:rPr>
-              <a:t>4. Interpretation and Significance</a:t>
+              <a:t>3. Worked Example: Slope Angle and Soil Depth</a:t>
             </a:r>
             <a:endParaRPr lang="en-US" sz="3600" dirty="0"/>
           </a:p>
@@ -18973,8 +19348,8 @@
         </p:nvSpPr>
         <p:spPr>
           <a:xfrm>
-            <a:off x="5349240" y="1783080"/>
-            <a:ext cx="6522415" cy="4663440"/>
+            <a:off x="4069080" y="1783080"/>
+            <a:ext cx="7802575" cy="4663440"/>
           </a:xfrm>
           <a:prstGeom prst="rect">
             <a:avLst/>
@@ -19001,7 +19376,7 @@
                 <a:ea typeface="Times New Roman" pitchFamily="34" charset="-122"/>
                 <a:cs typeface="Times New Roman" pitchFamily="34" charset="-120"/>
               </a:rPr>
-              <a:t>Negative values: </a:t>
+              <a:t>Interpretation: </a:t>
             </a:r>
             <a:pPr algn="l" indent="0" marL="0">
               <a:spcAft>
@@ -19018,7 +19393,7 @@
                 <a:ea typeface="Times New Roman" pitchFamily="34" charset="-122"/>
                 <a:cs typeface="Times New Roman" pitchFamily="34" charset="-120"/>
               </a:rPr>
-              <a:t>Rs = −1 is a perfect negative correlation, −0.5 to −0.9 a strong one and −0.1 to −0.4 a weak one. The sign shows the direction and the value shows the strength.</a:t>
+              <a:t>Rs = +0.71 shows a fairly strong positive correlation: on this hill, soils tend to be deeper where slopes are steeper. This may be explained by vegetation or rock type.</a:t>
             </a:r>
             <a:endParaRPr lang="en-US" sz="4000" dirty="0"/>
           </a:p>
@@ -19136,9 +19511,129 @@
           </a:p>
         </p:txBody>
       </p:sp>
+      <p:sp>
+        <p:nvSpPr>
+          <p:cNvPr id="3" name="Text 1"/>
+          <p:cNvSpPr/>
+          <p:nvPr/>
+        </p:nvSpPr>
+        <p:spPr>
+          <a:xfrm>
+            <a:off x="365760" y="1005840"/>
+            <a:ext cx="11460175" cy="731520"/>
+          </a:xfrm>
+          <a:prstGeom prst="rect">
+            <a:avLst/>
+          </a:prstGeom>
+          <a:noFill/>
+          <a:ln/>
+        </p:spPr>
+        <p:txBody>
+          <a:bodyPr wrap="square" lIns="0" tIns="0" rIns="0" bIns="0" rtlCol="0" anchor="ctr">
+            <a:normAutofit/>
+          </a:bodyPr>
+          <a:lstStyle/>
+          <a:p>
+            <a:pPr algn="ctr" indent="0" marL="0">
+              <a:buNone/>
+            </a:pPr>
+            <a:r>
+              <a:rPr lang="en-US" sz="3600" b="1" dirty="0">
+                <a:solidFill>
+                  <a:srgbClr val="990011"/>
+                </a:solidFill>
+                <a:latin typeface="Times New Roman" pitchFamily="34" charset="0"/>
+                <a:ea typeface="Times New Roman" pitchFamily="34" charset="-122"/>
+                <a:cs typeface="Times New Roman" pitchFamily="34" charset="-120"/>
+              </a:rPr>
+              <a:t>4. Interpretation and Significance</a:t>
+            </a:r>
+            <a:endParaRPr lang="en-US" sz="3600" dirty="0"/>
+          </a:p>
+        </p:txBody>
+      </p:sp>
+      <p:sp>
+        <p:nvSpPr>
+          <p:cNvPr id="4" name="Text 2"/>
+          <p:cNvSpPr/>
+          <p:nvPr/>
+        </p:nvSpPr>
+        <p:spPr>
+          <a:xfrm>
+            <a:off x="365760" y="1783080"/>
+            <a:ext cx="6035040" cy="4617720"/>
+          </a:xfrm>
+          <a:prstGeom prst="rect">
+            <a:avLst/>
+          </a:prstGeom>
+          <a:noFill/>
+          <a:ln/>
+        </p:spPr>
+        <p:txBody>
+          <a:bodyPr wrap="square" lIns="0" tIns="0" rIns="0" bIns="0" rtlCol="0" anchor="t"/>
+          <a:lstStyle/>
+          <a:p>
+            <a:pPr algn="l" indent="0" marL="0">
+              <a:spcAft>
+                <a:spcPts val="800"/>
+              </a:spcAft>
+              <a:buNone/>
+            </a:pPr>
+            <a:r>
+              <a:rPr lang="en-US" sz="3600" i="1" dirty="0">
+                <a:solidFill>
+                  <a:srgbClr val="111111"/>
+                </a:solidFill>
+                <a:latin typeface="Times New Roman" pitchFamily="34" charset="0"/>
+                <a:ea typeface="Times New Roman" pitchFamily="34" charset="-122"/>
+                <a:cs typeface="Times New Roman" pitchFamily="34" charset="-120"/>
+              </a:rPr>
+              <a:t>Rs is interpreted and tested as follows:</a:t>
+            </a:r>
+            <a:endParaRPr lang="en-US" sz="3600" dirty="0"/>
+          </a:p>
+          <a:p>
+            <a:pPr algn="l" indent="0" marL="0">
+              <a:spcAft>
+                <a:spcPts val="800"/>
+              </a:spcAft>
+              <a:buNone/>
+            </a:pPr>
+            <a:r>
+              <a:rPr lang="en-US" sz="3600" b="1" dirty="0">
+                <a:solidFill>
+                  <a:srgbClr val="111111"/>
+                </a:solidFill>
+                <a:latin typeface="Times New Roman" pitchFamily="34" charset="0"/>
+                <a:ea typeface="Times New Roman" pitchFamily="34" charset="-122"/>
+                <a:cs typeface="Times New Roman" pitchFamily="34" charset="-120"/>
+              </a:rPr>
+              <a:t>Positive values: </a:t>
+            </a:r>
+            <a:pPr algn="l" indent="0" marL="0">
+              <a:spcAft>
+                <a:spcPts val="800"/>
+              </a:spcAft>
+              <a:buNone/>
+            </a:pPr>
+            <a:r>
+              <a:rPr lang="en-US" sz="3600" dirty="0">
+                <a:solidFill>
+                  <a:srgbClr val="111111"/>
+                </a:solidFill>
+                <a:latin typeface="Times New Roman" pitchFamily="34" charset="0"/>
+                <a:ea typeface="Times New Roman" pitchFamily="34" charset="-122"/>
+                <a:cs typeface="Times New Roman" pitchFamily="34" charset="-120"/>
+              </a:rPr>
+              <a:t>Rs = +1 is a perfect positive correlation, +0.5 to +0.9 a strong one and +0.1 to +0.4 a weak one. Rs = 0 means there is no correlation.</a:t>
+            </a:r>
+            <a:endParaRPr lang="en-US" sz="3600" dirty="0"/>
+          </a:p>
+        </p:txBody>
+      </p:sp>
       <p:pic>
         <p:nvPicPr>
-          <p:cNvPr id="3" name="Image 0" descr="/home/claude/f4/img/minesec_sheet.png">    </p:cNvPr>
+          <p:cNvPr id="5" name="Image 0" descr="/home/claude/f4/img/v2/stat2_rs_scale.png">    </p:cNvPr>
           <p:cNvPicPr>
             <a:picLocks noChangeAspect="1"/>
           </p:cNvPicPr>
@@ -19152,8 +19647,8 @@
         </p:blipFill>
         <p:spPr>
           <a:xfrm>
-            <a:off x="0" y="658368"/>
-            <a:ext cx="5120640" cy="5833872"/>
+            <a:off x="6537960" y="2849678"/>
+            <a:ext cx="5470855" cy="2137053"/>
           </a:xfrm>
           <a:prstGeom prst="rect">
             <a:avLst/>
@@ -19162,14 +19657,14 @@
       </p:pic>
       <p:sp>
         <p:nvSpPr>
-          <p:cNvPr id="4" name="Text 1"/>
+          <p:cNvPr id="6" name="Text 3"/>
           <p:cNvSpPr/>
           <p:nvPr/>
         </p:nvSpPr>
         <p:spPr>
           <a:xfrm>
-            <a:off x="5349240" y="1005840"/>
-            <a:ext cx="6522415" cy="731520"/>
+            <a:off x="6537960" y="6089904"/>
+            <a:ext cx="5470855" cy="347472"/>
           </a:xfrm>
           <a:prstGeom prst="rect">
             <a:avLst/>
@@ -19178,85 +19673,24 @@
           <a:ln/>
         </p:spPr>
         <p:txBody>
-          <a:bodyPr wrap="square" lIns="0" tIns="0" rIns="0" bIns="0" rtlCol="0" anchor="ctr">
-            <a:normAutofit/>
-          </a:bodyPr>
+          <a:bodyPr wrap="square" lIns="0" tIns="0" rIns="0" bIns="0" rtlCol="0" anchor="ctr"/>
           <a:lstStyle/>
           <a:p>
             <a:pPr algn="ctr" indent="0" marL="0">
               <a:buNone/>
             </a:pPr>
             <a:r>
-              <a:rPr lang="en-US" sz="3600" b="1" dirty="0">
-                <a:solidFill>
-                  <a:srgbClr val="990011"/>
+              <a:rPr lang="en-US" sz="1600" i="1" dirty="0">
+                <a:solidFill>
+                  <a:srgbClr val="555555"/>
                 </a:solidFill>
                 <a:latin typeface="Times New Roman" pitchFamily="34" charset="0"/>
                 <a:ea typeface="Times New Roman" pitchFamily="34" charset="-122"/>
                 <a:cs typeface="Times New Roman" pitchFamily="34" charset="-120"/>
               </a:rPr>
-              <a:t>4. Interpretation and Significance</a:t>
-            </a:r>
-            <a:endParaRPr lang="en-US" sz="3600" dirty="0"/>
-          </a:p>
-        </p:txBody>
-      </p:sp>
-      <p:sp>
-        <p:nvSpPr>
-          <p:cNvPr id="5" name="Text 2"/>
-          <p:cNvSpPr/>
-          <p:nvPr/>
-        </p:nvSpPr>
-        <p:spPr>
-          <a:xfrm>
-            <a:off x="5349240" y="1783080"/>
-            <a:ext cx="6522415" cy="4663440"/>
-          </a:xfrm>
-          <a:prstGeom prst="rect">
-            <a:avLst/>
-          </a:prstGeom>
-          <a:noFill/>
-          <a:ln/>
-        </p:spPr>
-        <p:txBody>
-          <a:bodyPr wrap="square" lIns="0" tIns="0" rIns="0" bIns="0" rtlCol="0" anchor="t"/>
-          <a:lstStyle/>
-          <a:p>
-            <a:pPr algn="l" indent="0" marL="0">
-              <a:spcAft>
-                <a:spcPts val="800"/>
-              </a:spcAft>
-              <a:buNone/>
-            </a:pPr>
-            <a:r>
-              <a:rPr lang="en-US" sz="4000" b="1" dirty="0">
-                <a:solidFill>
-                  <a:srgbClr val="111111"/>
-                </a:solidFill>
-                <a:latin typeface="Times New Roman" pitchFamily="34" charset="0"/>
-                <a:ea typeface="Times New Roman" pitchFamily="34" charset="-122"/>
-                <a:cs typeface="Times New Roman" pitchFamily="34" charset="-120"/>
-              </a:rPr>
-              <a:t>Significance test: </a:t>
-            </a:r>
-            <a:pPr algn="l" indent="0" marL="0">
-              <a:spcAft>
-                <a:spcPts val="800"/>
-              </a:spcAft>
-              <a:buNone/>
-            </a:pPr>
-            <a:r>
-              <a:rPr lang="en-US" sz="4000" dirty="0">
-                <a:solidFill>
-                  <a:srgbClr val="111111"/>
-                </a:solidFill>
-                <a:latin typeface="Times New Roman" pitchFamily="34" charset="0"/>
-                <a:ea typeface="Times New Roman" pitchFamily="34" charset="-122"/>
-                <a:cs typeface="Times New Roman" pitchFamily="34" charset="-120"/>
-              </a:rPr>
-              <a:t>Rs is compared with the critical values given in tables for the same number of pairs. If Rs is greater than the critical value, the correlation is significant.</a:t>
-            </a:r>
-            <a:endParaRPr lang="en-US" sz="4000" dirty="0"/>
+              <a:t>Illustration: the scale of Rs</a:t>
+            </a:r>
+            <a:endParaRPr lang="en-US" sz="1600" dirty="0"/>
           </a:p>
         </p:txBody>
       </p:sp>
@@ -19389,7 +19823,7 @@
         <p:spPr>
           <a:xfrm>
             <a:off x="0" y="658368"/>
-            <a:ext cx="2468880" cy="5833872"/>
+            <a:ext cx="5120640" cy="5833872"/>
           </a:xfrm>
           <a:prstGeom prst="rect">
             <a:avLst/>
@@ -19404,8 +19838,8 @@
         </p:nvSpPr>
         <p:spPr>
           <a:xfrm>
-            <a:off x="2697480" y="1005840"/>
-            <a:ext cx="9174175" cy="731520"/>
+            <a:off x="5349240" y="1005840"/>
+            <a:ext cx="6522415" cy="731520"/>
           </a:xfrm>
           <a:prstGeom prst="rect">
             <a:avLst/>
@@ -19445,8 +19879,8 @@
         </p:nvSpPr>
         <p:spPr>
           <a:xfrm>
-            <a:off x="2697480" y="1783080"/>
-            <a:ext cx="9174175" cy="4663440"/>
+            <a:off x="5349240" y="1783080"/>
+            <a:ext cx="6522415" cy="4663440"/>
           </a:xfrm>
           <a:prstGeom prst="rect">
             <a:avLst/>
@@ -19473,7 +19907,7 @@
                 <a:ea typeface="Times New Roman" pitchFamily="34" charset="-122"/>
                 <a:cs typeface="Times New Roman" pitchFamily="34" charset="-120"/>
               </a:rPr>
-              <a:t>Application and conclusion: </a:t>
+              <a:t>Negative values: </a:t>
             </a:r>
             <a:pPr algn="l" indent="0" marL="0">
               <a:spcAft>
@@ -19490,7 +19924,7 @@
                 <a:ea typeface="Times New Roman" pitchFamily="34" charset="-122"/>
                 <a:cs typeface="Times New Roman" pitchFamily="34" charset="-120"/>
               </a:rPr>
-              <a:t>For n = 10, the critical values are 0.648 at 95 % and 0.794 at 99 %, so Rs = 0.71 is significant at 95 % but not at 99 %. We therefore reject H0 at the 95 % level: the relationship is real and not due to chance.</a:t>
+              <a:t>Rs = −1 is a perfect negative correlation, −0.5 to −0.9 a strong one and −0.1 to −0.4 a weak one. The sign shows the direction and the value shows the strength.</a:t>
             </a:r>
             <a:endParaRPr lang="en-US" sz="4000" dirty="0"/>
           </a:p>
@@ -19602,7 +20036,7 @@
                 <a:ea typeface="Calibri" pitchFamily="34" charset="-122"/>
                 <a:cs typeface="Calibri" pitchFamily="34" charset="-120"/>
               </a:rPr>
-              <a:t>FORMATIVE EVALUATION</a:t>
+              <a:t>BOARD SUMMARY</a:t>
             </a:r>
             <a:endParaRPr lang="en-US" sz="1400" dirty="0"/>
           </a:p>
@@ -19667,7 +20101,7 @@
                 <a:ea typeface="Times New Roman" pitchFamily="34" charset="-122"/>
                 <a:cs typeface="Times New Roman" pitchFamily="34" charset="-120"/>
               </a:rPr>
-              <a:t>Evaluation 1</a:t>
+              <a:t>4. Interpretation and Significance</a:t>
             </a:r>
             <a:endParaRPr lang="en-US" sz="3600" dirty="0"/>
           </a:p>
@@ -19701,7 +20135,7 @@
               <a:buNone/>
             </a:pPr>
             <a:r>
-              <a:rPr lang="en-US" sz="4000" dirty="0">
+              <a:rPr lang="en-US" sz="4000" b="1" dirty="0">
                 <a:solidFill>
                   <a:srgbClr val="111111"/>
                 </a:solidFill>
@@ -19709,7 +20143,24 @@
                 <a:ea typeface="Times New Roman" pitchFamily="34" charset="-122"/>
                 <a:cs typeface="Times New Roman" pitchFamily="34" charset="-120"/>
               </a:rPr>
-              <a:t>State a null hypothesis for rainfall and crop yield.</a:t>
+              <a:t>Significance test: </a:t>
+            </a:r>
+            <a:pPr algn="l" indent="0" marL="0">
+              <a:spcAft>
+                <a:spcPts val="800"/>
+              </a:spcAft>
+              <a:buNone/>
+            </a:pPr>
+            <a:r>
+              <a:rPr lang="en-US" sz="4000" dirty="0">
+                <a:solidFill>
+                  <a:srgbClr val="111111"/>
+                </a:solidFill>
+                <a:latin typeface="Times New Roman" pitchFamily="34" charset="0"/>
+                <a:ea typeface="Times New Roman" pitchFamily="34" charset="-122"/>
+                <a:cs typeface="Times New Roman" pitchFamily="34" charset="-120"/>
+              </a:rPr>
+              <a:t>Rs is compared with the critical values given in tables for the same number of pairs. If Rs is greater than the critical value, the correlation is significant.</a:t>
             </a:r>
             <a:endParaRPr lang="en-US" sz="4000" dirty="0"/>
           </a:p>
@@ -19821,7 +20272,7 @@
                 <a:ea typeface="Calibri" pitchFamily="34" charset="-122"/>
                 <a:cs typeface="Calibri" pitchFamily="34" charset="-120"/>
               </a:rPr>
-              <a:t>FORMATIVE EVALUATION</a:t>
+              <a:t>BOARD SUMMARY</a:t>
             </a:r>
             <a:endParaRPr lang="en-US" sz="1400" dirty="0"/>
           </a:p>
@@ -19844,7 +20295,7 @@
         <p:spPr>
           <a:xfrm>
             <a:off x="0" y="658368"/>
-            <a:ext cx="5120640" cy="5833872"/>
+            <a:ext cx="2468880" cy="5833872"/>
           </a:xfrm>
           <a:prstGeom prst="rect">
             <a:avLst/>
@@ -19859,8 +20310,8 @@
         </p:nvSpPr>
         <p:spPr>
           <a:xfrm>
-            <a:off x="5349240" y="1005840"/>
-            <a:ext cx="6522415" cy="731520"/>
+            <a:off x="2697480" y="1005840"/>
+            <a:ext cx="9174175" cy="731520"/>
           </a:xfrm>
           <a:prstGeom prst="rect">
             <a:avLst/>
@@ -19886,7 +20337,7 @@
                 <a:ea typeface="Times New Roman" pitchFamily="34" charset="-122"/>
                 <a:cs typeface="Times New Roman" pitchFamily="34" charset="-120"/>
               </a:rPr>
-              <a:t>Expected Answer</a:t>
+              <a:t>4. Interpretation and Significance</a:t>
             </a:r>
             <a:endParaRPr lang="en-US" sz="3600" dirty="0"/>
           </a:p>
@@ -19900,8 +20351,8 @@
         </p:nvSpPr>
         <p:spPr>
           <a:xfrm>
-            <a:off x="5349240" y="1783080"/>
-            <a:ext cx="6522415" cy="4663440"/>
+            <a:off x="2697480" y="1783080"/>
+            <a:ext cx="9174175" cy="4663440"/>
           </a:xfrm>
           <a:prstGeom prst="rect">
             <a:avLst/>
@@ -19920,7 +20371,7 @@
               <a:buNone/>
             </a:pPr>
             <a:r>
-              <a:rPr lang="en-US" sz="4000" dirty="0">
+              <a:rPr lang="en-US" sz="4000" b="1" dirty="0">
                 <a:solidFill>
                   <a:srgbClr val="111111"/>
                 </a:solidFill>
@@ -19928,7 +20379,24 @@
                 <a:ea typeface="Times New Roman" pitchFamily="34" charset="-122"/>
                 <a:cs typeface="Times New Roman" pitchFamily="34" charset="-120"/>
               </a:rPr>
-              <a:t>H0: there is no significant relationship between annual rainfall and crop yield.</a:t>
+              <a:t>Application and conclusion: </a:t>
+            </a:r>
+            <a:pPr algn="l" indent="0" marL="0">
+              <a:spcAft>
+                <a:spcPts val="800"/>
+              </a:spcAft>
+              <a:buNone/>
+            </a:pPr>
+            <a:r>
+              <a:rPr lang="en-US" sz="4000" dirty="0">
+                <a:solidFill>
+                  <a:srgbClr val="111111"/>
+                </a:solidFill>
+                <a:latin typeface="Times New Roman" pitchFamily="34" charset="0"/>
+                <a:ea typeface="Times New Roman" pitchFamily="34" charset="-122"/>
+                <a:cs typeface="Times New Roman" pitchFamily="34" charset="-120"/>
+              </a:rPr>
+              <a:t>For n = 10, the critical values are 0.648 at 95 % and 0.794 at 99 %, so Rs = 0.71 is significant at 95 % but not at 99 %. We therefore reject H0 at the 95 % level: the relationship is real and not due to chance.</a:t>
             </a:r>
             <a:endParaRPr lang="en-US" sz="4000" dirty="0"/>
           </a:p>
@@ -20105,7 +20573,7 @@
                 <a:ea typeface="Times New Roman" pitchFamily="34" charset="-122"/>
                 <a:cs typeface="Times New Roman" pitchFamily="34" charset="-120"/>
               </a:rPr>
-              <a:t>Evaluation 2</a:t>
+              <a:t>Evaluation 1</a:t>
             </a:r>
             <a:endParaRPr lang="en-US" sz="3600" dirty="0"/>
           </a:p>
@@ -20147,7 +20615,7 @@
                 <a:ea typeface="Times New Roman" pitchFamily="34" charset="-122"/>
                 <a:cs typeface="Times New Roman" pitchFamily="34" charset="-120"/>
               </a:rPr>
-              <a:t>Six pairs give Σd² = 4. Calculate Rs and interpret it.</a:t>
+              <a:t>State a null hypothesis for rainfall and crop yield.</a:t>
             </a:r>
             <a:endParaRPr lang="en-US" sz="4000" dirty="0"/>
           </a:p>
@@ -20366,7 +20834,7 @@
                 <a:ea typeface="Times New Roman" pitchFamily="34" charset="-122"/>
                 <a:cs typeface="Times New Roman" pitchFamily="34" charset="-120"/>
               </a:rPr>
-              <a:t>Rs = 1 − 24 ÷ 210 ≈ +0.89: a strong positive correlation.</a:t>
+              <a:t>H0: there is no significant relationship between annual rainfall and crop yield.</a:t>
             </a:r>
             <a:endParaRPr lang="en-US" sz="4000" dirty="0"/>
           </a:p>
@@ -20478,7 +20946,7 @@
                 <a:ea typeface="Calibri" pitchFamily="34" charset="-122"/>
                 <a:cs typeface="Calibri" pitchFamily="34" charset="-120"/>
               </a:rPr>
-              <a:t>REMEDIATION</a:t>
+              <a:t>FORMATIVE EVALUATION</a:t>
             </a:r>
             <a:endParaRPr lang="en-US" sz="1400" dirty="0"/>
           </a:p>
@@ -20501,7 +20969,7 @@
         <p:spPr>
           <a:xfrm>
             <a:off x="0" y="658368"/>
-            <a:ext cx="3840480" cy="5833872"/>
+            <a:ext cx="5120640" cy="5833872"/>
           </a:xfrm>
           <a:prstGeom prst="rect">
             <a:avLst/>
@@ -20516,8 +20984,8 @@
         </p:nvSpPr>
         <p:spPr>
           <a:xfrm>
-            <a:off x="4069080" y="1005840"/>
-            <a:ext cx="7802575" cy="731520"/>
+            <a:off x="5349240" y="1005840"/>
+            <a:ext cx="6522415" cy="731520"/>
           </a:xfrm>
           <a:prstGeom prst="rect">
             <a:avLst/>
@@ -20543,7 +21011,7 @@
                 <a:ea typeface="Times New Roman" pitchFamily="34" charset="-122"/>
                 <a:cs typeface="Times New Roman" pitchFamily="34" charset="-120"/>
               </a:rPr>
-              <a:t>Remediation</a:t>
+              <a:t>Evaluation 2</a:t>
             </a:r>
             <a:endParaRPr lang="en-US" sz="3600" dirty="0"/>
           </a:p>
@@ -20557,8 +21025,8 @@
         </p:nvSpPr>
         <p:spPr>
           <a:xfrm>
-            <a:off x="4069080" y="1783080"/>
-            <a:ext cx="7802575" cy="4663440"/>
+            <a:off x="5349240" y="1783080"/>
+            <a:ext cx="6522415" cy="4663440"/>
           </a:xfrm>
           <a:prstGeom prst="rect">
             <a:avLst/>
@@ -20577,7 +21045,7 @@
               <a:buNone/>
             </a:pPr>
             <a:r>
-              <a:rPr lang="en-US" sz="4000" b="1" dirty="0">
+              <a:rPr lang="en-US" sz="4000" dirty="0">
                 <a:solidFill>
                   <a:srgbClr val="111111"/>
                 </a:solidFill>
@@ -20585,73 +21053,7 @@
                 <a:ea typeface="Times New Roman" pitchFamily="34" charset="-122"/>
                 <a:cs typeface="Times New Roman" pitchFamily="34" charset="-120"/>
               </a:rPr>
-              <a:t>Fill in the blanks:</a:t>
-            </a:r>
-            <a:endParaRPr lang="en-US" sz="4000" dirty="0"/>
-          </a:p>
-          <a:p>
-            <a:pPr algn="l" marL="342900" indent="-342900">
-              <a:spcAft>
-                <a:spcPts val="800"/>
-              </a:spcAft>
-              <a:buSzPct val="100000"/>
-              <a:buFont typeface="+mj-lt"/>
-              <a:buAutoNum type="arabicPeriod" startAt="1"/>
-            </a:pPr>
-            <a:r>
-              <a:rPr lang="en-US" sz="4000" dirty="0">
-                <a:solidFill>
-                  <a:srgbClr val="111111"/>
-                </a:solidFill>
-                <a:latin typeface="Times New Roman" pitchFamily="34" charset="0"/>
-                <a:ea typeface="Times New Roman" pitchFamily="34" charset="-122"/>
-                <a:cs typeface="Times New Roman" pitchFamily="34" charset="-120"/>
-              </a:rPr>
-              <a:t>Rs always lies between −1 and ______.</a:t>
-            </a:r>
-            <a:endParaRPr lang="en-US" sz="4000" dirty="0"/>
-          </a:p>
-          <a:p>
-            <a:pPr algn="l" marL="342900" indent="-342900">
-              <a:spcAft>
-                <a:spcPts val="800"/>
-              </a:spcAft>
-              <a:buSzPct val="100000"/>
-              <a:buFont typeface="+mj-lt"/>
-              <a:buAutoNum type="arabicPeriod" startAt="1"/>
-            </a:pPr>
-            <a:r>
-              <a:rPr lang="en-US" sz="4000" dirty="0">
-                <a:solidFill>
-                  <a:srgbClr val="111111"/>
-                </a:solidFill>
-                <a:latin typeface="Times New Roman" pitchFamily="34" charset="0"/>
-                <a:ea typeface="Times New Roman" pitchFamily="34" charset="-122"/>
-                <a:cs typeface="Times New Roman" pitchFamily="34" charset="-120"/>
-              </a:rPr>
-              <a:t>The null hypothesis says there is ______ relationship.</a:t>
-            </a:r>
-            <a:endParaRPr lang="en-US" sz="4000" dirty="0"/>
-          </a:p>
-          <a:p>
-            <a:pPr algn="l" marL="342900" indent="-342900">
-              <a:spcAft>
-                <a:spcPts val="800"/>
-              </a:spcAft>
-              <a:buSzPct val="100000"/>
-              <a:buFont typeface="+mj-lt"/>
-              <a:buAutoNum type="arabicPeriod" startAt="1"/>
-            </a:pPr>
-            <a:r>
-              <a:rPr lang="en-US" sz="4000" dirty="0">
-                <a:solidFill>
-                  <a:srgbClr val="111111"/>
-                </a:solidFill>
-                <a:latin typeface="Times New Roman" pitchFamily="34" charset="0"/>
-                <a:ea typeface="Times New Roman" pitchFamily="34" charset="-122"/>
-                <a:cs typeface="Times New Roman" pitchFamily="34" charset="-120"/>
-              </a:rPr>
-              <a:t>Rs = 1 − (6Σd²) ÷ (n³ − ______).</a:t>
+              <a:t>Six pairs give Σd² = 4. Calculate Rs and interpret it.</a:t>
             </a:r>
             <a:endParaRPr lang="en-US" sz="4000" dirty="0"/>
           </a:p>
@@ -20763,7 +21165,7 @@
                 <a:ea typeface="Calibri" pitchFamily="34" charset="-122"/>
                 <a:cs typeface="Calibri" pitchFamily="34" charset="-120"/>
               </a:rPr>
-              <a:t>HOMEWORK</a:t>
+              <a:t>FORMATIVE EVALUATION</a:t>
             </a:r>
             <a:endParaRPr lang="en-US" sz="1400" dirty="0"/>
           </a:p>
@@ -20828,7 +21230,7 @@
                 <a:ea typeface="Times New Roman" pitchFamily="34" charset="-122"/>
                 <a:cs typeface="Times New Roman" pitchFamily="34" charset="-120"/>
               </a:rPr>
-              <a:t>Homework</a:t>
+              <a:t>Expected Answer</a:t>
             </a:r>
             <a:endParaRPr lang="en-US" sz="3600" dirty="0"/>
           </a:p>
@@ -20870,7 +21272,7 @@
                 <a:ea typeface="Times New Roman" pitchFamily="34" charset="-122"/>
                 <a:cs typeface="Times New Roman" pitchFamily="34" charset="-120"/>
               </a:rPr>
-              <a:t>Name three types of graphs.</a:t>
+              <a:t>Rs = 1 − 24 ÷ 210 ≈ +0.89: a strong positive correlation.</a:t>
             </a:r>
             <a:endParaRPr lang="en-US" sz="4000" dirty="0"/>
           </a:p>
@@ -20982,7 +21384,7 @@
                 <a:ea typeface="Calibri" pitchFamily="34" charset="-122"/>
                 <a:cs typeface="Calibri" pitchFamily="34" charset="-120"/>
               </a:rPr>
-              <a:t>NEXT LESSON</a:t>
+              <a:t>REMEDIATION</a:t>
             </a:r>
             <a:endParaRPr lang="en-US" sz="1400" dirty="0"/>
           </a:p>
@@ -21005,7 +21407,7 @@
         <p:spPr>
           <a:xfrm>
             <a:off x="0" y="658368"/>
-            <a:ext cx="5120640" cy="5833872"/>
+            <a:ext cx="3840480" cy="5833872"/>
           </a:xfrm>
           <a:prstGeom prst="rect">
             <a:avLst/>
@@ -21020,8 +21422,8 @@
         </p:nvSpPr>
         <p:spPr>
           <a:xfrm>
-            <a:off x="5349240" y="1005840"/>
-            <a:ext cx="6522415" cy="731520"/>
+            <a:off x="4069080" y="1005840"/>
+            <a:ext cx="7802575" cy="731520"/>
           </a:xfrm>
           <a:prstGeom prst="rect">
             <a:avLst/>
@@ -21047,7 +21449,7 @@
                 <a:ea typeface="Times New Roman" pitchFamily="34" charset="-122"/>
                 <a:cs typeface="Times New Roman" pitchFamily="34" charset="-120"/>
               </a:rPr>
-              <a:t>Next Lesson</a:t>
+              <a:t>Remediation</a:t>
             </a:r>
             <a:endParaRPr lang="en-US" sz="3600" dirty="0"/>
           </a:p>
@@ -21061,8 +21463,8 @@
         </p:nvSpPr>
         <p:spPr>
           <a:xfrm>
-            <a:off x="5349240" y="1783080"/>
-            <a:ext cx="6522415" cy="4663440"/>
+            <a:off x="4069080" y="1783080"/>
+            <a:ext cx="7802575" cy="4663440"/>
           </a:xfrm>
           <a:prstGeom prst="rect">
             <a:avLst/>
@@ -21071,10 +21473,10 @@
           <a:ln/>
         </p:spPr>
         <p:txBody>
-          <a:bodyPr wrap="square" lIns="0" tIns="0" rIns="0" bIns="0" rtlCol="0" anchor="ctr"/>
-          <a:lstStyle/>
-          <a:p>
-            <a:pPr algn="ctr" indent="0" marL="0">
+          <a:bodyPr wrap="square" lIns="0" tIns="0" rIns="0" bIns="0" rtlCol="0" anchor="t"/>
+          <a:lstStyle/>
+          <a:p>
+            <a:pPr algn="l" indent="0" marL="0">
               <a:spcAft>
                 <a:spcPts val="800"/>
               </a:spcAft>
@@ -21089,27 +21491,73 @@
                 <a:ea typeface="Times New Roman" pitchFamily="34" charset="-122"/>
                 <a:cs typeface="Times New Roman" pitchFamily="34" charset="-120"/>
               </a:rPr>
-              <a:t>Our next lesson will be on:</a:t>
+              <a:t>Fill in the blanks:</a:t>
             </a:r>
             <a:endParaRPr lang="en-US" sz="4000" dirty="0"/>
           </a:p>
           <a:p>
-            <a:pPr algn="ctr" indent="0" marL="0">
+            <a:pPr algn="l" marL="342900" indent="-342900">
               <a:spcAft>
                 <a:spcPts val="800"/>
               </a:spcAft>
-              <a:buNone/>
-            </a:pPr>
-            <a:r>
-              <a:rPr lang="en-US" sz="4000" b="1" dirty="0">
-                <a:solidFill>
-                  <a:srgbClr val="990011"/>
+              <a:buSzPct val="100000"/>
+              <a:buFont typeface="+mj-lt"/>
+              <a:buAutoNum type="arabicPeriod" startAt="1"/>
+            </a:pPr>
+            <a:r>
+              <a:rPr lang="en-US" sz="4000" dirty="0">
+                <a:solidFill>
+                  <a:srgbClr val="111111"/>
                 </a:solidFill>
                 <a:latin typeface="Times New Roman" pitchFamily="34" charset="0"/>
                 <a:ea typeface="Times New Roman" pitchFamily="34" charset="-122"/>
                 <a:cs typeface="Times New Roman" pitchFamily="34" charset="-120"/>
               </a:rPr>
-              <a:t>Quantitative Techniques 4: Plotting and Interpreting Graphical Tools</a:t>
+              <a:t>Rs always lies between −1 and ______.</a:t>
+            </a:r>
+            <a:endParaRPr lang="en-US" sz="4000" dirty="0"/>
+          </a:p>
+          <a:p>
+            <a:pPr algn="l" marL="342900" indent="-342900">
+              <a:spcAft>
+                <a:spcPts val="800"/>
+              </a:spcAft>
+              <a:buSzPct val="100000"/>
+              <a:buFont typeface="+mj-lt"/>
+              <a:buAutoNum type="arabicPeriod" startAt="1"/>
+            </a:pPr>
+            <a:r>
+              <a:rPr lang="en-US" sz="4000" dirty="0">
+                <a:solidFill>
+                  <a:srgbClr val="111111"/>
+                </a:solidFill>
+                <a:latin typeface="Times New Roman" pitchFamily="34" charset="0"/>
+                <a:ea typeface="Times New Roman" pitchFamily="34" charset="-122"/>
+                <a:cs typeface="Times New Roman" pitchFamily="34" charset="-120"/>
+              </a:rPr>
+              <a:t>The null hypothesis says there is ______ relationship.</a:t>
+            </a:r>
+            <a:endParaRPr lang="en-US" sz="4000" dirty="0"/>
+          </a:p>
+          <a:p>
+            <a:pPr algn="l" marL="342900" indent="-342900">
+              <a:spcAft>
+                <a:spcPts val="800"/>
+              </a:spcAft>
+              <a:buSzPct val="100000"/>
+              <a:buFont typeface="+mj-lt"/>
+              <a:buAutoNum type="arabicPeriod" startAt="1"/>
+            </a:pPr>
+            <a:r>
+              <a:rPr lang="en-US" sz="4000" dirty="0">
+                <a:solidFill>
+                  <a:srgbClr val="111111"/>
+                </a:solidFill>
+                <a:latin typeface="Times New Roman" pitchFamily="34" charset="0"/>
+                <a:ea typeface="Times New Roman" pitchFamily="34" charset="-122"/>
+                <a:cs typeface="Times New Roman" pitchFamily="34" charset="-120"/>
+              </a:rPr>
+              <a:t>Rs = 1 − (6Σd²) ÷ (n³ − ______).</a:t>
             </a:r>
             <a:endParaRPr lang="en-US" sz="4000" dirty="0"/>
           </a:p>
@@ -21552,22 +22000,46 @@
                 <a:ea typeface="Calibri" pitchFamily="34" charset="-122"/>
                 <a:cs typeface="Calibri" pitchFamily="34" charset="-120"/>
               </a:rPr>
-              <a:t>BILINGUAL GAME</a:t>
+              <a:t>HOMEWORK</a:t>
             </a:r>
             <a:endParaRPr lang="en-US" sz="1400" dirty="0"/>
           </a:p>
         </p:txBody>
       </p:sp>
-      <p:sp>
-        <p:nvSpPr>
-          <p:cNvPr id="3" name="Text 1"/>
+      <p:pic>
+        <p:nvPicPr>
+          <p:cNvPr id="3" name="Image 0" descr="/home/claude/f4/img/minesec_sheet.png">    </p:cNvPr>
+          <p:cNvPicPr>
+            <a:picLocks noChangeAspect="1"/>
+          </p:cNvPicPr>
+          <p:nvPr/>
+        </p:nvPicPr>
+        <p:blipFill>
+          <a:blip r:embed="rId1"/>
+          <a:stretch>
+            <a:fillRect/>
+          </a:stretch>
+        </p:blipFill>
+        <p:spPr>
+          <a:xfrm>
+            <a:off x="0" y="658368"/>
+            <a:ext cx="5120640" cy="5833872"/>
+          </a:xfrm>
+          <a:prstGeom prst="rect">
+            <a:avLst/>
+          </a:prstGeom>
+        </p:spPr>
+      </p:pic>
+      <p:sp>
+        <p:nvSpPr>
+          <p:cNvPr id="4" name="Text 1"/>
           <p:cNvSpPr/>
           <p:nvPr/>
         </p:nvSpPr>
         <p:spPr>
           <a:xfrm>
-            <a:off x="457200" y="1005840"/>
-            <a:ext cx="11277295" cy="731520"/>
+            <a:off x="5349240" y="1005840"/>
+            <a:ext cx="6522415" cy="731520"/>
           </a:xfrm>
           <a:prstGeom prst="rect">
             <a:avLst/>
@@ -21576,7 +22048,9 @@
           <a:ln/>
         </p:spPr>
         <p:txBody>
-          <a:bodyPr wrap="square" lIns="0" tIns="0" rIns="0" bIns="0" rtlCol="0" anchor="ctr"/>
+          <a:bodyPr wrap="square" lIns="0" tIns="0" rIns="0" bIns="0" rtlCol="0" anchor="ctr">
+            <a:normAutofit/>
+          </a:bodyPr>
           <a:lstStyle/>
           <a:p>
             <a:pPr algn="ctr" indent="0" marL="0">
@@ -21591,6 +22065,438 @@
                 <a:ea typeface="Times New Roman" pitchFamily="34" charset="-122"/>
                 <a:cs typeface="Times New Roman" pitchFamily="34" charset="-120"/>
               </a:rPr>
+              <a:t>Homework</a:t>
+            </a:r>
+            <a:endParaRPr lang="en-US" sz="3600" dirty="0"/>
+          </a:p>
+        </p:txBody>
+      </p:sp>
+      <p:sp>
+        <p:nvSpPr>
+          <p:cNvPr id="5" name="Text 2"/>
+          <p:cNvSpPr/>
+          <p:nvPr/>
+        </p:nvSpPr>
+        <p:spPr>
+          <a:xfrm>
+            <a:off x="5349240" y="1783080"/>
+            <a:ext cx="6522415" cy="4663440"/>
+          </a:xfrm>
+          <a:prstGeom prst="rect">
+            <a:avLst/>
+          </a:prstGeom>
+          <a:noFill/>
+          <a:ln/>
+        </p:spPr>
+        <p:txBody>
+          <a:bodyPr wrap="square" lIns="0" tIns="0" rIns="0" bIns="0" rtlCol="0" anchor="t"/>
+          <a:lstStyle/>
+          <a:p>
+            <a:pPr algn="l" indent="0" marL="0">
+              <a:spcAft>
+                <a:spcPts val="800"/>
+              </a:spcAft>
+              <a:buNone/>
+            </a:pPr>
+            <a:r>
+              <a:rPr lang="en-US" sz="4000" dirty="0">
+                <a:solidFill>
+                  <a:srgbClr val="111111"/>
+                </a:solidFill>
+                <a:latin typeface="Times New Roman" pitchFamily="34" charset="0"/>
+                <a:ea typeface="Times New Roman" pitchFamily="34" charset="-122"/>
+                <a:cs typeface="Times New Roman" pitchFamily="34" charset="-120"/>
+              </a:rPr>
+              <a:t>Name three types of graphs.</a:t>
+            </a:r>
+            <a:endParaRPr lang="en-US" sz="4000" dirty="0"/>
+          </a:p>
+        </p:txBody>
+      </p:sp>
+      <p:sp>
+        <p:nvSpPr>
+          <p:cNvPr id="25" name="Slide Number Placeholder 0"/>
+          <p:cNvSpPr>
+            <a:spLocks noGrp="1"/>
+          </p:cNvSpPr>
+          <p:nvPr>
+            <p:ph type="sldNum" sz="quarter" idx="4294967295"/>
+          </p:nvPr>
+        </p:nvSpPr>
+        <p:spPr>
+          <a:xfrm>
+            <a:off x="27432" y="91440"/>
+            <a:ext cx="585216" cy="475488"/>
+          </a:xfrm>
+          <a:prstGeom prst="rect">
+            <a:avLst/>
+          </a:prstGeom>
+          <a:extLst>
+            <a:ext uri="{C572A759-6A51-4108-AA02-DFA0A04FC94B}">
+              <ma14:wrappingTextBoxFlag xmlns:ma14="http://schemas.microsoft.com/office/mac/drawingml/2011/main" val="0"/>
+            </a:ext>
+          </a:extLst>
+        </p:spPr>
+        <p:txBody>
+          <a:bodyPr/>
+          <a:lstStyle>
+            <a:lvl1pPr>
+              <a:defRPr sz="2000">
+                <a:solidFill>
+                  <a:srgbClr val="FFFFFF"/>
+                </a:solidFill>
+                <a:latin typeface="Calibri"/>
+                <a:ea typeface="Calibri"/>
+                <a:cs typeface="Calibri"/>
+              </a:defRPr>
+            </a:lvl1pPr>
+          </a:lstStyle>
+          <a:p>
+            <a:pPr algn="ctr"/>
+            <a:fld id="{F7021451-1387-4CA6-816F-3879F97B5CBC}" type="slidenum">
+              <a:rPr b="1" lang="en-US"/>
+              <a:t>60</a:t>
+            </a:fld>
+            <a:endParaRPr lang="en-US"/>
+          </a:p>
+        </p:txBody>
+      </p:sp>
+    </p:spTree>
+  </p:cSld>
+  <p:clrMapOvr>
+    <a:masterClrMapping/>
+  </p:clrMapOvr>
+</p:sld>
+</file>
+
+<file path=ppt/slides/slide61.xml><?xml version="1.0" encoding="utf-8"?>
+<p:sld xmlns:a="http://schemas.openxmlformats.org/drawingml/2006/main" xmlns:r="http://schemas.openxmlformats.org/officeDocument/2006/relationships" xmlns:p="http://schemas.openxmlformats.org/presentationml/2006/main">
+  <p:cSld name="Slide 61">
+    <p:spTree>
+      <p:nvGrpSpPr>
+        <p:cNvPr id="1" name=""/>
+        <p:cNvGrpSpPr/>
+        <p:nvPr/>
+      </p:nvGrpSpPr>
+      <p:grpSpPr>
+        <a:xfrm>
+          <a:off x="0" y="0"/>
+          <a:ext cx="0" cy="0"/>
+          <a:chOff x="0" y="0"/>
+          <a:chExt cx="0" cy="0"/>
+        </a:xfrm>
+      </p:grpSpPr>
+      <p:sp>
+        <p:nvSpPr>
+          <p:cNvPr id="2" name="Text 0"/>
+          <p:cNvSpPr/>
+          <p:nvPr/>
+        </p:nvSpPr>
+        <p:spPr>
+          <a:xfrm>
+            <a:off x="457200" y="713232"/>
+            <a:ext cx="11368735" cy="274320"/>
+          </a:xfrm>
+          <a:prstGeom prst="rect">
+            <a:avLst/>
+          </a:prstGeom>
+          <a:noFill/>
+          <a:ln/>
+        </p:spPr>
+        <p:txBody>
+          <a:bodyPr wrap="square" lIns="0" tIns="0" rIns="0" bIns="0" rtlCol="0" anchor="ctr"/>
+          <a:lstStyle/>
+          <a:p>
+            <a:pPr algn="r" indent="0" marL="0">
+              <a:buNone/>
+            </a:pPr>
+            <a:r>
+              <a:rPr lang="en-US" sz="1400" b="1" dirty="0">
+                <a:solidFill>
+                  <a:srgbClr val="1C3F6E"/>
+                </a:solidFill>
+                <a:latin typeface="Calibri" pitchFamily="34" charset="0"/>
+                <a:ea typeface="Calibri" pitchFamily="34" charset="-122"/>
+                <a:cs typeface="Calibri" pitchFamily="34" charset="-120"/>
+              </a:rPr>
+              <a:t>NEXT LESSON</a:t>
+            </a:r>
+            <a:endParaRPr lang="en-US" sz="1400" dirty="0"/>
+          </a:p>
+        </p:txBody>
+      </p:sp>
+      <p:pic>
+        <p:nvPicPr>
+          <p:cNvPr id="3" name="Image 0" descr="/home/claude/f4/img/minesec_sheet.png">    </p:cNvPr>
+          <p:cNvPicPr>
+            <a:picLocks noChangeAspect="1"/>
+          </p:cNvPicPr>
+          <p:nvPr/>
+        </p:nvPicPr>
+        <p:blipFill>
+          <a:blip r:embed="rId1"/>
+          <a:stretch>
+            <a:fillRect/>
+          </a:stretch>
+        </p:blipFill>
+        <p:spPr>
+          <a:xfrm>
+            <a:off x="0" y="658368"/>
+            <a:ext cx="5120640" cy="5833872"/>
+          </a:xfrm>
+          <a:prstGeom prst="rect">
+            <a:avLst/>
+          </a:prstGeom>
+        </p:spPr>
+      </p:pic>
+      <p:sp>
+        <p:nvSpPr>
+          <p:cNvPr id="4" name="Text 1"/>
+          <p:cNvSpPr/>
+          <p:nvPr/>
+        </p:nvSpPr>
+        <p:spPr>
+          <a:xfrm>
+            <a:off x="5349240" y="1005840"/>
+            <a:ext cx="6522415" cy="731520"/>
+          </a:xfrm>
+          <a:prstGeom prst="rect">
+            <a:avLst/>
+          </a:prstGeom>
+          <a:noFill/>
+          <a:ln/>
+        </p:spPr>
+        <p:txBody>
+          <a:bodyPr wrap="square" lIns="0" tIns="0" rIns="0" bIns="0" rtlCol="0" anchor="ctr">
+            <a:normAutofit/>
+          </a:bodyPr>
+          <a:lstStyle/>
+          <a:p>
+            <a:pPr algn="ctr" indent="0" marL="0">
+              <a:buNone/>
+            </a:pPr>
+            <a:r>
+              <a:rPr lang="en-US" sz="3600" b="1" dirty="0">
+                <a:solidFill>
+                  <a:srgbClr val="990011"/>
+                </a:solidFill>
+                <a:latin typeface="Times New Roman" pitchFamily="34" charset="0"/>
+                <a:ea typeface="Times New Roman" pitchFamily="34" charset="-122"/>
+                <a:cs typeface="Times New Roman" pitchFamily="34" charset="-120"/>
+              </a:rPr>
+              <a:t>Next Lesson</a:t>
+            </a:r>
+            <a:endParaRPr lang="en-US" sz="3600" dirty="0"/>
+          </a:p>
+        </p:txBody>
+      </p:sp>
+      <p:sp>
+        <p:nvSpPr>
+          <p:cNvPr id="5" name="Text 2"/>
+          <p:cNvSpPr/>
+          <p:nvPr/>
+        </p:nvSpPr>
+        <p:spPr>
+          <a:xfrm>
+            <a:off x="5349240" y="1783080"/>
+            <a:ext cx="6522415" cy="4663440"/>
+          </a:xfrm>
+          <a:prstGeom prst="rect">
+            <a:avLst/>
+          </a:prstGeom>
+          <a:noFill/>
+          <a:ln/>
+        </p:spPr>
+        <p:txBody>
+          <a:bodyPr wrap="square" lIns="0" tIns="0" rIns="0" bIns="0" rtlCol="0" anchor="ctr"/>
+          <a:lstStyle/>
+          <a:p>
+            <a:pPr algn="ctr" indent="0" marL="0">
+              <a:spcAft>
+                <a:spcPts val="800"/>
+              </a:spcAft>
+              <a:buNone/>
+            </a:pPr>
+            <a:r>
+              <a:rPr lang="en-US" sz="4000" b="1" dirty="0">
+                <a:solidFill>
+                  <a:srgbClr val="111111"/>
+                </a:solidFill>
+                <a:latin typeface="Times New Roman" pitchFamily="34" charset="0"/>
+                <a:ea typeface="Times New Roman" pitchFamily="34" charset="-122"/>
+                <a:cs typeface="Times New Roman" pitchFamily="34" charset="-120"/>
+              </a:rPr>
+              <a:t>Our next lesson will be on:</a:t>
+            </a:r>
+            <a:endParaRPr lang="en-US" sz="4000" dirty="0"/>
+          </a:p>
+          <a:p>
+            <a:pPr algn="ctr" indent="0" marL="0">
+              <a:spcAft>
+                <a:spcPts val="800"/>
+              </a:spcAft>
+              <a:buNone/>
+            </a:pPr>
+            <a:r>
+              <a:rPr lang="en-US" sz="4000" b="1" dirty="0">
+                <a:solidFill>
+                  <a:srgbClr val="990011"/>
+                </a:solidFill>
+                <a:latin typeface="Times New Roman" pitchFamily="34" charset="0"/>
+                <a:ea typeface="Times New Roman" pitchFamily="34" charset="-122"/>
+                <a:cs typeface="Times New Roman" pitchFamily="34" charset="-120"/>
+              </a:rPr>
+              <a:t>Quantitative Techniques 4: Plotting and Interpreting Graphical Tools</a:t>
+            </a:r>
+            <a:endParaRPr lang="en-US" sz="4000" dirty="0"/>
+          </a:p>
+        </p:txBody>
+      </p:sp>
+      <p:sp>
+        <p:nvSpPr>
+          <p:cNvPr id="25" name="Slide Number Placeholder 0"/>
+          <p:cNvSpPr>
+            <a:spLocks noGrp="1"/>
+          </p:cNvSpPr>
+          <p:nvPr>
+            <p:ph type="sldNum" sz="quarter" idx="4294967295"/>
+          </p:nvPr>
+        </p:nvSpPr>
+        <p:spPr>
+          <a:xfrm>
+            <a:off x="27432" y="91440"/>
+            <a:ext cx="585216" cy="475488"/>
+          </a:xfrm>
+          <a:prstGeom prst="rect">
+            <a:avLst/>
+          </a:prstGeom>
+          <a:extLst>
+            <a:ext uri="{C572A759-6A51-4108-AA02-DFA0A04FC94B}">
+              <ma14:wrappingTextBoxFlag xmlns:ma14="http://schemas.microsoft.com/office/mac/drawingml/2011/main" val="0"/>
+            </a:ext>
+          </a:extLst>
+        </p:spPr>
+        <p:txBody>
+          <a:bodyPr/>
+          <a:lstStyle>
+            <a:lvl1pPr>
+              <a:defRPr sz="2000">
+                <a:solidFill>
+                  <a:srgbClr val="FFFFFF"/>
+                </a:solidFill>
+                <a:latin typeface="Calibri"/>
+                <a:ea typeface="Calibri"/>
+                <a:cs typeface="Calibri"/>
+              </a:defRPr>
+            </a:lvl1pPr>
+          </a:lstStyle>
+          <a:p>
+            <a:pPr algn="ctr"/>
+            <a:fld id="{F7021451-1387-4CA6-816F-3879F97B5CBC}" type="slidenum">
+              <a:rPr b="1" lang="en-US"/>
+              <a:t>61</a:t>
+            </a:fld>
+            <a:endParaRPr lang="en-US"/>
+          </a:p>
+        </p:txBody>
+      </p:sp>
+    </p:spTree>
+  </p:cSld>
+  <p:clrMapOvr>
+    <a:masterClrMapping/>
+  </p:clrMapOvr>
+</p:sld>
+</file>
+
+<file path=ppt/slides/slide62.xml><?xml version="1.0" encoding="utf-8"?>
+<p:sld xmlns:a="http://schemas.openxmlformats.org/drawingml/2006/main" xmlns:r="http://schemas.openxmlformats.org/officeDocument/2006/relationships" xmlns:p="http://schemas.openxmlformats.org/presentationml/2006/main">
+  <p:cSld name="Slide 62">
+    <p:spTree>
+      <p:nvGrpSpPr>
+        <p:cNvPr id="1" name=""/>
+        <p:cNvGrpSpPr/>
+        <p:nvPr/>
+      </p:nvGrpSpPr>
+      <p:grpSpPr>
+        <a:xfrm>
+          <a:off x="0" y="0"/>
+          <a:ext cx="0" cy="0"/>
+          <a:chOff x="0" y="0"/>
+          <a:chExt cx="0" cy="0"/>
+        </a:xfrm>
+      </p:grpSpPr>
+      <p:sp>
+        <p:nvSpPr>
+          <p:cNvPr id="2" name="Text 0"/>
+          <p:cNvSpPr/>
+          <p:nvPr/>
+        </p:nvSpPr>
+        <p:spPr>
+          <a:xfrm>
+            <a:off x="457200" y="713232"/>
+            <a:ext cx="11368735" cy="274320"/>
+          </a:xfrm>
+          <a:prstGeom prst="rect">
+            <a:avLst/>
+          </a:prstGeom>
+          <a:noFill/>
+          <a:ln/>
+        </p:spPr>
+        <p:txBody>
+          <a:bodyPr wrap="square" lIns="0" tIns="0" rIns="0" bIns="0" rtlCol="0" anchor="ctr"/>
+          <a:lstStyle/>
+          <a:p>
+            <a:pPr algn="r" indent="0" marL="0">
+              <a:buNone/>
+            </a:pPr>
+            <a:r>
+              <a:rPr lang="en-US" sz="1400" b="1" dirty="0">
+                <a:solidFill>
+                  <a:srgbClr val="1C3F6E"/>
+                </a:solidFill>
+                <a:latin typeface="Calibri" pitchFamily="34" charset="0"/>
+                <a:ea typeface="Calibri" pitchFamily="34" charset="-122"/>
+                <a:cs typeface="Calibri" pitchFamily="34" charset="-120"/>
+              </a:rPr>
+              <a:t>BILINGUAL GAME</a:t>
+            </a:r>
+            <a:endParaRPr lang="en-US" sz="1400" dirty="0"/>
+          </a:p>
+        </p:txBody>
+      </p:sp>
+      <p:sp>
+        <p:nvSpPr>
+          <p:cNvPr id="3" name="Text 1"/>
+          <p:cNvSpPr/>
+          <p:nvPr/>
+        </p:nvSpPr>
+        <p:spPr>
+          <a:xfrm>
+            <a:off x="457200" y="1005840"/>
+            <a:ext cx="11277295" cy="731520"/>
+          </a:xfrm>
+          <a:prstGeom prst="rect">
+            <a:avLst/>
+          </a:prstGeom>
+          <a:noFill/>
+          <a:ln/>
+        </p:spPr>
+        <p:txBody>
+          <a:bodyPr wrap="square" lIns="0" tIns="0" rIns="0" bIns="0" rtlCol="0" anchor="ctr"/>
+          <a:lstStyle/>
+          <a:p>
+            <a:pPr algn="ctr" indent="0" marL="0">
+              <a:buNone/>
+            </a:pPr>
+            <a:r>
+              <a:rPr lang="en-US" sz="3600" b="1" dirty="0">
+                <a:solidFill>
+                  <a:srgbClr val="990011"/>
+                </a:solidFill>
+                <a:latin typeface="Times New Roman" pitchFamily="34" charset="0"/>
+                <a:ea typeface="Times New Roman" pitchFamily="34" charset="-122"/>
+                <a:cs typeface="Times New Roman" pitchFamily="34" charset="-120"/>
+              </a:rPr>
               <a:t>Bilingual Game (Jeu Bilingue)</a:t>
             </a:r>
             <a:endParaRPr lang="en-US" sz="3600" dirty="0"/>
@@ -21599,7 +22505,7 @@
       </p:sp>
       <p:graphicFrame>
         <p:nvGraphicFramePr>
-          <p:cNvPr id="61" name="Table 0"/>
+          <p:cNvPr id="63" name="Table 0"/>
           <p:cNvGraphicFramePr>
             <a:graphicFrameLocks noGrp="1"/>
           </p:cNvGraphicFramePr>
@@ -22635,7 +23541,7 @@
             <a:pPr algn="ctr"/>
             <a:fld id="{F7021451-1387-4CA6-816F-3879F97B5CBC}" type="slidenum">
               <a:rPr b="1" lang="en-US"/>
-              <a:t>60</a:t>
+              <a:t>62</a:t>
             </a:fld>
             <a:endParaRPr lang="en-US"/>
           </a:p>
@@ -22649,9 +23555,9 @@
 </p:sld>
 </file>
 
-<file path=ppt/slides/slide61.xml><?xml version="1.0" encoding="utf-8"?>
+<file path=ppt/slides/slide63.xml><?xml version="1.0" encoding="utf-8"?>
 <p:sld xmlns:a="http://schemas.openxmlformats.org/drawingml/2006/main" xmlns:r="http://schemas.openxmlformats.org/officeDocument/2006/relationships" xmlns:p="http://schemas.openxmlformats.org/presentationml/2006/main">
-  <p:cSld name="Slide 61">
+  <p:cSld name="Slide 63">
     <p:spTree>
       <p:nvGrpSpPr>
         <p:cNvPr id="1" name=""/>
@@ -22746,7 +23652,7 @@
       </p:sp>
       <p:graphicFrame>
         <p:nvGraphicFramePr>
-          <p:cNvPr id="62" name="Table 0"/>
+          <p:cNvPr id="64" name="Table 0"/>
           <p:cNvGraphicFramePr>
             <a:graphicFrameLocks noGrp="1"/>
           </p:cNvGraphicFramePr>
@@ -23368,7 +24274,7 @@
             <a:pPr algn="ctr"/>
             <a:fld id="{F7021451-1387-4CA6-816F-3879F97B5CBC}" type="slidenum">
               <a:rPr b="1" lang="en-US"/>
-              <a:t>61</a:t>
+              <a:t>63</a:t>
             </a:fld>
             <a:endParaRPr lang="en-US"/>
           </a:p>
@@ -23382,9 +24288,9 @@
 </p:sld>
 </file>
 
-<file path=ppt/slides/slide62.xml><?xml version="1.0" encoding="utf-8"?>
+<file path=ppt/slides/slide64.xml><?xml version="1.0" encoding="utf-8"?>
 <p:sld xmlns:a="http://schemas.openxmlformats.org/drawingml/2006/main" xmlns:r="http://schemas.openxmlformats.org/officeDocument/2006/relationships" xmlns:p="http://schemas.openxmlformats.org/presentationml/2006/main">
-  <p:cSld name="Slide 62">
+  <p:cSld name="Slide 64">
     <p:spTree>
       <p:nvGrpSpPr>
         <p:cNvPr id="1" name=""/>
@@ -23479,7 +24385,7 @@
       </p:sp>
       <p:graphicFrame>
         <p:nvGraphicFramePr>
-          <p:cNvPr id="63" name="Table 0"/>
+          <p:cNvPr id="65" name="Table 0"/>
           <p:cNvGraphicFramePr>
             <a:graphicFrameLocks noGrp="1"/>
           </p:cNvGraphicFramePr>
@@ -23589,7 +24495,7 @@
                           <a:ea typeface="Calibri" pitchFamily="34" charset="-122"/>
                           <a:cs typeface="Calibri" pitchFamily="34" charset="-120"/>
                         </a:rPr>
-                        <a:t>DEFINITIONS; Meaning and Uses of Spearman's Rank Correlation; Formula and Steps of Calculation; Worked Example: Slope Angle and Soil Depth; Interpretation and Significance.</a:t>
+                        <a:t>DEFINITIONS; Meaning and Uses of Spearman's Rank Correlation; The Formula; The Steps; Worked Example: Slope Angle and Soil Depth; Interpretation and Significance.</a:t>
                       </a:r>
                       <a:endParaRPr lang="en-US" sz="1600" dirty="0">
                         <a:latin typeface="Calibri" charset="0"/>
@@ -24239,7 +25145,7 @@
             <a:pPr algn="ctr"/>
             <a:fld id="{F7021451-1387-4CA6-816F-3879F97B5CBC}" type="slidenum">
               <a:rPr b="1" lang="en-US"/>
-              <a:t>62</a:t>
+              <a:t>64</a:t>
             </a:fld>
             <a:endParaRPr lang="en-US"/>
           </a:p>
@@ -24253,9 +25159,9 @@
 </p:sld>
 </file>
 
-<file path=ppt/slides/slide63.xml><?xml version="1.0" encoding="utf-8"?>
+<file path=ppt/slides/slide65.xml><?xml version="1.0" encoding="utf-8"?>
 <p:sld xmlns:a="http://schemas.openxmlformats.org/drawingml/2006/main" xmlns:r="http://schemas.openxmlformats.org/officeDocument/2006/relationships" xmlns:p="http://schemas.openxmlformats.org/presentationml/2006/main">
-  <p:cSld name="Slide 63">
+  <p:cSld name="Slide 65">
     <p:spTree>
       <p:nvGrpSpPr>
         <p:cNvPr id="1" name=""/>
@@ -24564,7 +25470,7 @@
             <a:pPr algn="ctr"/>
             <a:fld id="{F7021451-1387-4CA6-816F-3879F97B5CBC}" type="slidenum">
               <a:rPr b="1" lang="en-US"/>
-              <a:t>63</a:t>
+              <a:t>65</a:t>
             </a:fld>
             <a:endParaRPr lang="en-US"/>
           </a:p>
@@ -24578,9 +25484,9 @@
 </p:sld>
 </file>
 
-<file path=ppt/slides/slide64.xml><?xml version="1.0" encoding="utf-8"?>
+<file path=ppt/slides/slide66.xml><?xml version="1.0" encoding="utf-8"?>
 <p:sld xmlns:a="http://schemas.openxmlformats.org/drawingml/2006/main" xmlns:r="http://schemas.openxmlformats.org/officeDocument/2006/relationships" xmlns:p="http://schemas.openxmlformats.org/presentationml/2006/main">
-  <p:cSld name="Slide 64">
+  <p:cSld name="Slide 66">
     <p:spTree>
       <p:nvGrpSpPr>
         <p:cNvPr id="1" name=""/>
@@ -24847,7 +25753,7 @@
             <a:pPr algn="ctr"/>
             <a:fld id="{F7021451-1387-4CA6-816F-3879F97B5CBC}" type="slidenum">
               <a:rPr b="1" lang="en-US"/>
-              <a:t>64</a:t>
+              <a:t>66</a:t>
             </a:fld>
             <a:endParaRPr lang="en-US"/>
           </a:p>
